--- a/static/ppts/G6_Math_Volume.pptx
+++ b/static/ppts/G6_Math_Volume.pptx
@@ -8,11 +8,9 @@
     <p:sldId id="256" r:id="rId2"/>
     <p:sldId id="257" r:id="rId3"/>
     <p:sldId id="258" r:id="rId4"/>
-    <p:sldId id="259" r:id="rId5"/>
-    <p:sldId id="260" r:id="rId6"/>
   </p:sldIdLst>
   <p:notesMasterIdLst>
-    <p:notesMasterId r:id="rId7"/>
+    <p:notesMasterId r:id="rId5"/>
   </p:notesMasterIdLst>
   <p:sldSz cx="9144000" cy="5143500"/>
   <p:notesSz cx="5143500" cy="9144000"/>
@@ -706,182 +704,6 @@
             <a:fld id="{F7021451-1387-4CA6-816F-3879F97B5CBC}" type="slidenum">
               <a:rPr lang="en-US"/>
               <a:t>3</a:t>
-            </a:fld>
-            <a:endParaRPr lang="en-US"/>
-          </a:p>
-        </p:txBody>
-      </p:sp>
-    </p:spTree>
-    <p:extLst>
-      <p:ext uri="{BB962C8B-B14F-4D97-AF65-F5344CB8AC3E}">
-        <p14:creationId xmlns:p14="http://schemas.microsoft.com/office/powerpoint/2010/main" val="1024086991"/>
-      </p:ext>
-    </p:extLst>
-  </p:cSld>
-  <p:clrMapOvr>
-    <a:masterClrMapping/>
-  </p:clrMapOvr>
-</p:notes>
-</file>
-
-<file path=ppt/notesSlides/notesSlide4.xml><?xml version="1.0" encoding="utf-8"?>
-<p:notes xmlns:a="http://schemas.openxmlformats.org/drawingml/2006/main" xmlns:r="http://schemas.openxmlformats.org/officeDocument/2006/relationships" xmlns:p="http://schemas.openxmlformats.org/presentationml/2006/main">
-  <p:cSld>
-    <p:spTree>
-      <p:nvGrpSpPr>
-        <p:cNvPr id="1" name=""/>
-        <p:cNvGrpSpPr/>
-        <p:nvPr/>
-      </p:nvGrpSpPr>
-      <p:grpSpPr>
-        <a:xfrm>
-          <a:off x="0" y="0"/>
-          <a:ext cx="0" cy="0"/>
-          <a:chOff x="0" y="0"/>
-          <a:chExt cx="0" cy="0"/>
-        </a:xfrm>
-      </p:grpSpPr>
-      <p:sp>
-        <p:nvSpPr>
-          <p:cNvPr id="2" name="Slide Image Placeholder 1"/>
-          <p:cNvSpPr>
-            <a:spLocks noGrp="1" noRot="1" noChangeAspect="1"/>
-          </p:cNvSpPr>
-          <p:nvPr>
-            <p:ph type="sldImg"/>
-          </p:nvPr>
-        </p:nvSpPr>
-        <p:spPr/>
-      </p:sp>
-      <p:sp>
-        <p:nvSpPr>
-          <p:cNvPr id="3" name="Notes Placeholder 2"/>
-          <p:cNvSpPr>
-            <a:spLocks noGrp="1"/>
-          </p:cNvSpPr>
-          <p:nvPr>
-            <p:ph type="body" idx="1"/>
-          </p:nvPr>
-        </p:nvSpPr>
-        <p:spPr/>
-        <p:txBody>
-          <a:bodyPr/>
-          <a:lstStyle/>
-          <a:p>
-            <a:r>
-              <a:rPr lang="en-US" dirty="0"/>
-              <a:t/>
-            </a:r>
-            <a:endParaRPr lang="en-US" dirty="0"/>
-          </a:p>
-        </p:txBody>
-      </p:sp>
-      <p:sp>
-        <p:nvSpPr>
-          <p:cNvPr id="4" name="Slide Number Placeholder 3"/>
-          <p:cNvSpPr>
-            <a:spLocks noGrp="1"/>
-          </p:cNvSpPr>
-          <p:nvPr>
-            <p:ph type="sldNum" sz="quarter" idx="10"/>
-          </p:nvPr>
-        </p:nvSpPr>
-        <p:spPr/>
-        <p:txBody>
-          <a:bodyPr/>
-          <a:lstStyle/>
-          <a:p>
-            <a:fld id="{F7021451-1387-4CA6-816F-3879F97B5CBC}" type="slidenum">
-              <a:rPr lang="en-US"/>
-              <a:t>4</a:t>
-            </a:fld>
-            <a:endParaRPr lang="en-US"/>
-          </a:p>
-        </p:txBody>
-      </p:sp>
-    </p:spTree>
-    <p:extLst>
-      <p:ext uri="{BB962C8B-B14F-4D97-AF65-F5344CB8AC3E}">
-        <p14:creationId xmlns:p14="http://schemas.microsoft.com/office/powerpoint/2010/main" val="1024086991"/>
-      </p:ext>
-    </p:extLst>
-  </p:cSld>
-  <p:clrMapOvr>
-    <a:masterClrMapping/>
-  </p:clrMapOvr>
-</p:notes>
-</file>
-
-<file path=ppt/notesSlides/notesSlide5.xml><?xml version="1.0" encoding="utf-8"?>
-<p:notes xmlns:a="http://schemas.openxmlformats.org/drawingml/2006/main" xmlns:r="http://schemas.openxmlformats.org/officeDocument/2006/relationships" xmlns:p="http://schemas.openxmlformats.org/presentationml/2006/main">
-  <p:cSld>
-    <p:spTree>
-      <p:nvGrpSpPr>
-        <p:cNvPr id="1" name=""/>
-        <p:cNvGrpSpPr/>
-        <p:nvPr/>
-      </p:nvGrpSpPr>
-      <p:grpSpPr>
-        <a:xfrm>
-          <a:off x="0" y="0"/>
-          <a:ext cx="0" cy="0"/>
-          <a:chOff x="0" y="0"/>
-          <a:chExt cx="0" cy="0"/>
-        </a:xfrm>
-      </p:grpSpPr>
-      <p:sp>
-        <p:nvSpPr>
-          <p:cNvPr id="2" name="Slide Image Placeholder 1"/>
-          <p:cNvSpPr>
-            <a:spLocks noGrp="1" noRot="1" noChangeAspect="1"/>
-          </p:cNvSpPr>
-          <p:nvPr>
-            <p:ph type="sldImg"/>
-          </p:nvPr>
-        </p:nvSpPr>
-        <p:spPr/>
-      </p:sp>
-      <p:sp>
-        <p:nvSpPr>
-          <p:cNvPr id="3" name="Notes Placeholder 2"/>
-          <p:cNvSpPr>
-            <a:spLocks noGrp="1"/>
-          </p:cNvSpPr>
-          <p:nvPr>
-            <p:ph type="body" idx="1"/>
-          </p:nvPr>
-        </p:nvSpPr>
-        <p:spPr/>
-        <p:txBody>
-          <a:bodyPr/>
-          <a:lstStyle/>
-          <a:p>
-            <a:r>
-              <a:rPr lang="en-US" dirty="0"/>
-              <a:t/>
-            </a:r>
-            <a:endParaRPr lang="en-US" dirty="0"/>
-          </a:p>
-        </p:txBody>
-      </p:sp>
-      <p:sp>
-        <p:nvSpPr>
-          <p:cNvPr id="4" name="Slide Number Placeholder 3"/>
-          <p:cNvSpPr>
-            <a:spLocks noGrp="1"/>
-          </p:cNvSpPr>
-          <p:nvPr>
-            <p:ph type="sldNum" sz="quarter" idx="10"/>
-          </p:nvPr>
-        </p:nvSpPr>
-        <p:spPr/>
-        <p:txBody>
-          <a:bodyPr/>
-          <a:lstStyle/>
-          <a:p>
-            <a:fld id="{F7021451-1387-4CA6-816F-3879F97B5CBC}" type="slidenum">
-              <a:rPr lang="en-US"/>
-              <a:t>5</a:t>
             </a:fld>
             <a:endParaRPr lang="en-US"/>
           </a:p>
@@ -1210,6 +1032,13 @@
 <file path=ppt/slides/slide1.xml><?xml version="1.0" encoding="utf-8"?>
 <p:sld xmlns:a="http://schemas.openxmlformats.org/drawingml/2006/main" xmlns:r="http://schemas.openxmlformats.org/officeDocument/2006/relationships" xmlns:p="http://schemas.openxmlformats.org/presentationml/2006/main">
   <p:cSld name="Slide 1">
+    <p:bg>
+      <p:bgPr>
+        <a:solidFill>
+          <a:srgbClr val="1B2A4A"/>
+        </a:solidFill>
+      </p:bgPr>
+    </p:bg>
     <p:spTree>
       <p:nvGrpSpPr>
         <p:cNvPr id="1" name=""/>
@@ -1233,47 +1062,27 @@
         <p:spPr>
           <a:xfrm>
             <a:off x="0" y="0"/>
-            <a:ext cx="9144000" cy="5143500"/>
+            <a:ext cx="109728" cy="5143500"/>
           </a:xfrm>
           <a:prstGeom prst="rect">
             <a:avLst/>
           </a:prstGeom>
           <a:solidFill>
-            <a:srgbClr val="1B2A4A"/>
+            <a:srgbClr val="2A9D8F"/>
           </a:solidFill>
           <a:ln/>
         </p:spPr>
       </p:sp>
       <p:sp>
         <p:nvSpPr>
-          <p:cNvPr id="3" name="Shape 1"/>
+          <p:cNvPr id="3" name="Text 1"/>
           <p:cNvSpPr/>
           <p:nvPr/>
         </p:nvSpPr>
         <p:spPr>
           <a:xfrm>
-            <a:off x="0" y="4777740"/>
-            <a:ext cx="9144000" cy="365760"/>
-          </a:xfrm>
-          <a:prstGeom prst="rect">
-            <a:avLst/>
-          </a:prstGeom>
-          <a:solidFill>
-            <a:srgbClr val="2A9D8F"/>
-          </a:solidFill>
-          <a:ln/>
-        </p:spPr>
-      </p:sp>
-      <p:sp>
-        <p:nvSpPr>
-          <p:cNvPr id="4" name="Text 2"/>
-          <p:cNvSpPr/>
-          <p:nvPr/>
-        </p:nvSpPr>
-        <p:spPr>
-          <a:xfrm>
-            <a:off x="731520" y="1097280"/>
-            <a:ext cx="7680960" cy="457200"/>
+            <a:off x="731520" y="1280160"/>
+            <a:ext cx="7772400" cy="1371600"/>
           </a:xfrm>
           <a:prstGeom prst="rect">
             <a:avLst/>
@@ -1289,46 +1098,7 @@
               <a:buNone/>
             </a:pPr>
             <a:r>
-              <a:rPr lang="en-US" sz="1400" b="1" spc="400" kern="0" dirty="0">
-                <a:solidFill>
-                  <a:srgbClr val="2A9D8F"/>
-                </a:solidFill>
-                <a:latin typeface="Calibri" pitchFamily="34" charset="0"/>
-                <a:ea typeface="Calibri" pitchFamily="34" charset="-122"/>
-                <a:cs typeface="Calibri" pitchFamily="34" charset="-120"/>
-              </a:rPr>
-              <a:t>GRADE 6 MATHEMATICS</a:t>
-            </a:r>
-            <a:endParaRPr lang="en-US" sz="1400" dirty="0"/>
-          </a:p>
-        </p:txBody>
-      </p:sp>
-      <p:sp>
-        <p:nvSpPr>
-          <p:cNvPr id="5" name="Text 3"/>
-          <p:cNvSpPr/>
-          <p:nvPr/>
-        </p:nvSpPr>
-        <p:spPr>
-          <a:xfrm>
-            <a:off x="731520" y="1645920"/>
-            <a:ext cx="7680960" cy="1463040"/>
-          </a:xfrm>
-          <a:prstGeom prst="rect">
-            <a:avLst/>
-          </a:prstGeom>
-          <a:noFill/>
-          <a:ln/>
-        </p:spPr>
-        <p:txBody>
-          <a:bodyPr wrap="square" rtlCol="0" anchor="t"/>
-          <a:lstStyle/>
-          <a:p>
-            <a:pPr indent="0" marL="0">
-              <a:buNone/>
-            </a:pPr>
-            <a:r>
-              <a:rPr lang="en-US" sz="4000" b="1" dirty="0">
+              <a:rPr lang="en-US" sz="3600" b="1" dirty="0">
                 <a:solidFill>
                   <a:srgbClr val="FFFFFF"/>
                 </a:solidFill>
@@ -1338,20 +1108,20 @@
               </a:rPr>
               <a:t>Volume</a:t>
             </a:r>
-            <a:endParaRPr lang="en-US" sz="4000" dirty="0"/>
+            <a:endParaRPr lang="en-US" sz="3600" dirty="0"/>
           </a:p>
         </p:txBody>
       </p:sp>
       <p:sp>
         <p:nvSpPr>
-          <p:cNvPr id="6" name="Text 4"/>
+          <p:cNvPr id="4" name="Text 2"/>
           <p:cNvSpPr/>
           <p:nvPr/>
         </p:nvSpPr>
         <p:spPr>
           <a:xfrm>
-            <a:off x="731520" y="3200400"/>
-            <a:ext cx="7680960" cy="548640"/>
+            <a:off x="731520" y="2743200"/>
+            <a:ext cx="7772400" cy="548640"/>
           </a:xfrm>
           <a:prstGeom prst="rect">
             <a:avLst/>
@@ -1375,7 +1145,7 @@
                 <a:ea typeface="Calibri" pitchFamily="34" charset="-122"/>
                 <a:cs typeface="Calibri" pitchFamily="34" charset="-120"/>
               </a:rPr>
-              <a:t>The space inside a 3D shape</a:t>
+              <a:t>G6 Maths · Geometry</a:t>
             </a:r>
             <a:endParaRPr lang="en-US" sz="1600" dirty="0"/>
           </a:p>
@@ -1383,14 +1153,14 @@
       </p:sp>
       <p:sp>
         <p:nvSpPr>
-          <p:cNvPr id="7" name="Text 5"/>
+          <p:cNvPr id="5" name="Text 3"/>
           <p:cNvSpPr/>
           <p:nvPr/>
         </p:nvSpPr>
         <p:spPr>
           <a:xfrm>
-            <a:off x="731520" y="4206240"/>
-            <a:ext cx="3657600" cy="365760"/>
+            <a:off x="731520" y="4389120"/>
+            <a:ext cx="7772400" cy="457200"/>
           </a:xfrm>
           <a:prstGeom prst="rect">
             <a:avLst/>
@@ -1406,7 +1176,7 @@
               <a:buNone/>
             </a:pPr>
             <a:r>
-              <a:rPr lang="en-US" sz="1100" dirty="0">
+              <a:rPr lang="en-US" sz="1000" dirty="0">
                 <a:solidFill>
                   <a:srgbClr val="6B6660"/>
                 </a:solidFill>
@@ -1414,9 +1184,9 @@
                 <a:ea typeface="Calibri" pitchFamily="34" charset="-122"/>
                 <a:cs typeface="Calibri" pitchFamily="34" charset="-120"/>
               </a:rPr>
-              <a:t>Mr Zocchi · NIS</a:t>
-            </a:r>
-            <a:endParaRPr lang="en-US" sz="1100" dirty="0"/>
+              <a:t>Mr Zocchi · mrzocchi.com</a:t>
+            </a:r>
+            <a:endParaRPr lang="en-US" sz="1000" dirty="0"/>
           </a:p>
         </p:txBody>
       </p:sp>
@@ -1431,6 +1201,13 @@
 <file path=ppt/slides/slide2.xml><?xml version="1.0" encoding="utf-8"?>
 <p:sld xmlns:a="http://schemas.openxmlformats.org/drawingml/2006/main" xmlns:r="http://schemas.openxmlformats.org/officeDocument/2006/relationships" xmlns:p="http://schemas.openxmlformats.org/presentationml/2006/main">
   <p:cSld name="Slide 2">
+    <p:bg>
+      <p:bgPr>
+        <a:solidFill>
+          <a:srgbClr val="FFFFFF"/>
+        </a:solidFill>
+      </p:bgPr>
+    </p:bg>
     <p:spTree>
       <p:nvGrpSpPr>
         <p:cNvPr id="1" name=""/>
@@ -1454,26 +1231,6 @@
         <p:spPr>
           <a:xfrm>
             <a:off x="0" y="0"/>
-            <a:ext cx="9144000" cy="5143500"/>
-          </a:xfrm>
-          <a:prstGeom prst="rect">
-            <a:avLst/>
-          </a:prstGeom>
-          <a:solidFill>
-            <a:srgbClr val="FAF8F5"/>
-          </a:solidFill>
-          <a:ln/>
-        </p:spPr>
-      </p:sp>
-      <p:sp>
-        <p:nvSpPr>
-          <p:cNvPr id="3" name="Shape 1"/>
-          <p:cNvSpPr/>
-          <p:nvPr/>
-        </p:nvSpPr>
-        <p:spPr>
-          <a:xfrm>
-            <a:off x="0" y="0"/>
             <a:ext cx="9144000" cy="54864"/>
           </a:xfrm>
           <a:prstGeom prst="rect">
@@ -1487,14 +1244,14 @@
       </p:sp>
       <p:sp>
         <p:nvSpPr>
-          <p:cNvPr id="4" name="Text 2"/>
+          <p:cNvPr id="3" name="Text 1"/>
           <p:cNvSpPr/>
           <p:nvPr/>
         </p:nvSpPr>
         <p:spPr>
           <a:xfrm>
-            <a:off x="640080" y="320040"/>
-            <a:ext cx="7863840" cy="640080"/>
+            <a:off x="548640" y="274320"/>
+            <a:ext cx="8046720" cy="640080"/>
           </a:xfrm>
           <a:prstGeom prst="rect">
             <a:avLst/>
@@ -1518,7 +1275,7 @@
                 <a:ea typeface="Georgia" pitchFamily="34" charset="-122"/>
                 <a:cs typeface="Georgia" pitchFamily="34" charset="-120"/>
               </a:rPr>
-              <a:t>What Is Volume?</a:t>
+              <a:t>What is Volume?</a:t>
             </a:r>
             <a:endParaRPr lang="en-US" sz="2600" dirty="0"/>
           </a:p>
@@ -1526,14 +1283,14 @@
       </p:sp>
       <p:sp>
         <p:nvSpPr>
-          <p:cNvPr id="5" name="Text 3"/>
+          <p:cNvPr id="4" name="Text 2"/>
           <p:cNvSpPr/>
           <p:nvPr/>
         </p:nvSpPr>
         <p:spPr>
           <a:xfrm>
-            <a:off x="640080" y="1188720"/>
-            <a:ext cx="7863840" cy="3200400"/>
+            <a:off x="548640" y="1097280"/>
+            <a:ext cx="8046720" cy="3474720"/>
           </a:xfrm>
           <a:prstGeom prst="rect">
             <a:avLst/>
@@ -1546,9 +1303,9 @@
           <a:lstStyle/>
           <a:p>
             <a:pPr marL="342900" indent="-342900">
-              <a:lnSpc>
-                <a:spcPct val="140000"/>
-              </a:lnSpc>
+              <a:spcAft>
+                <a:spcPts val="800"/>
+              </a:spcAft>
               <a:buSzPct val="100000"/>
               <a:buChar char="•"/>
             </a:pPr>
@@ -1561,15 +1318,15 @@
                 <a:ea typeface="Calibri" pitchFamily="34" charset="-122"/>
                 <a:cs typeface="Calibri" pitchFamily="34" charset="-120"/>
               </a:rPr>
-              <a:t>Volume = the amount of space inside a 3D shape.</a:t>
+              <a:t>The amount of 3D space inside a solid shape</a:t>
             </a:r>
             <a:endParaRPr lang="en-US" sz="1500" dirty="0"/>
           </a:p>
           <a:p>
             <a:pPr marL="342900" indent="-342900">
-              <a:lnSpc>
-                <a:spcPct val="140000"/>
-              </a:lnSpc>
+              <a:spcAft>
+                <a:spcPts val="800"/>
+              </a:spcAft>
               <a:buSzPct val="100000"/>
               <a:buChar char="•"/>
             </a:pPr>
@@ -1582,15 +1339,15 @@
                 <a:ea typeface="Calibri" pitchFamily="34" charset="-122"/>
                 <a:cs typeface="Calibri" pitchFamily="34" charset="-120"/>
               </a:rPr>
-              <a:t>It tells you how much space the object takes up.</a:t>
+              <a:t>Measured in cubic units: cm³, m³</a:t>
             </a:r>
             <a:endParaRPr lang="en-US" sz="1500" dirty="0"/>
           </a:p>
           <a:p>
             <a:pPr marL="342900" indent="-342900">
-              <a:lnSpc>
-                <a:spcPct val="140000"/>
-              </a:lnSpc>
+              <a:spcAft>
+                <a:spcPts val="800"/>
+              </a:spcAft>
               <a:buSzPct val="100000"/>
               <a:buChar char="•"/>
             </a:pPr>
@@ -1603,15 +1360,15 @@
                 <a:ea typeface="Calibri" pitchFamily="34" charset="-122"/>
                 <a:cs typeface="Calibri" pitchFamily="34" charset="-120"/>
               </a:rPr>
-              <a:t>Volume is measured in cubed units: cm³, m³.</a:t>
+              <a:t>Cuboid: V = length × width × height</a:t>
             </a:r>
             <a:endParaRPr lang="en-US" sz="1500" dirty="0"/>
           </a:p>
           <a:p>
             <a:pPr marL="342900" indent="-342900">
-              <a:lnSpc>
-                <a:spcPct val="140000"/>
-              </a:lnSpc>
+              <a:spcAft>
+                <a:spcPts val="800"/>
+              </a:spcAft>
               <a:buSzPct val="100000"/>
               <a:buChar char="•"/>
             </a:pPr>
@@ -1624,9 +1381,87 @@
                 <a:ea typeface="Calibri" pitchFamily="34" charset="-122"/>
                 <a:cs typeface="Calibri" pitchFamily="34" charset="-120"/>
               </a:rPr>
-              <a:t>You multiply three lengths — that's why it's cubed.</a:t>
+              <a:t>Cube: V = side × side × side = side³</a:t>
             </a:r>
             <a:endParaRPr lang="en-US" sz="1500" dirty="0"/>
+          </a:p>
+          <a:p>
+            <a:pPr marL="342900" indent="-342900">
+              <a:spcAft>
+                <a:spcPts val="800"/>
+              </a:spcAft>
+              <a:buSzPct val="100000"/>
+              <a:buChar char="•"/>
+            </a:pPr>
+            <a:r>
+              <a:rPr lang="en-US" sz="1500" dirty="0">
+                <a:solidFill>
+                  <a:srgbClr val="3D3A36"/>
+                </a:solidFill>
+                <a:latin typeface="Calibri" pitchFamily="34" charset="0"/>
+                <a:ea typeface="Calibri" pitchFamily="34" charset="-122"/>
+                <a:cs typeface="Calibri" pitchFamily="34" charset="-120"/>
+              </a:rPr>
+              <a:t>Count cubes: each small cube = 1 cm³</a:t>
+            </a:r>
+            <a:endParaRPr lang="en-US" sz="1500" dirty="0"/>
+          </a:p>
+          <a:p>
+            <a:pPr marL="342900" indent="-342900">
+              <a:spcAft>
+                <a:spcPts val="800"/>
+              </a:spcAft>
+              <a:buSzPct val="100000"/>
+              <a:buChar char="•"/>
+            </a:pPr>
+            <a:r>
+              <a:rPr lang="en-US" sz="1500" dirty="0">
+                <a:solidFill>
+                  <a:srgbClr val="3D3A36"/>
+                </a:solidFill>
+                <a:latin typeface="Calibri" pitchFamily="34" charset="0"/>
+                <a:ea typeface="Calibri" pitchFamily="34" charset="-122"/>
+                <a:cs typeface="Calibri" pitchFamily="34" charset="-120"/>
+              </a:rPr>
+              <a:t>For compound 3D shapes: split into cuboids, calculate each, add together</a:t>
+            </a:r>
+            <a:endParaRPr lang="en-US" sz="1500" dirty="0"/>
+          </a:p>
+        </p:txBody>
+      </p:sp>
+      <p:sp>
+        <p:nvSpPr>
+          <p:cNvPr id="5" name="Text 3"/>
+          <p:cNvSpPr/>
+          <p:nvPr/>
+        </p:nvSpPr>
+        <p:spPr>
+          <a:xfrm>
+            <a:off x="548640" y="4800600"/>
+            <a:ext cx="3657600" cy="274320"/>
+          </a:xfrm>
+          <a:prstGeom prst="rect">
+            <a:avLst/>
+          </a:prstGeom>
+          <a:noFill/>
+          <a:ln/>
+        </p:spPr>
+        <p:txBody>
+          <a:bodyPr wrap="square" rtlCol="0" anchor="ctr"/>
+          <a:lstStyle/>
+          <a:p>
+            <a:pPr indent="0" marL="0">
+              <a:buNone/>
+            </a:pPr>
+            <a:r>
+              <a:rPr lang="en-US" sz="800" dirty="0">
+                <a:solidFill>
+                  <a:srgbClr val="9B9690"/>
+                </a:solidFill>
+              </a:rPr>
+              <a:t>mrzocchi.com</a:t>
+            </a:r>
+            <a:endParaRPr lang="en-US" sz="800" dirty="0"/>
           </a:p>
         </p:txBody>
       </p:sp>
@@ -1641,6 +1476,13 @@
 <file path=ppt/slides/slide3.xml><?xml version="1.0" encoding="utf-8"?>
 <p:sld xmlns:a="http://schemas.openxmlformats.org/drawingml/2006/main" xmlns:r="http://schemas.openxmlformats.org/officeDocument/2006/relationships" xmlns:p="http://schemas.openxmlformats.org/presentationml/2006/main">
   <p:cSld name="Slide 3">
+    <p:bg>
+      <p:bgPr>
+        <a:solidFill>
+          <a:srgbClr val="1B2A4A"/>
+        </a:solidFill>
+      </p:bgPr>
+    </p:bg>
     <p:spTree>
       <p:nvGrpSpPr>
         <p:cNvPr id="1" name=""/>
@@ -1664,26 +1506,6 @@
         <p:spPr>
           <a:xfrm>
             <a:off x="0" y="0"/>
-            <a:ext cx="9144000" cy="5143500"/>
-          </a:xfrm>
-          <a:prstGeom prst="rect">
-            <a:avLst/>
-          </a:prstGeom>
-          <a:solidFill>
-            <a:srgbClr val="FAF8F5"/>
-          </a:solidFill>
-          <a:ln/>
-        </p:spPr>
-      </p:sp>
-      <p:sp>
-        <p:nvSpPr>
-          <p:cNvPr id="3" name="Shape 1"/>
-          <p:cNvSpPr/>
-          <p:nvPr/>
-        </p:nvSpPr>
-        <p:spPr>
-          <a:xfrm>
-            <a:off x="0" y="0"/>
             <a:ext cx="9144000" cy="54864"/>
           </a:xfrm>
           <a:prstGeom prst="rect">
@@ -1697,14 +1519,14 @@
       </p:sp>
       <p:sp>
         <p:nvSpPr>
-          <p:cNvPr id="4" name="Text 2"/>
+          <p:cNvPr id="3" name="Text 1"/>
           <p:cNvSpPr/>
           <p:nvPr/>
         </p:nvSpPr>
         <p:spPr>
           <a:xfrm>
-            <a:off x="640080" y="320040"/>
-            <a:ext cx="7863840" cy="548640"/>
+            <a:off x="548640" y="457200"/>
+            <a:ext cx="8046720" cy="640080"/>
           </a:xfrm>
           <a:prstGeom prst="rect">
             <a:avLst/>
@@ -1713,919 +1535,26 @@
           <a:ln/>
         </p:spPr>
         <p:txBody>
-          <a:bodyPr wrap="square" lIns="0" tIns="0" rIns="0" bIns="0" rtlCol="0" anchor="ctr"/>
+          <a:bodyPr wrap="square" rtlCol="0" anchor="ctr"/>
           <a:lstStyle/>
           <a:p>
             <a:pPr indent="0" marL="0">
               <a:buNone/>
             </a:pPr>
             <a:r>
-              <a:rPr lang="en-US" sz="2600" b="1" dirty="0">
+              <a:rPr lang="en-US" sz="2800" b="1" dirty="0">
                 <a:solidFill>
-                  <a:srgbClr val="1B2A4A"/>
+                  <a:srgbClr val="FFFFFF"/>
                 </a:solidFill>
                 <a:latin typeface="Georgia" pitchFamily="34" charset="0"/>
                 <a:ea typeface="Georgia" pitchFamily="34" charset="-122"/>
                 <a:cs typeface="Georgia" pitchFamily="34" charset="-120"/>
               </a:rPr>
-              <a:t>Volume Formulas</a:t>
-            </a:r>
-            <a:endParaRPr lang="en-US" sz="2600" dirty="0"/>
+              <a:t>Key Takeaways</a:t>
+            </a:r>
+            <a:endParaRPr lang="en-US" sz="2800" dirty="0"/>
           </a:p>
         </p:txBody>
-      </p:sp>
-      <p:graphicFrame>
-        <p:nvGraphicFramePr>
-          <p:cNvPr id="4" name="Table 0"/>
-          <p:cNvGraphicFramePr>
-            <a:graphicFrameLocks noGrp="1"/>
-          </p:cNvGraphicFramePr>
-          <p:nvPr>
-            <p:extLst>
-              <p:ext uri="{D42A27DB-BD31-4B8C-83A1-F6EECF244321}">
-                <p14:modId xmlns:p14="http://schemas.microsoft.com/office/powerpoint/2010/main" val="1579011935"/>
-              </p:ext>
-            </p:extLst>
-          </p:nvPr>
-        </p:nvGraphicFramePr>
-        <p:xfrm>
-          <a:off x="640080" y="1051560"/>
-          <a:ext cx="7863840" cy="914400"/>
-        </p:xfrm>
-        <a:graphic>
-          <a:graphicData uri="http://schemas.openxmlformats.org/drawingml/2006/table">
-            <a:tbl>
-              <a:tblPr/>
-              <a:tblGrid>
-                <a:gridCol w="2621280"/>
-                <a:gridCol w="2621280"/>
-                <a:gridCol w="2621280"/>
-              </a:tblGrid>
-              <a:tr h="502920">
-                <a:tc>
-                  <a:txBody>
-                    <a:bodyPr/>
-                    <a:lstStyle/>
-                    <a:p>
-                      <a:pPr indent="0" marL="0">
-                        <a:buNone/>
-                      </a:pPr>
-                      <a:r>
-                        <a:rPr lang="en-US" sz="1200" b="1" dirty="0">
-                          <a:solidFill>
-                            <a:srgbClr val="FFFFFF"/>
-                          </a:solidFill>
-                          <a:latin typeface="Calibri" pitchFamily="34" charset="0"/>
-                          <a:ea typeface="Calibri" pitchFamily="34" charset="-122"/>
-                          <a:cs typeface="Calibri" pitchFamily="34" charset="-120"/>
-                        </a:rPr>
-                        <a:t>Shape</a:t>
-                      </a:r>
-                      <a:endParaRPr lang="en-US" sz="1200" dirty="0">
-                        <a:latin typeface="Calibri" charset="0"/>
-                        <a:ea typeface="Calibri" charset="0"/>
-                        <a:cs typeface="Calibri" charset="0"/>
-                      </a:endParaRPr>
-                    </a:p>
-                  </a:txBody>
-                  <a:tcPr marL="91440" marR="91440" marT="45720" marB="45720">
-                    <a:lnL w="6350" cap="flat" cmpd="sng" algn="ctr">
-                      <a:solidFill>
-                        <a:srgbClr val="E5E2DC"/>
-                      </a:solidFill>
-                      <a:prstDash val="solid"/>
-                      <a:round/>
-                      <a:headEnd type="none" w="med" len="med"/>
-                      <a:tailEnd type="none" w="med" len="med"/>
-                    </a:lnL>
-                    <a:lnR w="6350" cap="flat" cmpd="sng" algn="ctr">
-                      <a:solidFill>
-                        <a:srgbClr val="E5E2DC"/>
-                      </a:solidFill>
-                      <a:prstDash val="solid"/>
-                      <a:round/>
-                      <a:headEnd type="none" w="med" len="med"/>
-                      <a:tailEnd type="none" w="med" len="med"/>
-                    </a:lnR>
-                    <a:lnT w="6350" cap="flat" cmpd="sng" algn="ctr">
-                      <a:solidFill>
-                        <a:srgbClr val="E5E2DC"/>
-                      </a:solidFill>
-                      <a:prstDash val="solid"/>
-                      <a:round/>
-                      <a:headEnd type="none" w="med" len="med"/>
-                      <a:tailEnd type="none" w="med" len="med"/>
-                    </a:lnT>
-                    <a:lnB w="6350" cap="flat" cmpd="sng" algn="ctr">
-                      <a:solidFill>
-                        <a:srgbClr val="E5E2DC"/>
-                      </a:solidFill>
-                      <a:prstDash val="solid"/>
-                      <a:round/>
-                      <a:headEnd type="none" w="med" len="med"/>
-                      <a:tailEnd type="none" w="med" len="med"/>
-                    </a:lnB>
-                    <a:solidFill>
-                      <a:srgbClr val="2A9D8F"/>
-                    </a:solidFill>
-                  </a:tcPr>
-                </a:tc>
-                <a:tc>
-                  <a:txBody>
-                    <a:bodyPr/>
-                    <a:lstStyle/>
-                    <a:p>
-                      <a:pPr indent="0" marL="0">
-                        <a:buNone/>
-                      </a:pPr>
-                      <a:r>
-                        <a:rPr lang="en-US" sz="1200" b="1" dirty="0">
-                          <a:solidFill>
-                            <a:srgbClr val="FFFFFF"/>
-                          </a:solidFill>
-                          <a:latin typeface="Calibri" pitchFamily="34" charset="0"/>
-                          <a:ea typeface="Calibri" pitchFamily="34" charset="-122"/>
-                          <a:cs typeface="Calibri" pitchFamily="34" charset="-120"/>
-                        </a:rPr>
-                        <a:t>Formula</a:t>
-                      </a:r>
-                      <a:endParaRPr lang="en-US" sz="1200" dirty="0">
-                        <a:latin typeface="Calibri" charset="0"/>
-                        <a:ea typeface="Calibri" charset="0"/>
-                        <a:cs typeface="Calibri" charset="0"/>
-                      </a:endParaRPr>
-                    </a:p>
-                  </a:txBody>
-                  <a:tcPr marL="91440" marR="91440" marT="45720" marB="45720">
-                    <a:lnL w="6350" cap="flat" cmpd="sng" algn="ctr">
-                      <a:solidFill>
-                        <a:srgbClr val="E5E2DC"/>
-                      </a:solidFill>
-                      <a:prstDash val="solid"/>
-                      <a:round/>
-                      <a:headEnd type="none" w="med" len="med"/>
-                      <a:tailEnd type="none" w="med" len="med"/>
-                    </a:lnL>
-                    <a:lnR w="6350" cap="flat" cmpd="sng" algn="ctr">
-                      <a:solidFill>
-                        <a:srgbClr val="E5E2DC"/>
-                      </a:solidFill>
-                      <a:prstDash val="solid"/>
-                      <a:round/>
-                      <a:headEnd type="none" w="med" len="med"/>
-                      <a:tailEnd type="none" w="med" len="med"/>
-                    </a:lnR>
-                    <a:lnT w="6350" cap="flat" cmpd="sng" algn="ctr">
-                      <a:solidFill>
-                        <a:srgbClr val="E5E2DC"/>
-                      </a:solidFill>
-                      <a:prstDash val="solid"/>
-                      <a:round/>
-                      <a:headEnd type="none" w="med" len="med"/>
-                      <a:tailEnd type="none" w="med" len="med"/>
-                    </a:lnT>
-                    <a:lnB w="6350" cap="flat" cmpd="sng" algn="ctr">
-                      <a:solidFill>
-                        <a:srgbClr val="E5E2DC"/>
-                      </a:solidFill>
-                      <a:prstDash val="solid"/>
-                      <a:round/>
-                      <a:headEnd type="none" w="med" len="med"/>
-                      <a:tailEnd type="none" w="med" len="med"/>
-                    </a:lnB>
-                    <a:solidFill>
-                      <a:srgbClr val="2A9D8F"/>
-                    </a:solidFill>
-                  </a:tcPr>
-                </a:tc>
-                <a:tc>
-                  <a:txBody>
-                    <a:bodyPr/>
-                    <a:lstStyle/>
-                    <a:p>
-                      <a:pPr indent="0" marL="0">
-                        <a:buNone/>
-                      </a:pPr>
-                      <a:r>
-                        <a:rPr lang="en-US" sz="1200" b="1" dirty="0">
-                          <a:solidFill>
-                            <a:srgbClr val="FFFFFF"/>
-                          </a:solidFill>
-                          <a:latin typeface="Calibri" pitchFamily="34" charset="0"/>
-                          <a:ea typeface="Calibri" pitchFamily="34" charset="-122"/>
-                          <a:cs typeface="Calibri" pitchFamily="34" charset="-120"/>
-                        </a:rPr>
-                        <a:t>Key</a:t>
-                      </a:r>
-                      <a:endParaRPr lang="en-US" sz="1200" dirty="0">
-                        <a:latin typeface="Calibri" charset="0"/>
-                        <a:ea typeface="Calibri" charset="0"/>
-                        <a:cs typeface="Calibri" charset="0"/>
-                      </a:endParaRPr>
-                    </a:p>
-                  </a:txBody>
-                  <a:tcPr marL="91440" marR="91440" marT="45720" marB="45720">
-                    <a:lnL w="6350" cap="flat" cmpd="sng" algn="ctr">
-                      <a:solidFill>
-                        <a:srgbClr val="E5E2DC"/>
-                      </a:solidFill>
-                      <a:prstDash val="solid"/>
-                      <a:round/>
-                      <a:headEnd type="none" w="med" len="med"/>
-                      <a:tailEnd type="none" w="med" len="med"/>
-                    </a:lnL>
-                    <a:lnR w="6350" cap="flat" cmpd="sng" algn="ctr">
-                      <a:solidFill>
-                        <a:srgbClr val="E5E2DC"/>
-                      </a:solidFill>
-                      <a:prstDash val="solid"/>
-                      <a:round/>
-                      <a:headEnd type="none" w="med" len="med"/>
-                      <a:tailEnd type="none" w="med" len="med"/>
-                    </a:lnR>
-                    <a:lnT w="6350" cap="flat" cmpd="sng" algn="ctr">
-                      <a:solidFill>
-                        <a:srgbClr val="E5E2DC"/>
-                      </a:solidFill>
-                      <a:prstDash val="solid"/>
-                      <a:round/>
-                      <a:headEnd type="none" w="med" len="med"/>
-                      <a:tailEnd type="none" w="med" len="med"/>
-                    </a:lnT>
-                    <a:lnB w="6350" cap="flat" cmpd="sng" algn="ctr">
-                      <a:solidFill>
-                        <a:srgbClr val="E5E2DC"/>
-                      </a:solidFill>
-                      <a:prstDash val="solid"/>
-                      <a:round/>
-                      <a:headEnd type="none" w="med" len="med"/>
-                      <a:tailEnd type="none" w="med" len="med"/>
-                    </a:lnB>
-                    <a:solidFill>
-                      <a:srgbClr val="2A9D8F"/>
-                    </a:solidFill>
-                  </a:tcPr>
-                </a:tc>
-              </a:tr>
-              <a:tr h="502920">
-                <a:tc>
-                  <a:txBody>
-                    <a:bodyPr/>
-                    <a:lstStyle/>
-                    <a:p>
-                      <a:pPr indent="0" marL="0">
-                        <a:buNone/>
-                      </a:pPr>
-                      <a:r>
-                        <a:rPr lang="en-US" sz="1200" dirty="0">
-                          <a:solidFill>
-                            <a:srgbClr val="3D3A36"/>
-                          </a:solidFill>
-                          <a:latin typeface="Calibri" pitchFamily="34" charset="0"/>
-                          <a:ea typeface="Calibri" pitchFamily="34" charset="-122"/>
-                          <a:cs typeface="Calibri" pitchFamily="34" charset="-120"/>
-                        </a:rPr>
-                        <a:t>Rectangular prism</a:t>
-                      </a:r>
-                      <a:endParaRPr lang="en-US" sz="1200" dirty="0">
-                        <a:latin typeface="Calibri" charset="0"/>
-                        <a:ea typeface="Calibri" charset="0"/>
-                        <a:cs typeface="Calibri" charset="0"/>
-                      </a:endParaRPr>
-                    </a:p>
-                  </a:txBody>
-                  <a:tcPr marL="91440" marR="91440" marT="45720" marB="45720">
-                    <a:lnL w="6350" cap="flat" cmpd="sng" algn="ctr">
-                      <a:solidFill>
-                        <a:srgbClr val="E5E2DC"/>
-                      </a:solidFill>
-                      <a:prstDash val="solid"/>
-                      <a:round/>
-                      <a:headEnd type="none" w="med" len="med"/>
-                      <a:tailEnd type="none" w="med" len="med"/>
-                    </a:lnL>
-                    <a:lnR w="6350" cap="flat" cmpd="sng" algn="ctr">
-                      <a:solidFill>
-                        <a:srgbClr val="E5E2DC"/>
-                      </a:solidFill>
-                      <a:prstDash val="solid"/>
-                      <a:round/>
-                      <a:headEnd type="none" w="med" len="med"/>
-                      <a:tailEnd type="none" w="med" len="med"/>
-                    </a:lnR>
-                    <a:lnT w="6350" cap="flat" cmpd="sng" algn="ctr">
-                      <a:solidFill>
-                        <a:srgbClr val="E5E2DC"/>
-                      </a:solidFill>
-                      <a:prstDash val="solid"/>
-                      <a:round/>
-                      <a:headEnd type="none" w="med" len="med"/>
-                      <a:tailEnd type="none" w="med" len="med"/>
-                    </a:lnT>
-                    <a:lnB w="6350" cap="flat" cmpd="sng" algn="ctr">
-                      <a:solidFill>
-                        <a:srgbClr val="E5E2DC"/>
-                      </a:solidFill>
-                      <a:prstDash val="solid"/>
-                      <a:round/>
-                      <a:headEnd type="none" w="med" len="med"/>
-                      <a:tailEnd type="none" w="med" len="med"/>
-                    </a:lnB>
-                  </a:tcPr>
-                </a:tc>
-                <a:tc>
-                  <a:txBody>
-                    <a:bodyPr/>
-                    <a:lstStyle/>
-                    <a:p>
-                      <a:pPr indent="0" marL="0">
-                        <a:buNone/>
-                      </a:pPr>
-                      <a:r>
-                        <a:rPr lang="en-US" sz="1200" dirty="0">
-                          <a:solidFill>
-                            <a:srgbClr val="3D3A36"/>
-                          </a:solidFill>
-                          <a:latin typeface="Calibri" pitchFamily="34" charset="0"/>
-                          <a:ea typeface="Calibri" pitchFamily="34" charset="-122"/>
-                          <a:cs typeface="Calibri" pitchFamily="34" charset="-120"/>
-                        </a:rPr>
-                        <a:t>V = l × w × h</a:t>
-                      </a:r>
-                      <a:endParaRPr lang="en-US" sz="1200" dirty="0">
-                        <a:latin typeface="Calibri" charset="0"/>
-                        <a:ea typeface="Calibri" charset="0"/>
-                        <a:cs typeface="Calibri" charset="0"/>
-                      </a:endParaRPr>
-                    </a:p>
-                  </a:txBody>
-                  <a:tcPr marL="91440" marR="91440" marT="45720" marB="45720">
-                    <a:lnL w="6350" cap="flat" cmpd="sng" algn="ctr">
-                      <a:solidFill>
-                        <a:srgbClr val="E5E2DC"/>
-                      </a:solidFill>
-                      <a:prstDash val="solid"/>
-                      <a:round/>
-                      <a:headEnd type="none" w="med" len="med"/>
-                      <a:tailEnd type="none" w="med" len="med"/>
-                    </a:lnL>
-                    <a:lnR w="6350" cap="flat" cmpd="sng" algn="ctr">
-                      <a:solidFill>
-                        <a:srgbClr val="E5E2DC"/>
-                      </a:solidFill>
-                      <a:prstDash val="solid"/>
-                      <a:round/>
-                      <a:headEnd type="none" w="med" len="med"/>
-                      <a:tailEnd type="none" w="med" len="med"/>
-                    </a:lnR>
-                    <a:lnT w="6350" cap="flat" cmpd="sng" algn="ctr">
-                      <a:solidFill>
-                        <a:srgbClr val="E5E2DC"/>
-                      </a:solidFill>
-                      <a:prstDash val="solid"/>
-                      <a:round/>
-                      <a:headEnd type="none" w="med" len="med"/>
-                      <a:tailEnd type="none" w="med" len="med"/>
-                    </a:lnT>
-                    <a:lnB w="6350" cap="flat" cmpd="sng" algn="ctr">
-                      <a:solidFill>
-                        <a:srgbClr val="E5E2DC"/>
-                      </a:solidFill>
-                      <a:prstDash val="solid"/>
-                      <a:round/>
-                      <a:headEnd type="none" w="med" len="med"/>
-                      <a:tailEnd type="none" w="med" len="med"/>
-                    </a:lnB>
-                  </a:tcPr>
-                </a:tc>
-                <a:tc>
-                  <a:txBody>
-                    <a:bodyPr/>
-                    <a:lstStyle/>
-                    <a:p>
-                      <a:pPr indent="0" marL="0">
-                        <a:buNone/>
-                      </a:pPr>
-                      <a:r>
-                        <a:rPr lang="en-US" sz="1200" dirty="0">
-                          <a:solidFill>
-                            <a:srgbClr val="3D3A36"/>
-                          </a:solidFill>
-                          <a:latin typeface="Calibri" pitchFamily="34" charset="0"/>
-                          <a:ea typeface="Calibri" pitchFamily="34" charset="-122"/>
-                          <a:cs typeface="Calibri" pitchFamily="34" charset="-120"/>
-                        </a:rPr>
-                        <a:t>l, w, h = dimensions</a:t>
-                      </a:r>
-                      <a:endParaRPr lang="en-US" sz="1200" dirty="0">
-                        <a:latin typeface="Calibri" charset="0"/>
-                        <a:ea typeface="Calibri" charset="0"/>
-                        <a:cs typeface="Calibri" charset="0"/>
-                      </a:endParaRPr>
-                    </a:p>
-                  </a:txBody>
-                  <a:tcPr marL="91440" marR="91440" marT="45720" marB="45720">
-                    <a:lnL w="6350" cap="flat" cmpd="sng" algn="ctr">
-                      <a:solidFill>
-                        <a:srgbClr val="E5E2DC"/>
-                      </a:solidFill>
-                      <a:prstDash val="solid"/>
-                      <a:round/>
-                      <a:headEnd type="none" w="med" len="med"/>
-                      <a:tailEnd type="none" w="med" len="med"/>
-                    </a:lnL>
-                    <a:lnR w="6350" cap="flat" cmpd="sng" algn="ctr">
-                      <a:solidFill>
-                        <a:srgbClr val="E5E2DC"/>
-                      </a:solidFill>
-                      <a:prstDash val="solid"/>
-                      <a:round/>
-                      <a:headEnd type="none" w="med" len="med"/>
-                      <a:tailEnd type="none" w="med" len="med"/>
-                    </a:lnR>
-                    <a:lnT w="6350" cap="flat" cmpd="sng" algn="ctr">
-                      <a:solidFill>
-                        <a:srgbClr val="E5E2DC"/>
-                      </a:solidFill>
-                      <a:prstDash val="solid"/>
-                      <a:round/>
-                      <a:headEnd type="none" w="med" len="med"/>
-                      <a:tailEnd type="none" w="med" len="med"/>
-                    </a:lnT>
-                    <a:lnB w="6350" cap="flat" cmpd="sng" algn="ctr">
-                      <a:solidFill>
-                        <a:srgbClr val="E5E2DC"/>
-                      </a:solidFill>
-                      <a:prstDash val="solid"/>
-                      <a:round/>
-                      <a:headEnd type="none" w="med" len="med"/>
-                      <a:tailEnd type="none" w="med" len="med"/>
-                    </a:lnB>
-                  </a:tcPr>
-                </a:tc>
-              </a:tr>
-              <a:tr h="502920">
-                <a:tc>
-                  <a:txBody>
-                    <a:bodyPr/>
-                    <a:lstStyle/>
-                    <a:p>
-                      <a:pPr indent="0" marL="0">
-                        <a:buNone/>
-                      </a:pPr>
-                      <a:r>
-                        <a:rPr lang="en-US" sz="1200" dirty="0">
-                          <a:solidFill>
-                            <a:srgbClr val="3D3A36"/>
-                          </a:solidFill>
-                          <a:latin typeface="Calibri" pitchFamily="34" charset="0"/>
-                          <a:ea typeface="Calibri" pitchFamily="34" charset="-122"/>
-                          <a:cs typeface="Calibri" pitchFamily="34" charset="-120"/>
-                        </a:rPr>
-                        <a:t>Cube</a:t>
-                      </a:r>
-                      <a:endParaRPr lang="en-US" sz="1200" dirty="0">
-                        <a:latin typeface="Calibri" charset="0"/>
-                        <a:ea typeface="Calibri" charset="0"/>
-                        <a:cs typeface="Calibri" charset="0"/>
-                      </a:endParaRPr>
-                    </a:p>
-                  </a:txBody>
-                  <a:tcPr marL="91440" marR="91440" marT="45720" marB="45720">
-                    <a:lnL w="6350" cap="flat" cmpd="sng" algn="ctr">
-                      <a:solidFill>
-                        <a:srgbClr val="E5E2DC"/>
-                      </a:solidFill>
-                      <a:prstDash val="solid"/>
-                      <a:round/>
-                      <a:headEnd type="none" w="med" len="med"/>
-                      <a:tailEnd type="none" w="med" len="med"/>
-                    </a:lnL>
-                    <a:lnR w="6350" cap="flat" cmpd="sng" algn="ctr">
-                      <a:solidFill>
-                        <a:srgbClr val="E5E2DC"/>
-                      </a:solidFill>
-                      <a:prstDash val="solid"/>
-                      <a:round/>
-                      <a:headEnd type="none" w="med" len="med"/>
-                      <a:tailEnd type="none" w="med" len="med"/>
-                    </a:lnR>
-                    <a:lnT w="6350" cap="flat" cmpd="sng" algn="ctr">
-                      <a:solidFill>
-                        <a:srgbClr val="E5E2DC"/>
-                      </a:solidFill>
-                      <a:prstDash val="solid"/>
-                      <a:round/>
-                      <a:headEnd type="none" w="med" len="med"/>
-                      <a:tailEnd type="none" w="med" len="med"/>
-                    </a:lnT>
-                    <a:lnB w="6350" cap="flat" cmpd="sng" algn="ctr">
-                      <a:solidFill>
-                        <a:srgbClr val="E5E2DC"/>
-                      </a:solidFill>
-                      <a:prstDash val="solid"/>
-                      <a:round/>
-                      <a:headEnd type="none" w="med" len="med"/>
-                      <a:tailEnd type="none" w="med" len="med"/>
-                    </a:lnB>
-                  </a:tcPr>
-                </a:tc>
-                <a:tc>
-                  <a:txBody>
-                    <a:bodyPr/>
-                    <a:lstStyle/>
-                    <a:p>
-                      <a:pPr indent="0" marL="0">
-                        <a:buNone/>
-                      </a:pPr>
-                      <a:r>
-                        <a:rPr lang="en-US" sz="1200" dirty="0">
-                          <a:solidFill>
-                            <a:srgbClr val="3D3A36"/>
-                          </a:solidFill>
-                          <a:latin typeface="Calibri" pitchFamily="34" charset="0"/>
-                          <a:ea typeface="Calibri" pitchFamily="34" charset="-122"/>
-                          <a:cs typeface="Calibri" pitchFamily="34" charset="-120"/>
-                        </a:rPr>
-                        <a:t>V = s³</a:t>
-                      </a:r>
-                      <a:endParaRPr lang="en-US" sz="1200" dirty="0">
-                        <a:latin typeface="Calibri" charset="0"/>
-                        <a:ea typeface="Calibri" charset="0"/>
-                        <a:cs typeface="Calibri" charset="0"/>
-                      </a:endParaRPr>
-                    </a:p>
-                  </a:txBody>
-                  <a:tcPr marL="91440" marR="91440" marT="45720" marB="45720">
-                    <a:lnL w="6350" cap="flat" cmpd="sng" algn="ctr">
-                      <a:solidFill>
-                        <a:srgbClr val="E5E2DC"/>
-                      </a:solidFill>
-                      <a:prstDash val="solid"/>
-                      <a:round/>
-                      <a:headEnd type="none" w="med" len="med"/>
-                      <a:tailEnd type="none" w="med" len="med"/>
-                    </a:lnL>
-                    <a:lnR w="6350" cap="flat" cmpd="sng" algn="ctr">
-                      <a:solidFill>
-                        <a:srgbClr val="E5E2DC"/>
-                      </a:solidFill>
-                      <a:prstDash val="solid"/>
-                      <a:round/>
-                      <a:headEnd type="none" w="med" len="med"/>
-                      <a:tailEnd type="none" w="med" len="med"/>
-                    </a:lnR>
-                    <a:lnT w="6350" cap="flat" cmpd="sng" algn="ctr">
-                      <a:solidFill>
-                        <a:srgbClr val="E5E2DC"/>
-                      </a:solidFill>
-                      <a:prstDash val="solid"/>
-                      <a:round/>
-                      <a:headEnd type="none" w="med" len="med"/>
-                      <a:tailEnd type="none" w="med" len="med"/>
-                    </a:lnT>
-                    <a:lnB w="6350" cap="flat" cmpd="sng" algn="ctr">
-                      <a:solidFill>
-                        <a:srgbClr val="E5E2DC"/>
-                      </a:solidFill>
-                      <a:prstDash val="solid"/>
-                      <a:round/>
-                      <a:headEnd type="none" w="med" len="med"/>
-                      <a:tailEnd type="none" w="med" len="med"/>
-                    </a:lnB>
-                  </a:tcPr>
-                </a:tc>
-                <a:tc>
-                  <a:txBody>
-                    <a:bodyPr/>
-                    <a:lstStyle/>
-                    <a:p>
-                      <a:pPr indent="0" marL="0">
-                        <a:buNone/>
-                      </a:pPr>
-                      <a:r>
-                        <a:rPr lang="en-US" sz="1200" dirty="0">
-                          <a:solidFill>
-                            <a:srgbClr val="3D3A36"/>
-                          </a:solidFill>
-                          <a:latin typeface="Calibri" pitchFamily="34" charset="0"/>
-                          <a:ea typeface="Calibri" pitchFamily="34" charset="-122"/>
-                          <a:cs typeface="Calibri" pitchFamily="34" charset="-120"/>
-                        </a:rPr>
-                        <a:t>s = side length</a:t>
-                      </a:r>
-                      <a:endParaRPr lang="en-US" sz="1200" dirty="0">
-                        <a:latin typeface="Calibri" charset="0"/>
-                        <a:ea typeface="Calibri" charset="0"/>
-                        <a:cs typeface="Calibri" charset="0"/>
-                      </a:endParaRPr>
-                    </a:p>
-                  </a:txBody>
-                  <a:tcPr marL="91440" marR="91440" marT="45720" marB="45720">
-                    <a:lnL w="6350" cap="flat" cmpd="sng" algn="ctr">
-                      <a:solidFill>
-                        <a:srgbClr val="E5E2DC"/>
-                      </a:solidFill>
-                      <a:prstDash val="solid"/>
-                      <a:round/>
-                      <a:headEnd type="none" w="med" len="med"/>
-                      <a:tailEnd type="none" w="med" len="med"/>
-                    </a:lnL>
-                    <a:lnR w="6350" cap="flat" cmpd="sng" algn="ctr">
-                      <a:solidFill>
-                        <a:srgbClr val="E5E2DC"/>
-                      </a:solidFill>
-                      <a:prstDash val="solid"/>
-                      <a:round/>
-                      <a:headEnd type="none" w="med" len="med"/>
-                      <a:tailEnd type="none" w="med" len="med"/>
-                    </a:lnR>
-                    <a:lnT w="6350" cap="flat" cmpd="sng" algn="ctr">
-                      <a:solidFill>
-                        <a:srgbClr val="E5E2DC"/>
-                      </a:solidFill>
-                      <a:prstDash val="solid"/>
-                      <a:round/>
-                      <a:headEnd type="none" w="med" len="med"/>
-                      <a:tailEnd type="none" w="med" len="med"/>
-                    </a:lnT>
-                    <a:lnB w="6350" cap="flat" cmpd="sng" algn="ctr">
-                      <a:solidFill>
-                        <a:srgbClr val="E5E2DC"/>
-                      </a:solidFill>
-                      <a:prstDash val="solid"/>
-                      <a:round/>
-                      <a:headEnd type="none" w="med" len="med"/>
-                      <a:tailEnd type="none" w="med" len="med"/>
-                    </a:lnB>
-                  </a:tcPr>
-                </a:tc>
-              </a:tr>
-              <a:tr h="502920">
-                <a:tc>
-                  <a:txBody>
-                    <a:bodyPr/>
-                    <a:lstStyle/>
-                    <a:p>
-                      <a:pPr indent="0" marL="0">
-                        <a:buNone/>
-                      </a:pPr>
-                      <a:r>
-                        <a:rPr lang="en-US" sz="1200" dirty="0">
-                          <a:solidFill>
-                            <a:srgbClr val="3D3A36"/>
-                          </a:solidFill>
-                          <a:latin typeface="Calibri" pitchFamily="34" charset="0"/>
-                          <a:ea typeface="Calibri" pitchFamily="34" charset="-122"/>
-                          <a:cs typeface="Calibri" pitchFamily="34" charset="-120"/>
-                        </a:rPr>
-                        <a:t>Triangular prism</a:t>
-                      </a:r>
-                      <a:endParaRPr lang="en-US" sz="1200" dirty="0">
-                        <a:latin typeface="Calibri" charset="0"/>
-                        <a:ea typeface="Calibri" charset="0"/>
-                        <a:cs typeface="Calibri" charset="0"/>
-                      </a:endParaRPr>
-                    </a:p>
-                  </a:txBody>
-                  <a:tcPr marL="91440" marR="91440" marT="45720" marB="45720">
-                    <a:lnL w="6350" cap="flat" cmpd="sng" algn="ctr">
-                      <a:solidFill>
-                        <a:srgbClr val="E5E2DC"/>
-                      </a:solidFill>
-                      <a:prstDash val="solid"/>
-                      <a:round/>
-                      <a:headEnd type="none" w="med" len="med"/>
-                      <a:tailEnd type="none" w="med" len="med"/>
-                    </a:lnL>
-                    <a:lnR w="6350" cap="flat" cmpd="sng" algn="ctr">
-                      <a:solidFill>
-                        <a:srgbClr val="E5E2DC"/>
-                      </a:solidFill>
-                      <a:prstDash val="solid"/>
-                      <a:round/>
-                      <a:headEnd type="none" w="med" len="med"/>
-                      <a:tailEnd type="none" w="med" len="med"/>
-                    </a:lnR>
-                    <a:lnT w="6350" cap="flat" cmpd="sng" algn="ctr">
-                      <a:solidFill>
-                        <a:srgbClr val="E5E2DC"/>
-                      </a:solidFill>
-                      <a:prstDash val="solid"/>
-                      <a:round/>
-                      <a:headEnd type="none" w="med" len="med"/>
-                      <a:tailEnd type="none" w="med" len="med"/>
-                    </a:lnT>
-                    <a:lnB w="6350" cap="flat" cmpd="sng" algn="ctr">
-                      <a:solidFill>
-                        <a:srgbClr val="E5E2DC"/>
-                      </a:solidFill>
-                      <a:prstDash val="solid"/>
-                      <a:round/>
-                      <a:headEnd type="none" w="med" len="med"/>
-                      <a:tailEnd type="none" w="med" len="med"/>
-                    </a:lnB>
-                  </a:tcPr>
-                </a:tc>
-                <a:tc>
-                  <a:txBody>
-                    <a:bodyPr/>
-                    <a:lstStyle/>
-                    <a:p>
-                      <a:pPr indent="0" marL="0">
-                        <a:buNone/>
-                      </a:pPr>
-                      <a:r>
-                        <a:rPr lang="en-US" sz="1200" dirty="0">
-                          <a:solidFill>
-                            <a:srgbClr val="3D3A36"/>
-                          </a:solidFill>
-                          <a:latin typeface="Calibri" pitchFamily="34" charset="0"/>
-                          <a:ea typeface="Calibri" pitchFamily="34" charset="-122"/>
-                          <a:cs typeface="Calibri" pitchFamily="34" charset="-120"/>
-                        </a:rPr>
-                        <a:t>V = (½ × b × h) × l</a:t>
-                      </a:r>
-                      <a:endParaRPr lang="en-US" sz="1200" dirty="0">
-                        <a:latin typeface="Calibri" charset="0"/>
-                        <a:ea typeface="Calibri" charset="0"/>
-                        <a:cs typeface="Calibri" charset="0"/>
-                      </a:endParaRPr>
-                    </a:p>
-                  </a:txBody>
-                  <a:tcPr marL="91440" marR="91440" marT="45720" marB="45720">
-                    <a:lnL w="6350" cap="flat" cmpd="sng" algn="ctr">
-                      <a:solidFill>
-                        <a:srgbClr val="E5E2DC"/>
-                      </a:solidFill>
-                      <a:prstDash val="solid"/>
-                      <a:round/>
-                      <a:headEnd type="none" w="med" len="med"/>
-                      <a:tailEnd type="none" w="med" len="med"/>
-                    </a:lnL>
-                    <a:lnR w="6350" cap="flat" cmpd="sng" algn="ctr">
-                      <a:solidFill>
-                        <a:srgbClr val="E5E2DC"/>
-                      </a:solidFill>
-                      <a:prstDash val="solid"/>
-                      <a:round/>
-                      <a:headEnd type="none" w="med" len="med"/>
-                      <a:tailEnd type="none" w="med" len="med"/>
-                    </a:lnR>
-                    <a:lnT w="6350" cap="flat" cmpd="sng" algn="ctr">
-                      <a:solidFill>
-                        <a:srgbClr val="E5E2DC"/>
-                      </a:solidFill>
-                      <a:prstDash val="solid"/>
-                      <a:round/>
-                      <a:headEnd type="none" w="med" len="med"/>
-                      <a:tailEnd type="none" w="med" len="med"/>
-                    </a:lnT>
-                    <a:lnB w="6350" cap="flat" cmpd="sng" algn="ctr">
-                      <a:solidFill>
-                        <a:srgbClr val="E5E2DC"/>
-                      </a:solidFill>
-                      <a:prstDash val="solid"/>
-                      <a:round/>
-                      <a:headEnd type="none" w="med" len="med"/>
-                      <a:tailEnd type="none" w="med" len="med"/>
-                    </a:lnB>
-                  </a:tcPr>
-                </a:tc>
-                <a:tc>
-                  <a:txBody>
-                    <a:bodyPr/>
-                    <a:lstStyle/>
-                    <a:p>
-                      <a:pPr indent="0" marL="0">
-                        <a:buNone/>
-                      </a:pPr>
-                      <a:r>
-                        <a:rPr lang="en-US" sz="1200" dirty="0">
-                          <a:solidFill>
-                            <a:srgbClr val="3D3A36"/>
-                          </a:solidFill>
-                          <a:latin typeface="Calibri" pitchFamily="34" charset="0"/>
-                          <a:ea typeface="Calibri" pitchFamily="34" charset="-122"/>
-                          <a:cs typeface="Calibri" pitchFamily="34" charset="-120"/>
-                        </a:rPr>
-                        <a:t>b, h = triangle; l = length</a:t>
-                      </a:r>
-                      <a:endParaRPr lang="en-US" sz="1200" dirty="0">
-                        <a:latin typeface="Calibri" charset="0"/>
-                        <a:ea typeface="Calibri" charset="0"/>
-                        <a:cs typeface="Calibri" charset="0"/>
-                      </a:endParaRPr>
-                    </a:p>
-                  </a:txBody>
-                  <a:tcPr marL="91440" marR="91440" marT="45720" marB="45720">
-                    <a:lnL w="6350" cap="flat" cmpd="sng" algn="ctr">
-                      <a:solidFill>
-                        <a:srgbClr val="E5E2DC"/>
-                      </a:solidFill>
-                      <a:prstDash val="solid"/>
-                      <a:round/>
-                      <a:headEnd type="none" w="med" len="med"/>
-                      <a:tailEnd type="none" w="med" len="med"/>
-                    </a:lnL>
-                    <a:lnR w="6350" cap="flat" cmpd="sng" algn="ctr">
-                      <a:solidFill>
-                        <a:srgbClr val="E5E2DC"/>
-                      </a:solidFill>
-                      <a:prstDash val="solid"/>
-                      <a:round/>
-                      <a:headEnd type="none" w="med" len="med"/>
-                      <a:tailEnd type="none" w="med" len="med"/>
-                    </a:lnR>
-                    <a:lnT w="6350" cap="flat" cmpd="sng" algn="ctr">
-                      <a:solidFill>
-                        <a:srgbClr val="E5E2DC"/>
-                      </a:solidFill>
-                      <a:prstDash val="solid"/>
-                      <a:round/>
-                      <a:headEnd type="none" w="med" len="med"/>
-                      <a:tailEnd type="none" w="med" len="med"/>
-                    </a:lnT>
-                    <a:lnB w="6350" cap="flat" cmpd="sng" algn="ctr">
-                      <a:solidFill>
-                        <a:srgbClr val="E5E2DC"/>
-                      </a:solidFill>
-                      <a:prstDash val="solid"/>
-                      <a:round/>
-                      <a:headEnd type="none" w="med" len="med"/>
-                      <a:tailEnd type="none" w="med" len="med"/>
-                    </a:lnB>
-                  </a:tcPr>
-                </a:tc>
-              </a:tr>
-            </a:tbl>
-          </a:graphicData>
-        </a:graphic>
-      </p:graphicFrame>
-    </p:spTree>
-  </p:cSld>
-  <p:clrMapOvr>
-    <a:masterClrMapping/>
-  </p:clrMapOvr>
-</p:sld>
-</file>
-
-<file path=ppt/slides/slide4.xml><?xml version="1.0" encoding="utf-8"?>
-<p:sld xmlns:a="http://schemas.openxmlformats.org/drawingml/2006/main" xmlns:r="http://schemas.openxmlformats.org/officeDocument/2006/relationships" xmlns:p="http://schemas.openxmlformats.org/presentationml/2006/main">
-  <p:cSld name="Slide 4">
-    <p:spTree>
-      <p:nvGrpSpPr>
-        <p:cNvPr id="1" name=""/>
-        <p:cNvGrpSpPr/>
-        <p:nvPr/>
-      </p:nvGrpSpPr>
-      <p:grpSpPr>
-        <a:xfrm>
-          <a:off x="0" y="0"/>
-          <a:ext cx="0" cy="0"/>
-          <a:chOff x="0" y="0"/>
-          <a:chExt cx="0" cy="0"/>
-        </a:xfrm>
-      </p:grpSpPr>
-      <p:sp>
-        <p:nvSpPr>
-          <p:cNvPr id="2" name="Shape 0"/>
-          <p:cNvSpPr/>
-          <p:nvPr/>
-        </p:nvSpPr>
-        <p:spPr>
-          <a:xfrm>
-            <a:off x="0" y="0"/>
-            <a:ext cx="9144000" cy="5143500"/>
-          </a:xfrm>
-          <a:prstGeom prst="rect">
-            <a:avLst/>
-          </a:prstGeom>
-          <a:solidFill>
-            <a:srgbClr val="FAF8F5"/>
-          </a:solidFill>
-          <a:ln/>
-        </p:spPr>
-      </p:sp>
-      <p:sp>
-        <p:nvSpPr>
-          <p:cNvPr id="3" name="Shape 1"/>
-          <p:cNvSpPr/>
-          <p:nvPr/>
-        </p:nvSpPr>
-        <p:spPr>
-          <a:xfrm>
-            <a:off x="0" y="0"/>
-            <a:ext cx="9144000" cy="54864"/>
-          </a:xfrm>
-          <a:prstGeom prst="rect">
-            <a:avLst/>
-          </a:prstGeom>
-          <a:solidFill>
-            <a:srgbClr val="2A9D8F"/>
-          </a:solidFill>
-          <a:ln/>
-        </p:spPr>
       </p:sp>
       <p:sp>
         <p:nvSpPr>
@@ -2635,47 +1564,8 @@
         </p:nvSpPr>
         <p:spPr>
           <a:xfrm>
-            <a:off x="640080" y="320040"/>
-            <a:ext cx="7863840" cy="640080"/>
-          </a:xfrm>
-          <a:prstGeom prst="rect">
-            <a:avLst/>
-          </a:prstGeom>
-          <a:noFill/>
-          <a:ln/>
-        </p:spPr>
-        <p:txBody>
-          <a:bodyPr wrap="square" lIns="0" tIns="0" rIns="0" bIns="0" rtlCol="0" anchor="ctr"/>
-          <a:lstStyle/>
-          <a:p>
-            <a:pPr indent="0" marL="0">
-              <a:buNone/>
-            </a:pPr>
-            <a:r>
-              <a:rPr lang="en-US" sz="2600" b="1" dirty="0">
-                <a:solidFill>
-                  <a:srgbClr val="1B2A4A"/>
-                </a:solidFill>
-                <a:latin typeface="Georgia" pitchFamily="34" charset="0"/>
-                <a:ea typeface="Georgia" pitchFamily="34" charset="-122"/>
-                <a:cs typeface="Georgia" pitchFamily="34" charset="-120"/>
-              </a:rPr>
-              <a:t>Worked Example: Triangular Prism</a:t>
-            </a:r>
-            <a:endParaRPr lang="en-US" sz="2600" dirty="0"/>
-          </a:p>
-        </p:txBody>
-      </p:sp>
-      <p:sp>
-        <p:nvSpPr>
-          <p:cNvPr id="5" name="Text 3"/>
-          <p:cNvSpPr/>
-          <p:nvPr/>
-        </p:nvSpPr>
-        <p:spPr>
-          <a:xfrm>
-            <a:off x="640080" y="1188720"/>
-            <a:ext cx="7863840" cy="3200400"/>
+            <a:off x="731520" y="1371600"/>
+            <a:ext cx="7680960" cy="3200400"/>
           </a:xfrm>
           <a:prstGeom prst="rect">
             <a:avLst/>
@@ -2688,122 +1578,100 @@
           <a:lstStyle/>
           <a:p>
             <a:pPr marL="342900" indent="-342900">
-              <a:lnSpc>
-                <a:spcPct val="140000"/>
-              </a:lnSpc>
+              <a:spcAft>
+                <a:spcPts val="1000"/>
+              </a:spcAft>
               <a:buSzPct val="100000"/>
               <a:buChar char="•"/>
             </a:pPr>
             <a:r>
-              <a:rPr lang="en-US" sz="1500" dirty="0">
+              <a:rPr lang="en-US" sz="1600" dirty="0">
                 <a:solidFill>
-                  <a:srgbClr val="3D3A36"/>
+                  <a:srgbClr val="CADCFC"/>
                 </a:solidFill>
                 <a:latin typeface="Calibri" pitchFamily="34" charset="0"/>
                 <a:ea typeface="Calibri" pitchFamily="34" charset="-122"/>
                 <a:cs typeface="Calibri" pitchFamily="34" charset="-120"/>
               </a:rPr>
-              <a:t>Triangle: base = 6 cm, height = 4 cm. Prism length = 10 cm.</a:t>
-            </a:r>
-            <a:endParaRPr lang="en-US" sz="1500" dirty="0"/>
+              <a:t>Volume = 3D space inside a shape (cm³, m³)</a:t>
+            </a:r>
+            <a:endParaRPr lang="en-US" sz="1600" dirty="0"/>
           </a:p>
           <a:p>
             <a:pPr marL="342900" indent="-342900">
-              <a:lnSpc>
-                <a:spcPct val="140000"/>
-              </a:lnSpc>
+              <a:spcAft>
+                <a:spcPts val="1000"/>
+              </a:spcAft>
               <a:buSzPct val="100000"/>
               <a:buChar char="•"/>
             </a:pPr>
             <a:r>
-              <a:rPr lang="en-US" sz="1500" dirty="0">
+              <a:rPr lang="en-US" sz="1600" dirty="0">
                 <a:solidFill>
-                  <a:srgbClr val="3D3A36"/>
+                  <a:srgbClr val="CADCFC"/>
                 </a:solidFill>
                 <a:latin typeface="Calibri" pitchFamily="34" charset="0"/>
                 <a:ea typeface="Calibri" pitchFamily="34" charset="-122"/>
                 <a:cs typeface="Calibri" pitchFamily="34" charset="-120"/>
               </a:rPr>
-              <a:t>Step 1: Find the area of the triangular cross-section.</a:t>
-            </a:r>
-            <a:endParaRPr lang="en-US" sz="1500" dirty="0"/>
+              <a:t>Cuboid: V = l × w × h | Cube: V = s³</a:t>
+            </a:r>
+            <a:endParaRPr lang="en-US" sz="1600" dirty="0"/>
           </a:p>
           <a:p>
             <a:pPr marL="342900" indent="-342900">
-              <a:lnSpc>
-                <a:spcPct val="140000"/>
-              </a:lnSpc>
+              <a:spcAft>
+                <a:spcPts val="1000"/>
+              </a:spcAft>
               <a:buSzPct val="100000"/>
               <a:buChar char="•"/>
             </a:pPr>
             <a:r>
-              <a:rPr lang="en-US" sz="1500" dirty="0">
+              <a:rPr lang="en-US" sz="1600" dirty="0">
                 <a:solidFill>
-                  <a:srgbClr val="3D3A36"/>
+                  <a:srgbClr val="CADCFC"/>
                 </a:solidFill>
                 <a:latin typeface="Calibri" pitchFamily="34" charset="0"/>
                 <a:ea typeface="Calibri" pitchFamily="34" charset="-122"/>
                 <a:cs typeface="Calibri" pitchFamily="34" charset="-120"/>
               </a:rPr>
-              <a:t>Area = ½ × 6 × 4 = 12 cm²</a:t>
-            </a:r>
-            <a:endParaRPr lang="en-US" sz="1500" dirty="0"/>
+              <a:t>Compound shapes: split into cuboids and add volumes</a:t>
+            </a:r>
+            <a:endParaRPr lang="en-US" sz="1600" dirty="0"/>
           </a:p>
           <a:p>
             <a:pPr marL="342900" indent="-342900">
-              <a:lnSpc>
-                <a:spcPct val="140000"/>
-              </a:lnSpc>
+              <a:spcAft>
+                <a:spcPts val="1000"/>
+              </a:spcAft>
               <a:buSzPct val="100000"/>
               <a:buChar char="•"/>
             </a:pPr>
             <a:r>
-              <a:rPr lang="en-US" sz="1500" dirty="0">
+              <a:rPr lang="en-US" sz="1600" dirty="0">
                 <a:solidFill>
-                  <a:srgbClr val="3D3A36"/>
+                  <a:srgbClr val="CADCFC"/>
                 </a:solidFill>
                 <a:latin typeface="Calibri" pitchFamily="34" charset="0"/>
                 <a:ea typeface="Calibri" pitchFamily="34" charset="-122"/>
                 <a:cs typeface="Calibri" pitchFamily="34" charset="-120"/>
               </a:rPr>
-              <a:t>Step 2: Multiply by the length. V = 12 × 10 = 120 cm³</a:t>
-            </a:r>
-            <a:endParaRPr lang="en-US" sz="1500" dirty="0"/>
+              <a:t>Don't confuse with area (2D) or surface area (faces)</a:t>
+            </a:r>
+            <a:endParaRPr lang="en-US" sz="1600" dirty="0"/>
           </a:p>
         </p:txBody>
       </p:sp>
       <p:sp>
         <p:nvSpPr>
-          <p:cNvPr id="6" name="Shape 4"/>
+          <p:cNvPr id="5" name="Text 3"/>
           <p:cNvSpPr/>
           <p:nvPr/>
         </p:nvSpPr>
         <p:spPr>
           <a:xfrm>
-            <a:off x="640080" y="4206240"/>
-            <a:ext cx="7863840" cy="640080"/>
-          </a:xfrm>
-          <a:prstGeom prst="roundRect">
-            <a:avLst>
-              <a:gd name="adj" fmla="val 11429"/>
-            </a:avLst>
-          </a:prstGeom>
-          <a:solidFill>
-            <a:srgbClr val="E8F5F3"/>
-          </a:solidFill>
-          <a:ln/>
-        </p:spPr>
-      </p:sp>
-      <p:sp>
-        <p:nvSpPr>
-          <p:cNvPr id="7" name="Text 5"/>
-          <p:cNvSpPr/>
-          <p:nvPr/>
-        </p:nvSpPr>
-        <p:spPr>
-          <a:xfrm>
-            <a:off x="822960" y="4251960"/>
-            <a:ext cx="7498080" cy="548640"/>
+            <a:off x="548640" y="4572000"/>
+            <a:ext cx="3657600" cy="274320"/>
           </a:xfrm>
           <a:prstGeom prst="rect">
             <a:avLst/>
@@ -2819,199 +1687,14 @@
               <a:buNone/>
             </a:pPr>
             <a:r>
-              <a:rPr lang="en-US" sz="1200" i="1" dirty="0">
+              <a:rPr lang="en-US" sz="1000" dirty="0">
                 <a:solidFill>
-                  <a:srgbClr val="2A9D8F"/>
+                  <a:srgbClr val="6B6660"/>
                 </a:solidFill>
-                <a:latin typeface="Calibri" pitchFamily="34" charset="0"/>
-                <a:ea typeface="Calibri" pitchFamily="34" charset="-122"/>
-                <a:cs typeface="Calibri" pitchFamily="34" charset="-120"/>
-              </a:rPr>
-              <a:t>Volume of any prism = area of cross-section × length</a:t>
-            </a:r>
-            <a:endParaRPr lang="en-US" sz="1200" dirty="0"/>
-          </a:p>
-        </p:txBody>
-      </p:sp>
-    </p:spTree>
-  </p:cSld>
-  <p:clrMapOvr>
-    <a:masterClrMapping/>
-  </p:clrMapOvr>
-</p:sld>
-</file>
-
-<file path=ppt/slides/slide5.xml><?xml version="1.0" encoding="utf-8"?>
-<p:sld xmlns:a="http://schemas.openxmlformats.org/drawingml/2006/main" xmlns:r="http://schemas.openxmlformats.org/officeDocument/2006/relationships" xmlns:p="http://schemas.openxmlformats.org/presentationml/2006/main">
-  <p:cSld name="Slide 5">
-    <p:spTree>
-      <p:nvGrpSpPr>
-        <p:cNvPr id="1" name=""/>
-        <p:cNvGrpSpPr/>
-        <p:nvPr/>
-      </p:nvGrpSpPr>
-      <p:grpSpPr>
-        <a:xfrm>
-          <a:off x="0" y="0"/>
-          <a:ext cx="0" cy="0"/>
-          <a:chOff x="0" y="0"/>
-          <a:chExt cx="0" cy="0"/>
-        </a:xfrm>
-      </p:grpSpPr>
-      <p:sp>
-        <p:nvSpPr>
-          <p:cNvPr id="2" name="Shape 0"/>
-          <p:cNvSpPr/>
-          <p:nvPr/>
-        </p:nvSpPr>
-        <p:spPr>
-          <a:xfrm>
-            <a:off x="0" y="0"/>
-            <a:ext cx="9144000" cy="5143500"/>
-          </a:xfrm>
-          <a:prstGeom prst="rect">
-            <a:avLst/>
-          </a:prstGeom>
-          <a:solidFill>
-            <a:srgbClr val="1B2A4A"/>
-          </a:solidFill>
-          <a:ln/>
-        </p:spPr>
-      </p:sp>
-      <p:sp>
-        <p:nvSpPr>
-          <p:cNvPr id="3" name="Shape 1"/>
-          <p:cNvSpPr/>
-          <p:nvPr/>
-        </p:nvSpPr>
-        <p:spPr>
-          <a:xfrm>
-            <a:off x="0" y="4777740"/>
-            <a:ext cx="9144000" cy="365760"/>
-          </a:xfrm>
-          <a:prstGeom prst="rect">
-            <a:avLst/>
-          </a:prstGeom>
-          <a:solidFill>
-            <a:srgbClr val="2A9D8F"/>
-          </a:solidFill>
-          <a:ln/>
-        </p:spPr>
-      </p:sp>
-      <p:sp>
-        <p:nvSpPr>
-          <p:cNvPr id="4" name="Text 2"/>
-          <p:cNvSpPr/>
-          <p:nvPr/>
-        </p:nvSpPr>
-        <p:spPr>
-          <a:xfrm>
-            <a:off x="731520" y="1371600"/>
-            <a:ext cx="7680960" cy="914400"/>
-          </a:xfrm>
-          <a:prstGeom prst="rect">
-            <a:avLst/>
-          </a:prstGeom>
-          <a:noFill/>
-          <a:ln/>
-        </p:spPr>
-        <p:txBody>
-          <a:bodyPr wrap="square" rtlCol="0" anchor="ctr"/>
-          <a:lstStyle/>
-          <a:p>
-            <a:pPr algn="ctr" indent="0" marL="0">
-              <a:buNone/>
-            </a:pPr>
-            <a:r>
-              <a:rPr lang="en-US" sz="3600" b="1" dirty="0">
-                <a:solidFill>
-                  <a:srgbClr val="FFFFFF"/>
-                </a:solidFill>
-                <a:latin typeface="Georgia" pitchFamily="34" charset="0"/>
-                <a:ea typeface="Georgia" pitchFamily="34" charset="-122"/>
-                <a:cs typeface="Georgia" pitchFamily="34" charset="-120"/>
-              </a:rPr>
-              <a:t>Review &amp; Practise</a:t>
-            </a:r>
-            <a:endParaRPr lang="en-US" sz="3600" dirty="0"/>
-          </a:p>
-        </p:txBody>
-      </p:sp>
-      <p:sp>
-        <p:nvSpPr>
-          <p:cNvPr id="5" name="Text 3"/>
-          <p:cNvSpPr/>
-          <p:nvPr/>
-        </p:nvSpPr>
-        <p:spPr>
-          <a:xfrm>
-            <a:off x="731520" y="2468880"/>
-            <a:ext cx="7680960" cy="548640"/>
-          </a:xfrm>
-          <a:prstGeom prst="rect">
-            <a:avLst/>
-          </a:prstGeom>
-          <a:noFill/>
-          <a:ln/>
-        </p:spPr>
-        <p:txBody>
-          <a:bodyPr wrap="square" rtlCol="0" anchor="ctr"/>
-          <a:lstStyle/>
-          <a:p>
-            <a:pPr algn="ctr" indent="0" marL="0">
-              <a:buNone/>
-            </a:pPr>
-            <a:r>
-              <a:rPr lang="en-US" sz="1800" dirty="0">
-                <a:solidFill>
-                  <a:srgbClr val="2A9D8F"/>
-                </a:solidFill>
-                <a:latin typeface="Calibri" pitchFamily="34" charset="0"/>
-                <a:ea typeface="Calibri" pitchFamily="34" charset="-122"/>
-                <a:cs typeface="Calibri" pitchFamily="34" charset="-120"/>
-              </a:rPr>
-              <a:t>learnlattice.org/students/exam-revision</a:t>
-            </a:r>
-            <a:endParaRPr lang="en-US" sz="1800" dirty="0"/>
-          </a:p>
-        </p:txBody>
-      </p:sp>
-      <p:sp>
-        <p:nvSpPr>
-          <p:cNvPr id="6" name="Text 4"/>
-          <p:cNvSpPr/>
-          <p:nvPr/>
-        </p:nvSpPr>
-        <p:spPr>
-          <a:xfrm>
-            <a:off x="731520" y="3200400"/>
-            <a:ext cx="7680960" cy="457200"/>
-          </a:xfrm>
-          <a:prstGeom prst="rect">
-            <a:avLst/>
-          </a:prstGeom>
-          <a:noFill/>
-          <a:ln/>
-        </p:spPr>
-        <p:txBody>
-          <a:bodyPr wrap="square" rtlCol="0" anchor="ctr"/>
-          <a:lstStyle/>
-          <a:p>
-            <a:pPr algn="ctr" indent="0" marL="0">
-              <a:buNone/>
-            </a:pPr>
-            <a:r>
-              <a:rPr lang="en-US" sz="1400" dirty="0">
-                <a:solidFill>
-                  <a:srgbClr val="9B9690"/>
-                </a:solidFill>
-                <a:latin typeface="Calibri" pitchFamily="34" charset="0"/>
-                <a:ea typeface="Calibri" pitchFamily="34" charset="-122"/>
-                <a:cs typeface="Calibri" pitchFamily="34" charset="-120"/>
               </a:rPr>
               <a:t>mrzocchi.com</a:t>
             </a:r>
-            <a:endParaRPr lang="en-US" sz="1400" dirty="0"/>
+            <a:endParaRPr lang="en-US" sz="1000" dirty="0"/>
           </a:p>
         </p:txBody>
       </p:sp>

--- a/static/ppts/G6_Math_Volume.pptx
+++ b/static/ppts/G6_Math_Volume.pptx
@@ -8,9 +8,11 @@
     <p:sldId id="256" r:id="rId2"/>
     <p:sldId id="257" r:id="rId3"/>
     <p:sldId id="258" r:id="rId4"/>
+    <p:sldId id="259" r:id="rId5"/>
+    <p:sldId id="260" r:id="rId6"/>
   </p:sldIdLst>
   <p:notesMasterIdLst>
-    <p:notesMasterId r:id="rId5"/>
+    <p:notesMasterId r:id="rId7"/>
   </p:notesMasterIdLst>
   <p:sldSz cx="9144000" cy="5143500"/>
   <p:notesSz cx="5143500" cy="9144000"/>
@@ -722,6 +724,182 @@
 </p:notes>
 </file>
 
+<file path=ppt/notesSlides/notesSlide4.xml><?xml version="1.0" encoding="utf-8"?>
+<p:notes xmlns:a="http://schemas.openxmlformats.org/drawingml/2006/main" xmlns:r="http://schemas.openxmlformats.org/officeDocument/2006/relationships" xmlns:p="http://schemas.openxmlformats.org/presentationml/2006/main">
+  <p:cSld>
+    <p:spTree>
+      <p:nvGrpSpPr>
+        <p:cNvPr id="1" name=""/>
+        <p:cNvGrpSpPr/>
+        <p:nvPr/>
+      </p:nvGrpSpPr>
+      <p:grpSpPr>
+        <a:xfrm>
+          <a:off x="0" y="0"/>
+          <a:ext cx="0" cy="0"/>
+          <a:chOff x="0" y="0"/>
+          <a:chExt cx="0" cy="0"/>
+        </a:xfrm>
+      </p:grpSpPr>
+      <p:sp>
+        <p:nvSpPr>
+          <p:cNvPr id="2" name="Slide Image Placeholder 1"/>
+          <p:cNvSpPr>
+            <a:spLocks noGrp="1" noRot="1" noChangeAspect="1"/>
+          </p:cNvSpPr>
+          <p:nvPr>
+            <p:ph type="sldImg"/>
+          </p:nvPr>
+        </p:nvSpPr>
+        <p:spPr/>
+      </p:sp>
+      <p:sp>
+        <p:nvSpPr>
+          <p:cNvPr id="3" name="Notes Placeholder 2"/>
+          <p:cNvSpPr>
+            <a:spLocks noGrp="1"/>
+          </p:cNvSpPr>
+          <p:nvPr>
+            <p:ph type="body" idx="1"/>
+          </p:nvPr>
+        </p:nvSpPr>
+        <p:spPr/>
+        <p:txBody>
+          <a:bodyPr/>
+          <a:lstStyle/>
+          <a:p>
+            <a:r>
+              <a:rPr lang="en-US" dirty="0"/>
+              <a:t/>
+            </a:r>
+            <a:endParaRPr lang="en-US" dirty="0"/>
+          </a:p>
+        </p:txBody>
+      </p:sp>
+      <p:sp>
+        <p:nvSpPr>
+          <p:cNvPr id="4" name="Slide Number Placeholder 3"/>
+          <p:cNvSpPr>
+            <a:spLocks noGrp="1"/>
+          </p:cNvSpPr>
+          <p:nvPr>
+            <p:ph type="sldNum" sz="quarter" idx="10"/>
+          </p:nvPr>
+        </p:nvSpPr>
+        <p:spPr/>
+        <p:txBody>
+          <a:bodyPr/>
+          <a:lstStyle/>
+          <a:p>
+            <a:fld id="{F7021451-1387-4CA6-816F-3879F97B5CBC}" type="slidenum">
+              <a:rPr lang="en-US"/>
+              <a:t>4</a:t>
+            </a:fld>
+            <a:endParaRPr lang="en-US"/>
+          </a:p>
+        </p:txBody>
+      </p:sp>
+    </p:spTree>
+    <p:extLst>
+      <p:ext uri="{BB962C8B-B14F-4D97-AF65-F5344CB8AC3E}">
+        <p14:creationId xmlns:p14="http://schemas.microsoft.com/office/powerpoint/2010/main" val="1024086991"/>
+      </p:ext>
+    </p:extLst>
+  </p:cSld>
+  <p:clrMapOvr>
+    <a:masterClrMapping/>
+  </p:clrMapOvr>
+</p:notes>
+</file>
+
+<file path=ppt/notesSlides/notesSlide5.xml><?xml version="1.0" encoding="utf-8"?>
+<p:notes xmlns:a="http://schemas.openxmlformats.org/drawingml/2006/main" xmlns:r="http://schemas.openxmlformats.org/officeDocument/2006/relationships" xmlns:p="http://schemas.openxmlformats.org/presentationml/2006/main">
+  <p:cSld>
+    <p:spTree>
+      <p:nvGrpSpPr>
+        <p:cNvPr id="1" name=""/>
+        <p:cNvGrpSpPr/>
+        <p:nvPr/>
+      </p:nvGrpSpPr>
+      <p:grpSpPr>
+        <a:xfrm>
+          <a:off x="0" y="0"/>
+          <a:ext cx="0" cy="0"/>
+          <a:chOff x="0" y="0"/>
+          <a:chExt cx="0" cy="0"/>
+        </a:xfrm>
+      </p:grpSpPr>
+      <p:sp>
+        <p:nvSpPr>
+          <p:cNvPr id="2" name="Slide Image Placeholder 1"/>
+          <p:cNvSpPr>
+            <a:spLocks noGrp="1" noRot="1" noChangeAspect="1"/>
+          </p:cNvSpPr>
+          <p:nvPr>
+            <p:ph type="sldImg"/>
+          </p:nvPr>
+        </p:nvSpPr>
+        <p:spPr/>
+      </p:sp>
+      <p:sp>
+        <p:nvSpPr>
+          <p:cNvPr id="3" name="Notes Placeholder 2"/>
+          <p:cNvSpPr>
+            <a:spLocks noGrp="1"/>
+          </p:cNvSpPr>
+          <p:nvPr>
+            <p:ph type="body" idx="1"/>
+          </p:nvPr>
+        </p:nvSpPr>
+        <p:spPr/>
+        <p:txBody>
+          <a:bodyPr/>
+          <a:lstStyle/>
+          <a:p>
+            <a:r>
+              <a:rPr lang="en-US" dirty="0"/>
+              <a:t/>
+            </a:r>
+            <a:endParaRPr lang="en-US" dirty="0"/>
+          </a:p>
+        </p:txBody>
+      </p:sp>
+      <p:sp>
+        <p:nvSpPr>
+          <p:cNvPr id="4" name="Slide Number Placeholder 3"/>
+          <p:cNvSpPr>
+            <a:spLocks noGrp="1"/>
+          </p:cNvSpPr>
+          <p:nvPr>
+            <p:ph type="sldNum" sz="quarter" idx="10"/>
+          </p:nvPr>
+        </p:nvSpPr>
+        <p:spPr/>
+        <p:txBody>
+          <a:bodyPr/>
+          <a:lstStyle/>
+          <a:p>
+            <a:fld id="{F7021451-1387-4CA6-816F-3879F97B5CBC}" type="slidenum">
+              <a:rPr lang="en-US"/>
+              <a:t>5</a:t>
+            </a:fld>
+            <a:endParaRPr lang="en-US"/>
+          </a:p>
+        </p:txBody>
+      </p:sp>
+    </p:spTree>
+    <p:extLst>
+      <p:ext uri="{BB962C8B-B14F-4D97-AF65-F5344CB8AC3E}">
+        <p14:creationId xmlns:p14="http://schemas.microsoft.com/office/powerpoint/2010/main" val="1024086991"/>
+      </p:ext>
+    </p:extLst>
+  </p:cSld>
+  <p:clrMapOvr>
+    <a:masterClrMapping/>
+  </p:clrMapOvr>
+</p:notes>
+</file>
+
 <file path=ppt/slideLayouts/slideLayout1.xml><?xml version="1.0" encoding="utf-8"?>
 <p:sldLayout xmlns:a="http://schemas.openxmlformats.org/drawingml/2006/main" xmlns:r="http://schemas.openxmlformats.org/officeDocument/2006/relationships" xmlns:p="http://schemas.openxmlformats.org/presentationml/2006/main" preserve="1">
   <p:cSld name="DEFAULT">
@@ -1081,7 +1259,7 @@
         </p:nvSpPr>
         <p:spPr>
           <a:xfrm>
-            <a:off x="731520" y="1280160"/>
+            <a:off x="731520" y="1097280"/>
             <a:ext cx="7772400" cy="1371600"/>
           </a:xfrm>
           <a:prstGeom prst="rect">
@@ -1098,7 +1276,7 @@
               <a:buNone/>
             </a:pPr>
             <a:r>
-              <a:rPr lang="en-US" sz="3600" b="1" dirty="0">
+              <a:rPr lang="en-US" sz="4000" b="1" dirty="0">
                 <a:solidFill>
                   <a:srgbClr val="FFFFFF"/>
                 </a:solidFill>
@@ -1108,7 +1286,7 @@
               </a:rPr>
               <a:t>Volume</a:t>
             </a:r>
-            <a:endParaRPr lang="en-US" sz="3600" dirty="0"/>
+            <a:endParaRPr lang="en-US" sz="4000" dirty="0"/>
           </a:p>
         </p:txBody>
       </p:sp>
@@ -1120,7 +1298,7 @@
         </p:nvSpPr>
         <p:spPr>
           <a:xfrm>
-            <a:off x="731520" y="2743200"/>
+            <a:off x="731520" y="2560320"/>
             <a:ext cx="7772400" cy="548640"/>
           </a:xfrm>
           <a:prstGeom prst="rect">
@@ -1139,13 +1317,13 @@
             <a:r>
               <a:rPr lang="en-US" sz="1600" dirty="0">
                 <a:solidFill>
-                  <a:srgbClr val="9B9690"/>
+                  <a:srgbClr val="E9C46A"/>
                 </a:solidFill>
                 <a:latin typeface="Calibri" pitchFamily="34" charset="0"/>
                 <a:ea typeface="Calibri" pitchFamily="34" charset="-122"/>
                 <a:cs typeface="Calibri" pitchFamily="34" charset="-120"/>
               </a:rPr>
-              <a:t>G6 Maths · Geometry</a:t>
+              <a:t>Grade 6 Mathematics · Mr Zocchi</a:t>
             </a:r>
             <a:endParaRPr lang="en-US" sz="1600" dirty="0"/>
           </a:p>
@@ -1153,14 +1331,36 @@
       </p:sp>
       <p:sp>
         <p:nvSpPr>
-          <p:cNvPr id="5" name="Text 3"/>
-          <p:cNvSpPr/>
-          <p:nvPr/>
-        </p:nvSpPr>
-        <p:spPr>
-          <a:xfrm>
-            <a:off x="731520" y="4389120"/>
-            <a:ext cx="7772400" cy="457200"/>
+          <p:cNvPr id="5" name="Shape 3"/>
+          <p:cNvSpPr/>
+          <p:nvPr/>
+        </p:nvSpPr>
+        <p:spPr>
+          <a:xfrm>
+            <a:off x="731520" y="3474720"/>
+            <a:ext cx="2011680" cy="411480"/>
+          </a:xfrm>
+          <a:prstGeom prst="roundRect">
+            <a:avLst>
+              <a:gd name="adj" fmla="val 17778"/>
+            </a:avLst>
+          </a:prstGeom>
+          <a:solidFill>
+            <a:srgbClr val="2A9D8F"/>
+          </a:solidFill>
+          <a:ln/>
+        </p:spPr>
+      </p:sp>
+      <p:sp>
+        <p:nvSpPr>
+          <p:cNvPr id="6" name="Text 4"/>
+          <p:cNvSpPr/>
+          <p:nvPr/>
+        </p:nvSpPr>
+        <p:spPr>
+          <a:xfrm>
+            <a:off x="731520" y="3474720"/>
+            <a:ext cx="2011680" cy="411480"/>
           </a:xfrm>
           <a:prstGeom prst="rect">
             <a:avLst/>
@@ -1172,21 +1372,21 @@
           <a:bodyPr wrap="square" rtlCol="0" anchor="ctr"/>
           <a:lstStyle/>
           <a:p>
-            <a:pPr indent="0" marL="0">
+            <a:pPr algn="ctr" indent="0" marL="0">
               <a:buNone/>
             </a:pPr>
             <a:r>
-              <a:rPr lang="en-US" sz="1000" dirty="0">
-                <a:solidFill>
-                  <a:srgbClr val="6B6660"/>
+              <a:rPr lang="en-US" sz="1200" b="1" dirty="0">
+                <a:solidFill>
+                  <a:srgbClr val="FFFFFF"/>
                 </a:solidFill>
                 <a:latin typeface="Calibri" pitchFamily="34" charset="0"/>
                 <a:ea typeface="Calibri" pitchFamily="34" charset="-122"/>
                 <a:cs typeface="Calibri" pitchFamily="34" charset="-120"/>
               </a:rPr>
-              <a:t>Mr Zocchi · mrzocchi.com</a:t>
-            </a:r>
-            <a:endParaRPr lang="en-US" sz="1000" dirty="0"/>
+              <a:t>Term 3 · Geometry</a:t>
+            </a:r>
+            <a:endParaRPr lang="en-US" sz="1200" dirty="0"/>
           </a:p>
         </p:txBody>
       </p:sp>
@@ -1204,7 +1404,7 @@
     <p:bg>
       <p:bgPr>
         <a:solidFill>
-          <a:srgbClr val="FFFFFF"/>
+          <a:srgbClr val="FAF8F5"/>
         </a:solidFill>
       </p:bgPr>
     </p:bg>
@@ -1250,8 +1450,8 @@
         </p:nvSpPr>
         <p:spPr>
           <a:xfrm>
-            <a:off x="548640" y="274320"/>
-            <a:ext cx="8046720" cy="640080"/>
+            <a:off x="7772400" y="4709160"/>
+            <a:ext cx="1097280" cy="320040"/>
           </a:xfrm>
           <a:prstGeom prst="rect">
             <a:avLst/>
@@ -1260,14 +1460,105 @@
           <a:ln/>
         </p:spPr>
         <p:txBody>
-          <a:bodyPr wrap="square" lIns="0" tIns="0" rIns="0" bIns="0" rtlCol="0" anchor="ctr"/>
+          <a:bodyPr wrap="square" rtlCol="0" anchor="ctr"/>
+          <a:lstStyle/>
+          <a:p>
+            <a:pPr algn="r" indent="0" marL="0">
+              <a:buNone/>
+            </a:pPr>
+            <a:r>
+              <a:rPr lang="en-US" sz="900" dirty="0">
+                <a:solidFill>
+                  <a:srgbClr val="6B6660"/>
+                </a:solidFill>
+                <a:latin typeface="Calibri" pitchFamily="34" charset="0"/>
+                <a:ea typeface="Calibri" pitchFamily="34" charset="-122"/>
+                <a:cs typeface="Calibri" pitchFamily="34" charset="-120"/>
+              </a:rPr>
+              <a:t>2 / 5</a:t>
+            </a:r>
+            <a:endParaRPr lang="en-US" sz="900" dirty="0"/>
+          </a:p>
+        </p:txBody>
+      </p:sp>
+      <p:sp>
+        <p:nvSpPr>
+          <p:cNvPr id="4" name="Shape 2"/>
+          <p:cNvSpPr/>
+          <p:nvPr/>
+        </p:nvSpPr>
+        <p:spPr>
+          <a:xfrm>
+            <a:off x="1371600" y="914400"/>
+            <a:ext cx="6400800" cy="3200400"/>
+          </a:xfrm>
+          <a:prstGeom prst="rect">
+            <a:avLst/>
+          </a:prstGeom>
+          <a:solidFill>
+            <a:srgbClr val="FFFFFF"/>
+          </a:solidFill>
+          <a:ln w="12700">
+            <a:solidFill>
+              <a:srgbClr val="E5E2DC"/>
+            </a:solidFill>
+            <a:prstDash val="solid"/>
+          </a:ln>
+          <a:effectLst>
+            <a:outerShdw sx="100000" sy="100000" kx="0" ky="0" algn="bl" rotWithShape="0" blurRad="50800" dist="25400" dir="8100000">
+              <a:srgbClr val="000000">
+                <a:alpha val="10000"/>
+              </a:srgbClr>
+            </a:outerShdw>
+          </a:effectLst>
+        </p:spPr>
+      </p:sp>
+      <p:sp>
+        <p:nvSpPr>
+          <p:cNvPr id="5" name="Shape 3"/>
+          <p:cNvSpPr/>
+          <p:nvPr/>
+        </p:nvSpPr>
+        <p:spPr>
+          <a:xfrm>
+            <a:off x="1371600" y="914400"/>
+            <a:ext cx="91440" cy="3200400"/>
+          </a:xfrm>
+          <a:prstGeom prst="rect">
+            <a:avLst/>
+          </a:prstGeom>
+          <a:solidFill>
+            <a:srgbClr val="2A9D8F"/>
+          </a:solidFill>
+          <a:ln/>
+        </p:spPr>
+      </p:sp>
+      <p:sp>
+        <p:nvSpPr>
+          <p:cNvPr id="6" name="Text 4"/>
+          <p:cNvSpPr/>
+          <p:nvPr/>
+        </p:nvSpPr>
+        <p:spPr>
+          <a:xfrm>
+            <a:off x="1828800" y="1097280"/>
+            <a:ext cx="5669280" cy="640080"/>
+          </a:xfrm>
+          <a:prstGeom prst="rect">
+            <a:avLst/>
+          </a:prstGeom>
+          <a:noFill/>
+          <a:ln/>
+        </p:spPr>
+        <p:txBody>
+          <a:bodyPr wrap="square" rtlCol="0" anchor="ctr"/>
           <a:lstStyle/>
           <a:p>
             <a:pPr indent="0" marL="0">
               <a:buNone/>
             </a:pPr>
             <a:r>
-              <a:rPr lang="en-US" sz="2600" b="1" dirty="0">
+              <a:rPr lang="en-US" sz="2400" b="1" dirty="0">
                 <a:solidFill>
                   <a:srgbClr val="1B2A4A"/>
                 </a:solidFill>
@@ -1277,20 +1568,20 @@
               </a:rPr>
               <a:t>What is Volume?</a:t>
             </a:r>
-            <a:endParaRPr lang="en-US" sz="2600" dirty="0"/>
-          </a:p>
-        </p:txBody>
-      </p:sp>
-      <p:sp>
-        <p:nvSpPr>
-          <p:cNvPr id="4" name="Text 2"/>
-          <p:cNvSpPr/>
-          <p:nvPr/>
-        </p:nvSpPr>
-        <p:spPr>
-          <a:xfrm>
-            <a:off x="548640" y="1097280"/>
-            <a:ext cx="8046720" cy="3474720"/>
+            <a:endParaRPr lang="en-US" sz="2400" dirty="0"/>
+          </a:p>
+        </p:txBody>
+      </p:sp>
+      <p:sp>
+        <p:nvSpPr>
+          <p:cNvPr id="7" name="Text 5"/>
+          <p:cNvSpPr/>
+          <p:nvPr/>
+        </p:nvSpPr>
+        <p:spPr>
+          <a:xfrm>
+            <a:off x="1828800" y="1828800"/>
+            <a:ext cx="5669280" cy="2011680"/>
           </a:xfrm>
           <a:prstGeom prst="rect">
             <a:avLst/>
@@ -1302,12 +1593,11 @@
           <a:bodyPr wrap="square" rtlCol="0" anchor="t"/>
           <a:lstStyle/>
           <a:p>
-            <a:pPr marL="342900" indent="-342900">
-              <a:spcAft>
-                <a:spcPts val="800"/>
-              </a:spcAft>
-              <a:buSzPct val="100000"/>
-              <a:buChar char="•"/>
+            <a:pPr indent="0" marL="0">
+              <a:lnSpc>
+                <a:spcPct val="130000"/>
+              </a:lnSpc>
+              <a:buNone/>
             </a:pPr>
             <a:r>
               <a:rPr lang="en-US" sz="1500" dirty="0">
@@ -1318,150 +1608,9 @@
                 <a:ea typeface="Calibri" pitchFamily="34" charset="-122"/>
                 <a:cs typeface="Calibri" pitchFamily="34" charset="-120"/>
               </a:rPr>
-              <a:t>The amount of 3D space inside a solid shape</a:t>
+              <a:t>Volume is the amount of 3D space an object takes up. It is measured in cubic units: mm³, cm³, m³. Think of it as how many 1×1×1 unit cubes fit inside the shape. Volume has three dimensions: length, width, and height.</a:t>
             </a:r>
             <a:endParaRPr lang="en-US" sz="1500" dirty="0"/>
-          </a:p>
-          <a:p>
-            <a:pPr marL="342900" indent="-342900">
-              <a:spcAft>
-                <a:spcPts val="800"/>
-              </a:spcAft>
-              <a:buSzPct val="100000"/>
-              <a:buChar char="•"/>
-            </a:pPr>
-            <a:r>
-              <a:rPr lang="en-US" sz="1500" dirty="0">
-                <a:solidFill>
-                  <a:srgbClr val="3D3A36"/>
-                </a:solidFill>
-                <a:latin typeface="Calibri" pitchFamily="34" charset="0"/>
-                <a:ea typeface="Calibri" pitchFamily="34" charset="-122"/>
-                <a:cs typeface="Calibri" pitchFamily="34" charset="-120"/>
-              </a:rPr>
-              <a:t>Measured in cubic units: cm³, m³</a:t>
-            </a:r>
-            <a:endParaRPr lang="en-US" sz="1500" dirty="0"/>
-          </a:p>
-          <a:p>
-            <a:pPr marL="342900" indent="-342900">
-              <a:spcAft>
-                <a:spcPts val="800"/>
-              </a:spcAft>
-              <a:buSzPct val="100000"/>
-              <a:buChar char="•"/>
-            </a:pPr>
-            <a:r>
-              <a:rPr lang="en-US" sz="1500" dirty="0">
-                <a:solidFill>
-                  <a:srgbClr val="3D3A36"/>
-                </a:solidFill>
-                <a:latin typeface="Calibri" pitchFamily="34" charset="0"/>
-                <a:ea typeface="Calibri" pitchFamily="34" charset="-122"/>
-                <a:cs typeface="Calibri" pitchFamily="34" charset="-120"/>
-              </a:rPr>
-              <a:t>Cuboid: V = length × width × height</a:t>
-            </a:r>
-            <a:endParaRPr lang="en-US" sz="1500" dirty="0"/>
-          </a:p>
-          <a:p>
-            <a:pPr marL="342900" indent="-342900">
-              <a:spcAft>
-                <a:spcPts val="800"/>
-              </a:spcAft>
-              <a:buSzPct val="100000"/>
-              <a:buChar char="•"/>
-            </a:pPr>
-            <a:r>
-              <a:rPr lang="en-US" sz="1500" dirty="0">
-                <a:solidFill>
-                  <a:srgbClr val="3D3A36"/>
-                </a:solidFill>
-                <a:latin typeface="Calibri" pitchFamily="34" charset="0"/>
-                <a:ea typeface="Calibri" pitchFamily="34" charset="-122"/>
-                <a:cs typeface="Calibri" pitchFamily="34" charset="-120"/>
-              </a:rPr>
-              <a:t>Cube: V = side × side × side = side³</a:t>
-            </a:r>
-            <a:endParaRPr lang="en-US" sz="1500" dirty="0"/>
-          </a:p>
-          <a:p>
-            <a:pPr marL="342900" indent="-342900">
-              <a:spcAft>
-                <a:spcPts val="800"/>
-              </a:spcAft>
-              <a:buSzPct val="100000"/>
-              <a:buChar char="•"/>
-            </a:pPr>
-            <a:r>
-              <a:rPr lang="en-US" sz="1500" dirty="0">
-                <a:solidFill>
-                  <a:srgbClr val="3D3A36"/>
-                </a:solidFill>
-                <a:latin typeface="Calibri" pitchFamily="34" charset="0"/>
-                <a:ea typeface="Calibri" pitchFamily="34" charset="-122"/>
-                <a:cs typeface="Calibri" pitchFamily="34" charset="-120"/>
-              </a:rPr>
-              <a:t>Count cubes: each small cube = 1 cm³</a:t>
-            </a:r>
-            <a:endParaRPr lang="en-US" sz="1500" dirty="0"/>
-          </a:p>
-          <a:p>
-            <a:pPr marL="342900" indent="-342900">
-              <a:spcAft>
-                <a:spcPts val="800"/>
-              </a:spcAft>
-              <a:buSzPct val="100000"/>
-              <a:buChar char="•"/>
-            </a:pPr>
-            <a:r>
-              <a:rPr lang="en-US" sz="1500" dirty="0">
-                <a:solidFill>
-                  <a:srgbClr val="3D3A36"/>
-                </a:solidFill>
-                <a:latin typeface="Calibri" pitchFamily="34" charset="0"/>
-                <a:ea typeface="Calibri" pitchFamily="34" charset="-122"/>
-                <a:cs typeface="Calibri" pitchFamily="34" charset="-120"/>
-              </a:rPr>
-              <a:t>For compound 3D shapes: split into cuboids, calculate each, add together</a:t>
-            </a:r>
-            <a:endParaRPr lang="en-US" sz="1500" dirty="0"/>
-          </a:p>
-        </p:txBody>
-      </p:sp>
-      <p:sp>
-        <p:nvSpPr>
-          <p:cNvPr id="5" name="Text 3"/>
-          <p:cNvSpPr/>
-          <p:nvPr/>
-        </p:nvSpPr>
-        <p:spPr>
-          <a:xfrm>
-            <a:off x="548640" y="4800600"/>
-            <a:ext cx="3657600" cy="274320"/>
-          </a:xfrm>
-          <a:prstGeom prst="rect">
-            <a:avLst/>
-          </a:prstGeom>
-          <a:noFill/>
-          <a:ln/>
-        </p:spPr>
-        <p:txBody>
-          <a:bodyPr wrap="square" rtlCol="0" anchor="ctr"/>
-          <a:lstStyle/>
-          <a:p>
-            <a:pPr indent="0" marL="0">
-              <a:buNone/>
-            </a:pPr>
-            <a:r>
-              <a:rPr lang="en-US" sz="800" dirty="0">
-                <a:solidFill>
-                  <a:srgbClr val="9B9690"/>
-                </a:solidFill>
-              </a:rPr>
-              <a:t>mrzocchi.com</a:t>
-            </a:r>
-            <a:endParaRPr lang="en-US" sz="800" dirty="0"/>
           </a:p>
         </p:txBody>
       </p:sp>
@@ -1476,6 +1625,965 @@
 <file path=ppt/slides/slide3.xml><?xml version="1.0" encoding="utf-8"?>
 <p:sld xmlns:a="http://schemas.openxmlformats.org/drawingml/2006/main" xmlns:r="http://schemas.openxmlformats.org/officeDocument/2006/relationships" xmlns:p="http://schemas.openxmlformats.org/presentationml/2006/main">
   <p:cSld name="Slide 3">
+    <p:bg>
+      <p:bgPr>
+        <a:solidFill>
+          <a:srgbClr val="FAF8F5"/>
+        </a:solidFill>
+      </p:bgPr>
+    </p:bg>
+    <p:spTree>
+      <p:nvGrpSpPr>
+        <p:cNvPr id="1" name=""/>
+        <p:cNvGrpSpPr/>
+        <p:nvPr/>
+      </p:nvGrpSpPr>
+      <p:grpSpPr>
+        <a:xfrm>
+          <a:off x="0" y="0"/>
+          <a:ext cx="0" cy="0"/>
+          <a:chOff x="0" y="0"/>
+          <a:chExt cx="0" cy="0"/>
+        </a:xfrm>
+      </p:grpSpPr>
+      <p:sp>
+        <p:nvSpPr>
+          <p:cNvPr id="2" name="Shape 0"/>
+          <p:cNvSpPr/>
+          <p:nvPr/>
+        </p:nvSpPr>
+        <p:spPr>
+          <a:xfrm>
+            <a:off x="0" y="0"/>
+            <a:ext cx="9144000" cy="54864"/>
+          </a:xfrm>
+          <a:prstGeom prst="rect">
+            <a:avLst/>
+          </a:prstGeom>
+          <a:solidFill>
+            <a:srgbClr val="2A9D8F"/>
+          </a:solidFill>
+          <a:ln/>
+        </p:spPr>
+      </p:sp>
+      <p:sp>
+        <p:nvSpPr>
+          <p:cNvPr id="3" name="Text 1"/>
+          <p:cNvSpPr/>
+          <p:nvPr/>
+        </p:nvSpPr>
+        <p:spPr>
+          <a:xfrm>
+            <a:off x="7772400" y="4709160"/>
+            <a:ext cx="1097280" cy="320040"/>
+          </a:xfrm>
+          <a:prstGeom prst="rect">
+            <a:avLst/>
+          </a:prstGeom>
+          <a:noFill/>
+          <a:ln/>
+        </p:spPr>
+        <p:txBody>
+          <a:bodyPr wrap="square" rtlCol="0" anchor="ctr"/>
+          <a:lstStyle/>
+          <a:p>
+            <a:pPr algn="r" indent="0" marL="0">
+              <a:buNone/>
+            </a:pPr>
+            <a:r>
+              <a:rPr lang="en-US" sz="900" dirty="0">
+                <a:solidFill>
+                  <a:srgbClr val="6B6660"/>
+                </a:solidFill>
+                <a:latin typeface="Calibri" pitchFamily="34" charset="0"/>
+                <a:ea typeface="Calibri" pitchFamily="34" charset="-122"/>
+                <a:cs typeface="Calibri" pitchFamily="34" charset="-120"/>
+              </a:rPr>
+              <a:t>3 / 5</a:t>
+            </a:r>
+            <a:endParaRPr lang="en-US" sz="900" dirty="0"/>
+          </a:p>
+        </p:txBody>
+      </p:sp>
+      <p:sp>
+        <p:nvSpPr>
+          <p:cNvPr id="4" name="Text 2"/>
+          <p:cNvSpPr/>
+          <p:nvPr/>
+        </p:nvSpPr>
+        <p:spPr>
+          <a:xfrm>
+            <a:off x="457200" y="274320"/>
+            <a:ext cx="8229600" cy="640080"/>
+          </a:xfrm>
+          <a:prstGeom prst="rect">
+            <a:avLst/>
+          </a:prstGeom>
+          <a:noFill/>
+          <a:ln/>
+        </p:spPr>
+        <p:txBody>
+          <a:bodyPr wrap="square" rtlCol="0" anchor="ctr"/>
+          <a:lstStyle/>
+          <a:p>
+            <a:pPr indent="0" marL="0">
+              <a:buNone/>
+            </a:pPr>
+            <a:r>
+              <a:rPr lang="en-US" sz="2600" b="1" dirty="0">
+                <a:solidFill>
+                  <a:srgbClr val="1B2A4A"/>
+                </a:solidFill>
+                <a:latin typeface="Georgia" pitchFamily="34" charset="0"/>
+                <a:ea typeface="Georgia" pitchFamily="34" charset="-122"/>
+                <a:cs typeface="Georgia" pitchFamily="34" charset="-120"/>
+              </a:rPr>
+              <a:t>Volume Formulas</a:t>
+            </a:r>
+            <a:endParaRPr lang="en-US" sz="2600" dirty="0"/>
+          </a:p>
+        </p:txBody>
+      </p:sp>
+      <p:sp>
+        <p:nvSpPr>
+          <p:cNvPr id="5" name="Shape 3"/>
+          <p:cNvSpPr/>
+          <p:nvPr/>
+        </p:nvSpPr>
+        <p:spPr>
+          <a:xfrm>
+            <a:off x="457200" y="1188720"/>
+            <a:ext cx="2560320" cy="1828800"/>
+          </a:xfrm>
+          <a:prstGeom prst="rect">
+            <a:avLst/>
+          </a:prstGeom>
+          <a:solidFill>
+            <a:srgbClr val="FFFFFF"/>
+          </a:solidFill>
+          <a:ln w="12700">
+            <a:solidFill>
+              <a:srgbClr val="E5E2DC"/>
+            </a:solidFill>
+            <a:prstDash val="solid"/>
+          </a:ln>
+          <a:effectLst>
+            <a:outerShdw sx="100000" sy="100000" kx="0" ky="0" algn="bl" rotWithShape="0" blurRad="50800" dist="25400" dir="8100000">
+              <a:srgbClr val="000000">
+                <a:alpha val="10000"/>
+              </a:srgbClr>
+            </a:outerShdw>
+          </a:effectLst>
+        </p:spPr>
+      </p:sp>
+      <p:sp>
+        <p:nvSpPr>
+          <p:cNvPr id="6" name="Shape 4"/>
+          <p:cNvSpPr/>
+          <p:nvPr/>
+        </p:nvSpPr>
+        <p:spPr>
+          <a:xfrm>
+            <a:off x="457200" y="1188720"/>
+            <a:ext cx="2560320" cy="54864"/>
+          </a:xfrm>
+          <a:prstGeom prst="rect">
+            <a:avLst/>
+          </a:prstGeom>
+          <a:solidFill>
+            <a:srgbClr val="2A9D8F"/>
+          </a:solidFill>
+          <a:ln/>
+        </p:spPr>
+      </p:sp>
+      <p:sp>
+        <p:nvSpPr>
+          <p:cNvPr id="7" name="Text 5"/>
+          <p:cNvSpPr/>
+          <p:nvPr/>
+        </p:nvSpPr>
+        <p:spPr>
+          <a:xfrm>
+            <a:off x="594360" y="1325880"/>
+            <a:ext cx="2286000" cy="365760"/>
+          </a:xfrm>
+          <a:prstGeom prst="rect">
+            <a:avLst/>
+          </a:prstGeom>
+          <a:noFill/>
+          <a:ln/>
+        </p:spPr>
+        <p:txBody>
+          <a:bodyPr wrap="square" rtlCol="0" anchor="ctr"/>
+          <a:lstStyle/>
+          <a:p>
+            <a:pPr indent="0" marL="0">
+              <a:buNone/>
+            </a:pPr>
+            <a:r>
+              <a:rPr lang="en-US" sz="1400" b="1" dirty="0">
+                <a:solidFill>
+                  <a:srgbClr val="1B2A4A"/>
+                </a:solidFill>
+                <a:latin typeface="Calibri" pitchFamily="34" charset="0"/>
+                <a:ea typeface="Calibri" pitchFamily="34" charset="-122"/>
+                <a:cs typeface="Calibri" pitchFamily="34" charset="-120"/>
+              </a:rPr>
+              <a:t>Cuboid</a:t>
+            </a:r>
+            <a:endParaRPr lang="en-US" sz="1400" dirty="0"/>
+          </a:p>
+        </p:txBody>
+      </p:sp>
+      <p:sp>
+        <p:nvSpPr>
+          <p:cNvPr id="8" name="Text 6"/>
+          <p:cNvSpPr/>
+          <p:nvPr/>
+        </p:nvSpPr>
+        <p:spPr>
+          <a:xfrm>
+            <a:off x="594360" y="1737360"/>
+            <a:ext cx="2286000" cy="1097280"/>
+          </a:xfrm>
+          <a:prstGeom prst="rect">
+            <a:avLst/>
+          </a:prstGeom>
+          <a:noFill/>
+          <a:ln/>
+        </p:spPr>
+        <p:txBody>
+          <a:bodyPr wrap="square" rtlCol="0" anchor="t"/>
+          <a:lstStyle/>
+          <a:p>
+            <a:pPr indent="0" marL="0">
+              <a:buNone/>
+            </a:pPr>
+            <a:r>
+              <a:rPr lang="en-US" sz="1100" dirty="0">
+                <a:solidFill>
+                  <a:srgbClr val="3D3A36"/>
+                </a:solidFill>
+                <a:latin typeface="Calibri" pitchFamily="34" charset="0"/>
+                <a:ea typeface="Calibri" pitchFamily="34" charset="-122"/>
+                <a:cs typeface="Calibri" pitchFamily="34" charset="-120"/>
+              </a:rPr>
+              <a:t>V = length × width × height. Example: 5 × 3 × 2 = 30 cm³. A cube: V = s³. Example: s = 4cm → V = 64 cm³.</a:t>
+            </a:r>
+            <a:endParaRPr lang="en-US" sz="1100" dirty="0"/>
+          </a:p>
+        </p:txBody>
+      </p:sp>
+      <p:sp>
+        <p:nvSpPr>
+          <p:cNvPr id="9" name="Shape 7"/>
+          <p:cNvSpPr/>
+          <p:nvPr/>
+        </p:nvSpPr>
+        <p:spPr>
+          <a:xfrm>
+            <a:off x="3291840" y="1188720"/>
+            <a:ext cx="2560320" cy="1828800"/>
+          </a:xfrm>
+          <a:prstGeom prst="rect">
+            <a:avLst/>
+          </a:prstGeom>
+          <a:solidFill>
+            <a:srgbClr val="FFFFFF"/>
+          </a:solidFill>
+          <a:ln w="12700">
+            <a:solidFill>
+              <a:srgbClr val="E5E2DC"/>
+            </a:solidFill>
+            <a:prstDash val="solid"/>
+          </a:ln>
+          <a:effectLst>
+            <a:outerShdw sx="100000" sy="100000" kx="0" ky="0" algn="bl" rotWithShape="0" blurRad="50800" dist="25400" dir="8100000">
+              <a:srgbClr val="000000">
+                <a:alpha val="10000"/>
+              </a:srgbClr>
+            </a:outerShdw>
+          </a:effectLst>
+        </p:spPr>
+      </p:sp>
+      <p:sp>
+        <p:nvSpPr>
+          <p:cNvPr id="10" name="Shape 8"/>
+          <p:cNvSpPr/>
+          <p:nvPr/>
+        </p:nvSpPr>
+        <p:spPr>
+          <a:xfrm>
+            <a:off x="3291840" y="1188720"/>
+            <a:ext cx="2560320" cy="54864"/>
+          </a:xfrm>
+          <a:prstGeom prst="rect">
+            <a:avLst/>
+          </a:prstGeom>
+          <a:solidFill>
+            <a:srgbClr val="2A9D8F"/>
+          </a:solidFill>
+          <a:ln/>
+        </p:spPr>
+      </p:sp>
+      <p:sp>
+        <p:nvSpPr>
+          <p:cNvPr id="11" name="Text 9"/>
+          <p:cNvSpPr/>
+          <p:nvPr/>
+        </p:nvSpPr>
+        <p:spPr>
+          <a:xfrm>
+            <a:off x="3429000" y="1325880"/>
+            <a:ext cx="2286000" cy="365760"/>
+          </a:xfrm>
+          <a:prstGeom prst="rect">
+            <a:avLst/>
+          </a:prstGeom>
+          <a:noFill/>
+          <a:ln/>
+        </p:spPr>
+        <p:txBody>
+          <a:bodyPr wrap="square" rtlCol="0" anchor="ctr"/>
+          <a:lstStyle/>
+          <a:p>
+            <a:pPr indent="0" marL="0">
+              <a:buNone/>
+            </a:pPr>
+            <a:r>
+              <a:rPr lang="en-US" sz="1400" b="1" dirty="0">
+                <a:solidFill>
+                  <a:srgbClr val="1B2A4A"/>
+                </a:solidFill>
+                <a:latin typeface="Calibri" pitchFamily="34" charset="0"/>
+                <a:ea typeface="Calibri" pitchFamily="34" charset="-122"/>
+                <a:cs typeface="Calibri" pitchFamily="34" charset="-120"/>
+              </a:rPr>
+              <a:t>Triangular Prism</a:t>
+            </a:r>
+            <a:endParaRPr lang="en-US" sz="1400" dirty="0"/>
+          </a:p>
+        </p:txBody>
+      </p:sp>
+      <p:sp>
+        <p:nvSpPr>
+          <p:cNvPr id="12" name="Text 10"/>
+          <p:cNvSpPr/>
+          <p:nvPr/>
+        </p:nvSpPr>
+        <p:spPr>
+          <a:xfrm>
+            <a:off x="3429000" y="1737360"/>
+            <a:ext cx="2286000" cy="1097280"/>
+          </a:xfrm>
+          <a:prstGeom prst="rect">
+            <a:avLst/>
+          </a:prstGeom>
+          <a:noFill/>
+          <a:ln/>
+        </p:spPr>
+        <p:txBody>
+          <a:bodyPr wrap="square" rtlCol="0" anchor="t"/>
+          <a:lstStyle/>
+          <a:p>
+            <a:pPr indent="0" marL="0">
+              <a:buNone/>
+            </a:pPr>
+            <a:r>
+              <a:rPr lang="en-US" sz="1100" dirty="0">
+                <a:solidFill>
+                  <a:srgbClr val="3D3A36"/>
+                </a:solidFill>
+                <a:latin typeface="Calibri" pitchFamily="34" charset="0"/>
+                <a:ea typeface="Calibri" pitchFamily="34" charset="-122"/>
+                <a:cs typeface="Calibri" pitchFamily="34" charset="-120"/>
+              </a:rPr>
+              <a:t>V = area of cross-section × length. Cross-section = triangle = ½bh. Example: triangle 6×4, length 10 → V = ½×6×4×10 = 120 cm³.</a:t>
+            </a:r>
+            <a:endParaRPr lang="en-US" sz="1100" dirty="0"/>
+          </a:p>
+        </p:txBody>
+      </p:sp>
+      <p:sp>
+        <p:nvSpPr>
+          <p:cNvPr id="13" name="Shape 11"/>
+          <p:cNvSpPr/>
+          <p:nvPr/>
+        </p:nvSpPr>
+        <p:spPr>
+          <a:xfrm>
+            <a:off x="6126480" y="1188720"/>
+            <a:ext cx="2560320" cy="1828800"/>
+          </a:xfrm>
+          <a:prstGeom prst="rect">
+            <a:avLst/>
+          </a:prstGeom>
+          <a:solidFill>
+            <a:srgbClr val="FFFFFF"/>
+          </a:solidFill>
+          <a:ln w="12700">
+            <a:solidFill>
+              <a:srgbClr val="E5E2DC"/>
+            </a:solidFill>
+            <a:prstDash val="solid"/>
+          </a:ln>
+          <a:effectLst>
+            <a:outerShdw sx="100000" sy="100000" kx="0" ky="0" algn="bl" rotWithShape="0" blurRad="50800" dist="25400" dir="8100000">
+              <a:srgbClr val="000000">
+                <a:alpha val="10000"/>
+              </a:srgbClr>
+            </a:outerShdw>
+          </a:effectLst>
+        </p:spPr>
+      </p:sp>
+      <p:sp>
+        <p:nvSpPr>
+          <p:cNvPr id="14" name="Shape 12"/>
+          <p:cNvSpPr/>
+          <p:nvPr/>
+        </p:nvSpPr>
+        <p:spPr>
+          <a:xfrm>
+            <a:off x="6126480" y="1188720"/>
+            <a:ext cx="2560320" cy="54864"/>
+          </a:xfrm>
+          <a:prstGeom prst="rect">
+            <a:avLst/>
+          </a:prstGeom>
+          <a:solidFill>
+            <a:srgbClr val="2A9D8F"/>
+          </a:solidFill>
+          <a:ln/>
+        </p:spPr>
+      </p:sp>
+      <p:sp>
+        <p:nvSpPr>
+          <p:cNvPr id="15" name="Text 13"/>
+          <p:cNvSpPr/>
+          <p:nvPr/>
+        </p:nvSpPr>
+        <p:spPr>
+          <a:xfrm>
+            <a:off x="6263640" y="1325880"/>
+            <a:ext cx="2286000" cy="365760"/>
+          </a:xfrm>
+          <a:prstGeom prst="rect">
+            <a:avLst/>
+          </a:prstGeom>
+          <a:noFill/>
+          <a:ln/>
+        </p:spPr>
+        <p:txBody>
+          <a:bodyPr wrap="square" rtlCol="0" anchor="ctr"/>
+          <a:lstStyle/>
+          <a:p>
+            <a:pPr indent="0" marL="0">
+              <a:buNone/>
+            </a:pPr>
+            <a:r>
+              <a:rPr lang="en-US" sz="1400" b="1" dirty="0">
+                <a:solidFill>
+                  <a:srgbClr val="1B2A4A"/>
+                </a:solidFill>
+                <a:latin typeface="Calibri" pitchFamily="34" charset="0"/>
+                <a:ea typeface="Calibri" pitchFamily="34" charset="-122"/>
+                <a:cs typeface="Calibri" pitchFamily="34" charset="-120"/>
+              </a:rPr>
+              <a:t>Any Prism</a:t>
+            </a:r>
+            <a:endParaRPr lang="en-US" sz="1400" dirty="0"/>
+          </a:p>
+        </p:txBody>
+      </p:sp>
+      <p:sp>
+        <p:nvSpPr>
+          <p:cNvPr id="16" name="Text 14"/>
+          <p:cNvSpPr/>
+          <p:nvPr/>
+        </p:nvSpPr>
+        <p:spPr>
+          <a:xfrm>
+            <a:off x="6263640" y="1737360"/>
+            <a:ext cx="2286000" cy="1097280"/>
+          </a:xfrm>
+          <a:prstGeom prst="rect">
+            <a:avLst/>
+          </a:prstGeom>
+          <a:noFill/>
+          <a:ln/>
+        </p:spPr>
+        <p:txBody>
+          <a:bodyPr wrap="square" rtlCol="0" anchor="t"/>
+          <a:lstStyle/>
+          <a:p>
+            <a:pPr indent="0" marL="0">
+              <a:buNone/>
+            </a:pPr>
+            <a:r>
+              <a:rPr lang="en-US" sz="1100" dirty="0">
+                <a:solidFill>
+                  <a:srgbClr val="3D3A36"/>
+                </a:solidFill>
+                <a:latin typeface="Calibri" pitchFamily="34" charset="0"/>
+                <a:ea typeface="Calibri" pitchFamily="34" charset="-122"/>
+                <a:cs typeface="Calibri" pitchFamily="34" charset="-120"/>
+              </a:rPr>
+              <a:t>V = area of cross-section × length. The cross-section is the same shape all the way through. This works for any prism (hexagonal, L-shaped, etc.).</a:t>
+            </a:r>
+            <a:endParaRPr lang="en-US" sz="1100" dirty="0"/>
+          </a:p>
+        </p:txBody>
+      </p:sp>
+    </p:spTree>
+  </p:cSld>
+  <p:clrMapOvr>
+    <a:masterClrMapping/>
+  </p:clrMapOvr>
+</p:sld>
+</file>
+
+<file path=ppt/slides/slide4.xml><?xml version="1.0" encoding="utf-8"?>
+<p:sld xmlns:a="http://schemas.openxmlformats.org/drawingml/2006/main" xmlns:r="http://schemas.openxmlformats.org/officeDocument/2006/relationships" xmlns:p="http://schemas.openxmlformats.org/presentationml/2006/main">
+  <p:cSld name="Slide 4">
+    <p:bg>
+      <p:bgPr>
+        <a:solidFill>
+          <a:srgbClr val="FAF8F5"/>
+        </a:solidFill>
+      </p:bgPr>
+    </p:bg>
+    <p:spTree>
+      <p:nvGrpSpPr>
+        <p:cNvPr id="1" name=""/>
+        <p:cNvGrpSpPr/>
+        <p:nvPr/>
+      </p:nvGrpSpPr>
+      <p:grpSpPr>
+        <a:xfrm>
+          <a:off x="0" y="0"/>
+          <a:ext cx="0" cy="0"/>
+          <a:chOff x="0" y="0"/>
+          <a:chExt cx="0" cy="0"/>
+        </a:xfrm>
+      </p:grpSpPr>
+      <p:sp>
+        <p:nvSpPr>
+          <p:cNvPr id="2" name="Shape 0"/>
+          <p:cNvSpPr/>
+          <p:nvPr/>
+        </p:nvSpPr>
+        <p:spPr>
+          <a:xfrm>
+            <a:off x="0" y="0"/>
+            <a:ext cx="9144000" cy="54864"/>
+          </a:xfrm>
+          <a:prstGeom prst="rect">
+            <a:avLst/>
+          </a:prstGeom>
+          <a:solidFill>
+            <a:srgbClr val="2A9D8F"/>
+          </a:solidFill>
+          <a:ln/>
+        </p:spPr>
+      </p:sp>
+      <p:sp>
+        <p:nvSpPr>
+          <p:cNvPr id="3" name="Text 1"/>
+          <p:cNvSpPr/>
+          <p:nvPr/>
+        </p:nvSpPr>
+        <p:spPr>
+          <a:xfrm>
+            <a:off x="7772400" y="4709160"/>
+            <a:ext cx="1097280" cy="320040"/>
+          </a:xfrm>
+          <a:prstGeom prst="rect">
+            <a:avLst/>
+          </a:prstGeom>
+          <a:noFill/>
+          <a:ln/>
+        </p:spPr>
+        <p:txBody>
+          <a:bodyPr wrap="square" rtlCol="0" anchor="ctr"/>
+          <a:lstStyle/>
+          <a:p>
+            <a:pPr algn="r" indent="0" marL="0">
+              <a:buNone/>
+            </a:pPr>
+            <a:r>
+              <a:rPr lang="en-US" sz="900" dirty="0">
+                <a:solidFill>
+                  <a:srgbClr val="6B6660"/>
+                </a:solidFill>
+                <a:latin typeface="Calibri" pitchFamily="34" charset="0"/>
+                <a:ea typeface="Calibri" pitchFamily="34" charset="-122"/>
+                <a:cs typeface="Calibri" pitchFamily="34" charset="-120"/>
+              </a:rPr>
+              <a:t>4 / 5</a:t>
+            </a:r>
+            <a:endParaRPr lang="en-US" sz="900" dirty="0"/>
+          </a:p>
+        </p:txBody>
+      </p:sp>
+      <p:sp>
+        <p:nvSpPr>
+          <p:cNvPr id="4" name="Text 2"/>
+          <p:cNvSpPr/>
+          <p:nvPr/>
+        </p:nvSpPr>
+        <p:spPr>
+          <a:xfrm>
+            <a:off x="457200" y="274320"/>
+            <a:ext cx="8229600" cy="640080"/>
+          </a:xfrm>
+          <a:prstGeom prst="rect">
+            <a:avLst/>
+          </a:prstGeom>
+          <a:noFill/>
+          <a:ln/>
+        </p:spPr>
+        <p:txBody>
+          <a:bodyPr wrap="square" rtlCol="0" anchor="ctr"/>
+          <a:lstStyle/>
+          <a:p>
+            <a:pPr indent="0" marL="0">
+              <a:buNone/>
+            </a:pPr>
+            <a:r>
+              <a:rPr lang="en-US" sz="2600" b="1" dirty="0">
+                <a:solidFill>
+                  <a:srgbClr val="1B2A4A"/>
+                </a:solidFill>
+                <a:latin typeface="Georgia" pitchFamily="34" charset="0"/>
+                <a:ea typeface="Georgia" pitchFamily="34" charset="-122"/>
+                <a:cs typeface="Georgia" pitchFamily="34" charset="-120"/>
+              </a:rPr>
+              <a:t>Problem Solving</a:t>
+            </a:r>
+            <a:endParaRPr lang="en-US" sz="2600" dirty="0"/>
+          </a:p>
+        </p:txBody>
+      </p:sp>
+      <p:sp>
+        <p:nvSpPr>
+          <p:cNvPr id="5" name="Text 3"/>
+          <p:cNvSpPr/>
+          <p:nvPr/>
+        </p:nvSpPr>
+        <p:spPr>
+          <a:xfrm>
+            <a:off x="457200" y="1188720"/>
+            <a:ext cx="3840480" cy="3474720"/>
+          </a:xfrm>
+          <a:prstGeom prst="rect">
+            <a:avLst/>
+          </a:prstGeom>
+          <a:noFill/>
+          <a:ln/>
+        </p:spPr>
+        <p:txBody>
+          <a:bodyPr wrap="square" rtlCol="0" anchor="t"/>
+          <a:lstStyle/>
+          <a:p>
+            <a:pPr marL="342900" indent="-342900">
+              <a:spcAft>
+                <a:spcPts val="600"/>
+              </a:spcAft>
+              <a:buSzPct val="100000"/>
+              <a:buChar char="•"/>
+            </a:pPr>
+            <a:r>
+              <a:rPr lang="en-US" sz="1400" dirty="0">
+                <a:solidFill>
+                  <a:srgbClr val="3D3A36"/>
+                </a:solidFill>
+                <a:latin typeface="Calibri" pitchFamily="34" charset="0"/>
+                <a:ea typeface="Calibri" pitchFamily="34" charset="-122"/>
+                <a:cs typeface="Calibri" pitchFamily="34" charset="-120"/>
+              </a:rPr>
+              <a:t>If you know volume and two dimensions, find the third</a:t>
+            </a:r>
+            <a:endParaRPr lang="en-US" sz="1400" dirty="0"/>
+          </a:p>
+          <a:p>
+            <a:pPr marL="342900" indent="-342900">
+              <a:spcAft>
+                <a:spcPts val="600"/>
+              </a:spcAft>
+              <a:buSzPct val="100000"/>
+              <a:buChar char="•"/>
+            </a:pPr>
+            <a:r>
+              <a:rPr lang="en-US" sz="1400" dirty="0">
+                <a:solidFill>
+                  <a:srgbClr val="3D3A36"/>
+                </a:solidFill>
+                <a:latin typeface="Calibri" pitchFamily="34" charset="0"/>
+                <a:ea typeface="Calibri" pitchFamily="34" charset="-122"/>
+                <a:cs typeface="Calibri" pitchFamily="34" charset="-120"/>
+              </a:rPr>
+              <a:t>V = 60cm³, l = 5cm, w = 4cm → h = 60 ÷ (5×4) = 3cm</a:t>
+            </a:r>
+            <a:endParaRPr lang="en-US" sz="1400" dirty="0"/>
+          </a:p>
+          <a:p>
+            <a:pPr marL="342900" indent="-342900">
+              <a:spcAft>
+                <a:spcPts val="600"/>
+              </a:spcAft>
+              <a:buSzPct val="100000"/>
+              <a:buChar char="•"/>
+            </a:pPr>
+            <a:r>
+              <a:rPr lang="en-US" sz="1400" dirty="0">
+                <a:solidFill>
+                  <a:srgbClr val="3D3A36"/>
+                </a:solidFill>
+                <a:latin typeface="Calibri" pitchFamily="34" charset="0"/>
+                <a:ea typeface="Calibri" pitchFamily="34" charset="-122"/>
+                <a:cs typeface="Calibri" pitchFamily="34" charset="-120"/>
+              </a:rPr>
+              <a:t>Compound 3D shapes: split into prisms, calculate each, add together</a:t>
+            </a:r>
+            <a:endParaRPr lang="en-US" sz="1400" dirty="0"/>
+          </a:p>
+          <a:p>
+            <a:pPr marL="342900" indent="-342900">
+              <a:spcAft>
+                <a:spcPts val="600"/>
+              </a:spcAft>
+              <a:buSzPct val="100000"/>
+              <a:buChar char="•"/>
+            </a:pPr>
+            <a:r>
+              <a:rPr lang="en-US" sz="1400" dirty="0">
+                <a:solidFill>
+                  <a:srgbClr val="3D3A36"/>
+                </a:solidFill>
+                <a:latin typeface="Calibri" pitchFamily="34" charset="0"/>
+                <a:ea typeface="Calibri" pitchFamily="34" charset="-122"/>
+                <a:cs typeface="Calibri" pitchFamily="34" charset="-120"/>
+              </a:rPr>
+              <a:t>Water capacity: 1 cm³ = 1 mL, so 1000 cm³ = 1 litre</a:t>
+            </a:r>
+            <a:endParaRPr lang="en-US" sz="1400" dirty="0"/>
+          </a:p>
+        </p:txBody>
+      </p:sp>
+      <p:sp>
+        <p:nvSpPr>
+          <p:cNvPr id="6" name="Shape 4"/>
+          <p:cNvSpPr/>
+          <p:nvPr/>
+        </p:nvSpPr>
+        <p:spPr>
+          <a:xfrm>
+            <a:off x="4846320" y="1188720"/>
+            <a:ext cx="3840480" cy="3474720"/>
+          </a:xfrm>
+          <a:prstGeom prst="rect">
+            <a:avLst/>
+          </a:prstGeom>
+          <a:solidFill>
+            <a:srgbClr val="FFFFFF"/>
+          </a:solidFill>
+          <a:ln w="12700">
+            <a:solidFill>
+              <a:srgbClr val="E5E2DC"/>
+            </a:solidFill>
+            <a:prstDash val="solid"/>
+          </a:ln>
+          <a:effectLst>
+            <a:outerShdw sx="100000" sy="100000" kx="0" ky="0" algn="bl" rotWithShape="0" blurRad="50800" dist="25400" dir="8100000">
+              <a:srgbClr val="000000">
+                <a:alpha val="10000"/>
+              </a:srgbClr>
+            </a:outerShdw>
+          </a:effectLst>
+        </p:spPr>
+      </p:sp>
+      <p:sp>
+        <p:nvSpPr>
+          <p:cNvPr id="7" name="Shape 5"/>
+          <p:cNvSpPr/>
+          <p:nvPr/>
+        </p:nvSpPr>
+        <p:spPr>
+          <a:xfrm>
+            <a:off x="4846320" y="1188720"/>
+            <a:ext cx="3840480" cy="54864"/>
+          </a:xfrm>
+          <a:prstGeom prst="rect">
+            <a:avLst/>
+          </a:prstGeom>
+          <a:solidFill>
+            <a:srgbClr val="2A9D8F"/>
+          </a:solidFill>
+          <a:ln/>
+        </p:spPr>
+      </p:sp>
+      <p:sp>
+        <p:nvSpPr>
+          <p:cNvPr id="8" name="Text 6"/>
+          <p:cNvSpPr/>
+          <p:nvPr/>
+        </p:nvSpPr>
+        <p:spPr>
+          <a:xfrm>
+            <a:off x="5120640" y="1371600"/>
+            <a:ext cx="3291840" cy="3108960"/>
+          </a:xfrm>
+          <a:prstGeom prst="rect">
+            <a:avLst/>
+          </a:prstGeom>
+          <a:noFill/>
+          <a:ln/>
+        </p:spPr>
+        <p:txBody>
+          <a:bodyPr wrap="square" rtlCol="0" anchor="t"/>
+          <a:lstStyle/>
+          <a:p>
+            <a:pPr indent="0" marL="0">
+              <a:spcAft>
+                <a:spcPts val="400"/>
+              </a:spcAft>
+              <a:buNone/>
+            </a:pPr>
+            <a:r>
+              <a:rPr lang="en-US" sz="1600" b="1" dirty="0">
+                <a:solidFill>
+                  <a:srgbClr val="1B2A4A"/>
+                </a:solidFill>
+                <a:latin typeface="Calibri" pitchFamily="34" charset="0"/>
+                <a:ea typeface="Calibri" pitchFamily="34" charset="-122"/>
+                <a:cs typeface="Calibri" pitchFamily="34" charset="-120"/>
+              </a:rPr>
+              <a:t>Unit Conversions</a:t>
+            </a:r>
+            <a:endParaRPr lang="en-US" sz="1600" dirty="0"/>
+          </a:p>
+          <a:p>
+            <a:pPr indent="0" marL="0">
+              <a:spcAft>
+                <a:spcPts val="400"/>
+              </a:spcAft>
+              <a:buNone/>
+            </a:pPr>
+            <a:endParaRPr lang="en-US" sz="1600" dirty="0"/>
+          </a:p>
+          <a:p>
+            <a:pPr indent="0" marL="0">
+              <a:spcAft>
+                <a:spcPts val="400"/>
+              </a:spcAft>
+              <a:buNone/>
+            </a:pPr>
+            <a:r>
+              <a:rPr lang="en-US" sz="1300" dirty="0">
+                <a:solidFill>
+                  <a:srgbClr val="3D3A36"/>
+                </a:solidFill>
+                <a:latin typeface="Calibri" pitchFamily="34" charset="0"/>
+                <a:ea typeface="Calibri" pitchFamily="34" charset="-122"/>
+                <a:cs typeface="Calibri" pitchFamily="34" charset="-120"/>
+              </a:rPr>
+              <a:t>1 cm³ = 1 mL (millilitre)</a:t>
+            </a:r>
+            <a:endParaRPr lang="en-US" sz="1600" dirty="0"/>
+          </a:p>
+          <a:p>
+            <a:pPr indent="0" marL="0">
+              <a:spcAft>
+                <a:spcPts val="400"/>
+              </a:spcAft>
+              <a:buNone/>
+            </a:pPr>
+            <a:r>
+              <a:rPr lang="en-US" sz="1300" dirty="0">
+                <a:solidFill>
+                  <a:srgbClr val="3D3A36"/>
+                </a:solidFill>
+                <a:latin typeface="Calibri" pitchFamily="34" charset="0"/>
+                <a:ea typeface="Calibri" pitchFamily="34" charset="-122"/>
+                <a:cs typeface="Calibri" pitchFamily="34" charset="-120"/>
+              </a:rPr>
+              <a:t>1000 cm³ = 1 L (litre)</a:t>
+            </a:r>
+            <a:endParaRPr lang="en-US" sz="1600" dirty="0"/>
+          </a:p>
+          <a:p>
+            <a:pPr indent="0" marL="0">
+              <a:spcAft>
+                <a:spcPts val="400"/>
+              </a:spcAft>
+              <a:buNone/>
+            </a:pPr>
+            <a:r>
+              <a:rPr lang="en-US" sz="1300" dirty="0">
+                <a:solidFill>
+                  <a:srgbClr val="3D3A36"/>
+                </a:solidFill>
+                <a:latin typeface="Calibri" pitchFamily="34" charset="0"/>
+                <a:ea typeface="Calibri" pitchFamily="34" charset="-122"/>
+                <a:cs typeface="Calibri" pitchFamily="34" charset="-120"/>
+              </a:rPr>
+              <a:t>1 m³ = 1,000,000 cm³</a:t>
+            </a:r>
+            <a:endParaRPr lang="en-US" sz="1600" dirty="0"/>
+          </a:p>
+          <a:p>
+            <a:pPr indent="0" marL="0">
+              <a:spcAft>
+                <a:spcPts val="400"/>
+              </a:spcAft>
+              <a:buNone/>
+            </a:pPr>
+            <a:r>
+              <a:rPr lang="en-US" sz="1300" dirty="0">
+                <a:solidFill>
+                  <a:srgbClr val="3D3A36"/>
+                </a:solidFill>
+                <a:latin typeface="Calibri" pitchFamily="34" charset="0"/>
+                <a:ea typeface="Calibri" pitchFamily="34" charset="-122"/>
+                <a:cs typeface="Calibri" pitchFamily="34" charset="-120"/>
+              </a:rPr>
+              <a:t>1 m³ = 1000 L</a:t>
+            </a:r>
+            <a:endParaRPr lang="en-US" sz="1600" dirty="0"/>
+          </a:p>
+          <a:p>
+            <a:pPr indent="0" marL="0">
+              <a:spcAft>
+                <a:spcPts val="400"/>
+              </a:spcAft>
+              <a:buNone/>
+            </a:pPr>
+            <a:r>
+              <a:rPr lang="en-US" sz="1300" dirty="0">
+                <a:solidFill>
+                  <a:srgbClr val="3D3A36"/>
+                </a:solidFill>
+                <a:latin typeface="Calibri" pitchFamily="34" charset="0"/>
+                <a:ea typeface="Calibri" pitchFamily="34" charset="-122"/>
+                <a:cs typeface="Calibri" pitchFamily="34" charset="-120"/>
+              </a:rPr>
+              <a:t>These conversions connect volume to capacity</a:t>
+            </a:r>
+            <a:endParaRPr lang="en-US" sz="1600" dirty="0"/>
+          </a:p>
+        </p:txBody>
+      </p:sp>
+    </p:spTree>
+  </p:cSld>
+  <p:clrMapOvr>
+    <a:masterClrMapping/>
+  </p:clrMapOvr>
+</p:sld>
+</file>
+
+<file path=ppt/slides/slide5.xml><?xml version="1.0" encoding="utf-8"?>
+<p:sld xmlns:a="http://schemas.openxmlformats.org/drawingml/2006/main" xmlns:r="http://schemas.openxmlformats.org/officeDocument/2006/relationships" xmlns:p="http://schemas.openxmlformats.org/presentationml/2006/main">
+  <p:cSld name="Slide 5">
     <p:bg>
       <p:bgPr>
         <a:solidFill>
@@ -1506,13 +2614,13 @@
         <p:spPr>
           <a:xfrm>
             <a:off x="0" y="0"/>
-            <a:ext cx="9144000" cy="54864"/>
-          </a:xfrm>
-          <a:prstGeom prst="rect">
-            <a:avLst/>
-          </a:prstGeom>
-          <a:solidFill>
-            <a:srgbClr val="2A9D8F"/>
+            <a:ext cx="109728" cy="5143500"/>
+          </a:xfrm>
+          <a:prstGeom prst="rect">
+            <a:avLst/>
+          </a:prstGeom>
+          <a:solidFill>
+            <a:srgbClr val="E9C46A"/>
           </a:solidFill>
           <a:ln/>
         </p:spPr>
@@ -1525,8 +2633,8 @@
         </p:nvSpPr>
         <p:spPr>
           <a:xfrm>
-            <a:off x="548640" y="457200"/>
-            <a:ext cx="8046720" cy="640080"/>
+            <a:off x="731520" y="457200"/>
+            <a:ext cx="7772400" cy="731520"/>
           </a:xfrm>
           <a:prstGeom prst="rect">
             <a:avLst/>
@@ -1542,7 +2650,7 @@
               <a:buNone/>
             </a:pPr>
             <a:r>
-              <a:rPr lang="en-US" sz="2800" b="1" dirty="0">
+              <a:rPr lang="en-US" sz="3200" b="1" dirty="0">
                 <a:solidFill>
                   <a:srgbClr val="FFFFFF"/>
                 </a:solidFill>
@@ -1552,7 +2660,7 @@
               </a:rPr>
               <a:t>Key Takeaways</a:t>
             </a:r>
-            <a:endParaRPr lang="en-US" sz="2800" dirty="0"/>
+            <a:endParaRPr lang="en-US" sz="3200" dirty="0"/>
           </a:p>
         </p:txBody>
       </p:sp>
@@ -1564,8 +2672,8 @@
         </p:nvSpPr>
         <p:spPr>
           <a:xfrm>
-            <a:off x="731520" y="1371600"/>
-            <a:ext cx="7680960" cy="3200400"/>
+            <a:off x="731520" y="1463040"/>
+            <a:ext cx="7772400" cy="3200400"/>
           </a:xfrm>
           <a:prstGeom prst="rect">
             <a:avLst/>
@@ -1585,7 +2693,7 @@
               <a:buChar char="•"/>
             </a:pPr>
             <a:r>
-              <a:rPr lang="en-US" sz="1600" dirty="0">
+              <a:rPr lang="en-US" sz="1500" dirty="0">
                 <a:solidFill>
                   <a:srgbClr val="CADCFC"/>
                 </a:solidFill>
@@ -1593,9 +2701,9 @@
                 <a:ea typeface="Calibri" pitchFamily="34" charset="-122"/>
                 <a:cs typeface="Calibri" pitchFamily="34" charset="-120"/>
               </a:rPr>
-              <a:t>Volume = 3D space inside a shape (cm³, m³)</a:t>
-            </a:r>
-            <a:endParaRPr lang="en-US" sz="1600" dirty="0"/>
+              <a:t>Volume = 3D space inside a shape, measured in cubic units</a:t>
+            </a:r>
+            <a:endParaRPr lang="en-US" sz="1500" dirty="0"/>
           </a:p>
           <a:p>
             <a:pPr marL="342900" indent="-342900">
@@ -1606,7 +2714,7 @@
               <a:buChar char="•"/>
             </a:pPr>
             <a:r>
-              <a:rPr lang="en-US" sz="1600" dirty="0">
+              <a:rPr lang="en-US" sz="1500" dirty="0">
                 <a:solidFill>
                   <a:srgbClr val="CADCFC"/>
                 </a:solidFill>
@@ -1614,9 +2722,9 @@
                 <a:ea typeface="Calibri" pitchFamily="34" charset="-122"/>
                 <a:cs typeface="Calibri" pitchFamily="34" charset="-120"/>
               </a:rPr>
-              <a:t>Cuboid: V = l × w × h | Cube: V = s³</a:t>
-            </a:r>
-            <a:endParaRPr lang="en-US" sz="1600" dirty="0"/>
+              <a:t>Cuboid: V = l × w × h. Cube: V = s³</a:t>
+            </a:r>
+            <a:endParaRPr lang="en-US" sz="1500" dirty="0"/>
           </a:p>
           <a:p>
             <a:pPr marL="342900" indent="-342900">
@@ -1627,7 +2735,7 @@
               <a:buChar char="•"/>
             </a:pPr>
             <a:r>
-              <a:rPr lang="en-US" sz="1600" dirty="0">
+              <a:rPr lang="en-US" sz="1500" dirty="0">
                 <a:solidFill>
                   <a:srgbClr val="CADCFC"/>
                 </a:solidFill>
@@ -1635,9 +2743,9 @@
                 <a:ea typeface="Calibri" pitchFamily="34" charset="-122"/>
                 <a:cs typeface="Calibri" pitchFamily="34" charset="-120"/>
               </a:rPr>
-              <a:t>Compound shapes: split into cuboids and add volumes</a:t>
-            </a:r>
-            <a:endParaRPr lang="en-US" sz="1600" dirty="0"/>
+              <a:t>Any prism: V = area of cross-section × length</a:t>
+            </a:r>
+            <a:endParaRPr lang="en-US" sz="1500" dirty="0"/>
           </a:p>
           <a:p>
             <a:pPr marL="342900" indent="-342900">
@@ -1648,7 +2756,7 @@
               <a:buChar char="•"/>
             </a:pPr>
             <a:r>
-              <a:rPr lang="en-US" sz="1600" dirty="0">
+              <a:rPr lang="en-US" sz="1500" dirty="0">
                 <a:solidFill>
                   <a:srgbClr val="CADCFC"/>
                 </a:solidFill>
@@ -1656,9 +2764,30 @@
                 <a:ea typeface="Calibri" pitchFamily="34" charset="-122"/>
                 <a:cs typeface="Calibri" pitchFamily="34" charset="-120"/>
               </a:rPr>
-              <a:t>Don't confuse with area (2D) or surface area (faces)</a:t>
-            </a:r>
-            <a:endParaRPr lang="en-US" sz="1600" dirty="0"/>
+              <a:t>1 cm³ = 1 mL. 1000 cm³ = 1 L</a:t>
+            </a:r>
+            <a:endParaRPr lang="en-US" sz="1500" dirty="0"/>
+          </a:p>
+          <a:p>
+            <a:pPr marL="342900" indent="-342900">
+              <a:spcAft>
+                <a:spcPts val="1000"/>
+              </a:spcAft>
+              <a:buSzPct val="100000"/>
+              <a:buChar char="•"/>
+            </a:pPr>
+            <a:r>
+              <a:rPr lang="en-US" sz="1500" dirty="0">
+                <a:solidFill>
+                  <a:srgbClr val="CADCFC"/>
+                </a:solidFill>
+                <a:latin typeface="Calibri" pitchFamily="34" charset="0"/>
+                <a:ea typeface="Calibri" pitchFamily="34" charset="-122"/>
+                <a:cs typeface="Calibri" pitchFamily="34" charset="-120"/>
+              </a:rPr>
+              <a:t>Work backwards to find missing dimensions</a:t>
+            </a:r>
+            <a:endParaRPr lang="en-US" sz="1500" dirty="0"/>
           </a:p>
         </p:txBody>
       </p:sp>
@@ -1670,8 +2799,8 @@
         </p:nvSpPr>
         <p:spPr>
           <a:xfrm>
-            <a:off x="548640" y="4572000"/>
-            <a:ext cx="3657600" cy="274320"/>
+            <a:off x="731520" y="4572000"/>
+            <a:ext cx="7772400" cy="365760"/>
           </a:xfrm>
           <a:prstGeom prst="rect">
             <a:avLst/>
@@ -1687,14 +2816,17 @@
               <a:buNone/>
             </a:pPr>
             <a:r>
-              <a:rPr lang="en-US" sz="1000" dirty="0">
-                <a:solidFill>
-                  <a:srgbClr val="6B6660"/>
-                </a:solidFill>
+              <a:rPr lang="en-US" sz="1100" dirty="0">
+                <a:solidFill>
+                  <a:srgbClr val="E9C46A"/>
+                </a:solidFill>
+                <a:latin typeface="Calibri" pitchFamily="34" charset="0"/>
+                <a:ea typeface="Calibri" pitchFamily="34" charset="-122"/>
+                <a:cs typeface="Calibri" pitchFamily="34" charset="-120"/>
               </a:rPr>
               <a:t>mrzocchi.com</a:t>
             </a:r>
-            <a:endParaRPr lang="en-US" sz="1000" dirty="0"/>
+            <a:endParaRPr lang="en-US" sz="1100" dirty="0"/>
           </a:p>
         </p:txBody>
       </p:sp>

--- a/static/ppts/G6_Math_Volume.pptx
+++ b/static/ppts/G6_Math_Volume.pptx
@@ -10,9 +10,12 @@
     <p:sldId id="258" r:id="rId4"/>
     <p:sldId id="259" r:id="rId5"/>
     <p:sldId id="260" r:id="rId6"/>
+    <p:sldId id="261" r:id="rId7"/>
+    <p:sldId id="262" r:id="rId8"/>
+    <p:sldId id="263" r:id="rId9"/>
   </p:sldIdLst>
   <p:notesMasterIdLst>
-    <p:notesMasterId r:id="rId7"/>
+    <p:notesMasterId r:id="rId10"/>
   </p:notesMasterIdLst>
   <p:sldSz cx="9144000" cy="5143500"/>
   <p:notesSz cx="5143500" cy="9144000"/>
@@ -882,6 +885,270 @@
             <a:fld id="{F7021451-1387-4CA6-816F-3879F97B5CBC}" type="slidenum">
               <a:rPr lang="en-US"/>
               <a:t>5</a:t>
+            </a:fld>
+            <a:endParaRPr lang="en-US"/>
+          </a:p>
+        </p:txBody>
+      </p:sp>
+    </p:spTree>
+    <p:extLst>
+      <p:ext uri="{BB962C8B-B14F-4D97-AF65-F5344CB8AC3E}">
+        <p14:creationId xmlns:p14="http://schemas.microsoft.com/office/powerpoint/2010/main" val="1024086991"/>
+      </p:ext>
+    </p:extLst>
+  </p:cSld>
+  <p:clrMapOvr>
+    <a:masterClrMapping/>
+  </p:clrMapOvr>
+</p:notes>
+</file>
+
+<file path=ppt/notesSlides/notesSlide6.xml><?xml version="1.0" encoding="utf-8"?>
+<p:notes xmlns:a="http://schemas.openxmlformats.org/drawingml/2006/main" xmlns:r="http://schemas.openxmlformats.org/officeDocument/2006/relationships" xmlns:p="http://schemas.openxmlformats.org/presentationml/2006/main">
+  <p:cSld>
+    <p:spTree>
+      <p:nvGrpSpPr>
+        <p:cNvPr id="1" name=""/>
+        <p:cNvGrpSpPr/>
+        <p:nvPr/>
+      </p:nvGrpSpPr>
+      <p:grpSpPr>
+        <a:xfrm>
+          <a:off x="0" y="0"/>
+          <a:ext cx="0" cy="0"/>
+          <a:chOff x="0" y="0"/>
+          <a:chExt cx="0" cy="0"/>
+        </a:xfrm>
+      </p:grpSpPr>
+      <p:sp>
+        <p:nvSpPr>
+          <p:cNvPr id="2" name="Slide Image Placeholder 1"/>
+          <p:cNvSpPr>
+            <a:spLocks noGrp="1" noRot="1" noChangeAspect="1"/>
+          </p:cNvSpPr>
+          <p:nvPr>
+            <p:ph type="sldImg"/>
+          </p:nvPr>
+        </p:nvSpPr>
+        <p:spPr/>
+      </p:sp>
+      <p:sp>
+        <p:nvSpPr>
+          <p:cNvPr id="3" name="Notes Placeholder 2"/>
+          <p:cNvSpPr>
+            <a:spLocks noGrp="1"/>
+          </p:cNvSpPr>
+          <p:nvPr>
+            <p:ph type="body" idx="1"/>
+          </p:nvPr>
+        </p:nvSpPr>
+        <p:spPr/>
+        <p:txBody>
+          <a:bodyPr/>
+          <a:lstStyle/>
+          <a:p>
+            <a:r>
+              <a:rPr lang="en-US" dirty="0"/>
+              <a:t/>
+            </a:r>
+            <a:endParaRPr lang="en-US" dirty="0"/>
+          </a:p>
+        </p:txBody>
+      </p:sp>
+      <p:sp>
+        <p:nvSpPr>
+          <p:cNvPr id="4" name="Slide Number Placeholder 3"/>
+          <p:cNvSpPr>
+            <a:spLocks noGrp="1"/>
+          </p:cNvSpPr>
+          <p:nvPr>
+            <p:ph type="sldNum" sz="quarter" idx="10"/>
+          </p:nvPr>
+        </p:nvSpPr>
+        <p:spPr/>
+        <p:txBody>
+          <a:bodyPr/>
+          <a:lstStyle/>
+          <a:p>
+            <a:fld id="{F7021451-1387-4CA6-816F-3879F97B5CBC}" type="slidenum">
+              <a:rPr lang="en-US"/>
+              <a:t>6</a:t>
+            </a:fld>
+            <a:endParaRPr lang="en-US"/>
+          </a:p>
+        </p:txBody>
+      </p:sp>
+    </p:spTree>
+    <p:extLst>
+      <p:ext uri="{BB962C8B-B14F-4D97-AF65-F5344CB8AC3E}">
+        <p14:creationId xmlns:p14="http://schemas.microsoft.com/office/powerpoint/2010/main" val="1024086991"/>
+      </p:ext>
+    </p:extLst>
+  </p:cSld>
+  <p:clrMapOvr>
+    <a:masterClrMapping/>
+  </p:clrMapOvr>
+</p:notes>
+</file>
+
+<file path=ppt/notesSlides/notesSlide7.xml><?xml version="1.0" encoding="utf-8"?>
+<p:notes xmlns:a="http://schemas.openxmlformats.org/drawingml/2006/main" xmlns:r="http://schemas.openxmlformats.org/officeDocument/2006/relationships" xmlns:p="http://schemas.openxmlformats.org/presentationml/2006/main">
+  <p:cSld>
+    <p:spTree>
+      <p:nvGrpSpPr>
+        <p:cNvPr id="1" name=""/>
+        <p:cNvGrpSpPr/>
+        <p:nvPr/>
+      </p:nvGrpSpPr>
+      <p:grpSpPr>
+        <a:xfrm>
+          <a:off x="0" y="0"/>
+          <a:ext cx="0" cy="0"/>
+          <a:chOff x="0" y="0"/>
+          <a:chExt cx="0" cy="0"/>
+        </a:xfrm>
+      </p:grpSpPr>
+      <p:sp>
+        <p:nvSpPr>
+          <p:cNvPr id="2" name="Slide Image Placeholder 1"/>
+          <p:cNvSpPr>
+            <a:spLocks noGrp="1" noRot="1" noChangeAspect="1"/>
+          </p:cNvSpPr>
+          <p:nvPr>
+            <p:ph type="sldImg"/>
+          </p:nvPr>
+        </p:nvSpPr>
+        <p:spPr/>
+      </p:sp>
+      <p:sp>
+        <p:nvSpPr>
+          <p:cNvPr id="3" name="Notes Placeholder 2"/>
+          <p:cNvSpPr>
+            <a:spLocks noGrp="1"/>
+          </p:cNvSpPr>
+          <p:nvPr>
+            <p:ph type="body" idx="1"/>
+          </p:nvPr>
+        </p:nvSpPr>
+        <p:spPr/>
+        <p:txBody>
+          <a:bodyPr/>
+          <a:lstStyle/>
+          <a:p>
+            <a:r>
+              <a:rPr lang="en-US" dirty="0"/>
+              <a:t/>
+            </a:r>
+            <a:endParaRPr lang="en-US" dirty="0"/>
+          </a:p>
+        </p:txBody>
+      </p:sp>
+      <p:sp>
+        <p:nvSpPr>
+          <p:cNvPr id="4" name="Slide Number Placeholder 3"/>
+          <p:cNvSpPr>
+            <a:spLocks noGrp="1"/>
+          </p:cNvSpPr>
+          <p:nvPr>
+            <p:ph type="sldNum" sz="quarter" idx="10"/>
+          </p:nvPr>
+        </p:nvSpPr>
+        <p:spPr/>
+        <p:txBody>
+          <a:bodyPr/>
+          <a:lstStyle/>
+          <a:p>
+            <a:fld id="{F7021451-1387-4CA6-816F-3879F97B5CBC}" type="slidenum">
+              <a:rPr lang="en-US"/>
+              <a:t>7</a:t>
+            </a:fld>
+            <a:endParaRPr lang="en-US"/>
+          </a:p>
+        </p:txBody>
+      </p:sp>
+    </p:spTree>
+    <p:extLst>
+      <p:ext uri="{BB962C8B-B14F-4D97-AF65-F5344CB8AC3E}">
+        <p14:creationId xmlns:p14="http://schemas.microsoft.com/office/powerpoint/2010/main" val="1024086991"/>
+      </p:ext>
+    </p:extLst>
+  </p:cSld>
+  <p:clrMapOvr>
+    <a:masterClrMapping/>
+  </p:clrMapOvr>
+</p:notes>
+</file>
+
+<file path=ppt/notesSlides/notesSlide8.xml><?xml version="1.0" encoding="utf-8"?>
+<p:notes xmlns:a="http://schemas.openxmlformats.org/drawingml/2006/main" xmlns:r="http://schemas.openxmlformats.org/officeDocument/2006/relationships" xmlns:p="http://schemas.openxmlformats.org/presentationml/2006/main">
+  <p:cSld>
+    <p:spTree>
+      <p:nvGrpSpPr>
+        <p:cNvPr id="1" name=""/>
+        <p:cNvGrpSpPr/>
+        <p:nvPr/>
+      </p:nvGrpSpPr>
+      <p:grpSpPr>
+        <a:xfrm>
+          <a:off x="0" y="0"/>
+          <a:ext cx="0" cy="0"/>
+          <a:chOff x="0" y="0"/>
+          <a:chExt cx="0" cy="0"/>
+        </a:xfrm>
+      </p:grpSpPr>
+      <p:sp>
+        <p:nvSpPr>
+          <p:cNvPr id="2" name="Slide Image Placeholder 1"/>
+          <p:cNvSpPr>
+            <a:spLocks noGrp="1" noRot="1" noChangeAspect="1"/>
+          </p:cNvSpPr>
+          <p:nvPr>
+            <p:ph type="sldImg"/>
+          </p:nvPr>
+        </p:nvSpPr>
+        <p:spPr/>
+      </p:sp>
+      <p:sp>
+        <p:nvSpPr>
+          <p:cNvPr id="3" name="Notes Placeholder 2"/>
+          <p:cNvSpPr>
+            <a:spLocks noGrp="1"/>
+          </p:cNvSpPr>
+          <p:nvPr>
+            <p:ph type="body" idx="1"/>
+          </p:nvPr>
+        </p:nvSpPr>
+        <p:spPr/>
+        <p:txBody>
+          <a:bodyPr/>
+          <a:lstStyle/>
+          <a:p>
+            <a:r>
+              <a:rPr lang="en-US" dirty="0"/>
+              <a:t/>
+            </a:r>
+            <a:endParaRPr lang="en-US" dirty="0"/>
+          </a:p>
+        </p:txBody>
+      </p:sp>
+      <p:sp>
+        <p:nvSpPr>
+          <p:cNvPr id="4" name="Slide Number Placeholder 3"/>
+          <p:cNvSpPr>
+            <a:spLocks noGrp="1"/>
+          </p:cNvSpPr>
+          <p:nvPr>
+            <p:ph type="sldNum" sz="quarter" idx="10"/>
+          </p:nvPr>
+        </p:nvSpPr>
+        <p:spPr/>
+        <p:txBody>
+          <a:bodyPr/>
+          <a:lstStyle/>
+          <a:p>
+            <a:fld id="{F7021451-1387-4CA6-816F-3879F97B5CBC}" type="slidenum">
+              <a:rPr lang="en-US"/>
+              <a:t>8</a:t>
             </a:fld>
             <a:endParaRPr lang="en-US"/>
           </a:p>
@@ -1210,13 +1477,6 @@
 <file path=ppt/slides/slide1.xml><?xml version="1.0" encoding="utf-8"?>
 <p:sld xmlns:a="http://schemas.openxmlformats.org/drawingml/2006/main" xmlns:r="http://schemas.openxmlformats.org/officeDocument/2006/relationships" xmlns:p="http://schemas.openxmlformats.org/presentationml/2006/main">
   <p:cSld name="Slide 1">
-    <p:bg>
-      <p:bgPr>
-        <a:solidFill>
-          <a:srgbClr val="1B2A4A"/>
-        </a:solidFill>
-      </p:bgPr>
-    </p:bg>
     <p:spTree>
       <p:nvGrpSpPr>
         <p:cNvPr id="1" name=""/>
@@ -1240,7 +1500,27 @@
         <p:spPr>
           <a:xfrm>
             <a:off x="0" y="0"/>
-            <a:ext cx="109728" cy="5143500"/>
+            <a:ext cx="9144000" cy="5143500"/>
+          </a:xfrm>
+          <a:prstGeom prst="rect">
+            <a:avLst/>
+          </a:prstGeom>
+          <a:solidFill>
+            <a:srgbClr val="1B2A4A"/>
+          </a:solidFill>
+          <a:ln/>
+        </p:spPr>
+      </p:sp>
+      <p:sp>
+        <p:nvSpPr>
+          <p:cNvPr id="3" name="Shape 1"/>
+          <p:cNvSpPr/>
+          <p:nvPr/>
+        </p:nvSpPr>
+        <p:spPr>
+          <a:xfrm>
+            <a:off x="0" y="4777740"/>
+            <a:ext cx="9144000" cy="365760"/>
           </a:xfrm>
           <a:prstGeom prst="rect">
             <a:avLst/>
@@ -1253,14 +1533,14 @@
       </p:sp>
       <p:sp>
         <p:nvSpPr>
-          <p:cNvPr id="3" name="Text 1"/>
+          <p:cNvPr id="4" name="Text 2"/>
           <p:cNvSpPr/>
           <p:nvPr/>
         </p:nvSpPr>
         <p:spPr>
           <a:xfrm>
             <a:off x="731520" y="1097280"/>
-            <a:ext cx="7772400" cy="1371600"/>
+            <a:ext cx="7680960" cy="457200"/>
           </a:xfrm>
           <a:prstGeom prst="rect">
             <a:avLst/>
@@ -1270,6 +1550,45 @@
         </p:spPr>
         <p:txBody>
           <a:bodyPr wrap="square" rtlCol="0" anchor="ctr"/>
+          <a:lstStyle/>
+          <a:p>
+            <a:pPr indent="0" marL="0">
+              <a:buNone/>
+            </a:pPr>
+            <a:r>
+              <a:rPr lang="en-US" sz="1400" b="1" spc="400" kern="0" dirty="0">
+                <a:solidFill>
+                  <a:srgbClr val="2A9D8F"/>
+                </a:solidFill>
+                <a:latin typeface="Calibri" pitchFamily="34" charset="0"/>
+                <a:ea typeface="Calibri" pitchFamily="34" charset="-122"/>
+                <a:cs typeface="Calibri" pitchFamily="34" charset="-120"/>
+              </a:rPr>
+              <a:t>GRADE 6 MATHEMATICS</a:t>
+            </a:r>
+            <a:endParaRPr lang="en-US" sz="1400" dirty="0"/>
+          </a:p>
+        </p:txBody>
+      </p:sp>
+      <p:sp>
+        <p:nvSpPr>
+          <p:cNvPr id="5" name="Text 3"/>
+          <p:cNvSpPr/>
+          <p:nvPr/>
+        </p:nvSpPr>
+        <p:spPr>
+          <a:xfrm>
+            <a:off x="731520" y="1645920"/>
+            <a:ext cx="7680960" cy="1463040"/>
+          </a:xfrm>
+          <a:prstGeom prst="rect">
+            <a:avLst/>
+          </a:prstGeom>
+          <a:noFill/>
+          <a:ln/>
+        </p:spPr>
+        <p:txBody>
+          <a:bodyPr wrap="square" rtlCol="0" anchor="t"/>
           <a:lstStyle/>
           <a:p>
             <a:pPr indent="0" marL="0">
@@ -1292,14 +1611,14 @@
       </p:sp>
       <p:sp>
         <p:nvSpPr>
-          <p:cNvPr id="4" name="Text 2"/>
-          <p:cNvSpPr/>
-          <p:nvPr/>
-        </p:nvSpPr>
-        <p:spPr>
-          <a:xfrm>
-            <a:off x="731520" y="2560320"/>
-            <a:ext cx="7772400" cy="548640"/>
+          <p:cNvPr id="6" name="Text 4"/>
+          <p:cNvSpPr/>
+          <p:nvPr/>
+        </p:nvSpPr>
+        <p:spPr>
+          <a:xfrm>
+            <a:off x="731520" y="3200400"/>
+            <a:ext cx="7680960" cy="548640"/>
           </a:xfrm>
           <a:prstGeom prst="rect">
             <a:avLst/>
@@ -1315,15 +1634,15 @@
               <a:buNone/>
             </a:pPr>
             <a:r>
-              <a:rPr lang="en-US" sz="1600" dirty="0">
+              <a:rPr lang="en-US" sz="1600" i="1" dirty="0">
                 <a:solidFill>
-                  <a:srgbClr val="E9C46A"/>
+                  <a:srgbClr val="9B9690"/>
                 </a:solidFill>
                 <a:latin typeface="Calibri" pitchFamily="34" charset="0"/>
                 <a:ea typeface="Calibri" pitchFamily="34" charset="-122"/>
                 <a:cs typeface="Calibri" pitchFamily="34" charset="-120"/>
               </a:rPr>
-              <a:t>Grade 6 Mathematics · Mr Zocchi</a:t>
+              <a:t>How much space a 3D shape takes up</a:t>
             </a:r>
             <a:endParaRPr lang="en-US" sz="1600" dirty="0"/>
           </a:p>
@@ -1331,36 +1650,14 @@
       </p:sp>
       <p:sp>
         <p:nvSpPr>
-          <p:cNvPr id="5" name="Shape 3"/>
-          <p:cNvSpPr/>
-          <p:nvPr/>
-        </p:nvSpPr>
-        <p:spPr>
-          <a:xfrm>
-            <a:off x="731520" y="3474720"/>
-            <a:ext cx="2011680" cy="411480"/>
-          </a:xfrm>
-          <a:prstGeom prst="roundRect">
-            <a:avLst>
-              <a:gd name="adj" fmla="val 17778"/>
-            </a:avLst>
-          </a:prstGeom>
-          <a:solidFill>
-            <a:srgbClr val="2A9D8F"/>
-          </a:solidFill>
-          <a:ln/>
-        </p:spPr>
-      </p:sp>
-      <p:sp>
-        <p:nvSpPr>
-          <p:cNvPr id="6" name="Text 4"/>
-          <p:cNvSpPr/>
-          <p:nvPr/>
-        </p:nvSpPr>
-        <p:spPr>
-          <a:xfrm>
-            <a:off x="731520" y="3474720"/>
-            <a:ext cx="2011680" cy="411480"/>
+          <p:cNvPr id="7" name="Text 5"/>
+          <p:cNvSpPr/>
+          <p:nvPr/>
+        </p:nvSpPr>
+        <p:spPr>
+          <a:xfrm>
+            <a:off x="731520" y="4206240"/>
+            <a:ext cx="3657600" cy="365760"/>
           </a:xfrm>
           <a:prstGeom prst="rect">
             <a:avLst/>
@@ -1372,19 +1669,19 @@
           <a:bodyPr wrap="square" rtlCol="0" anchor="ctr"/>
           <a:lstStyle/>
           <a:p>
-            <a:pPr algn="ctr" indent="0" marL="0">
+            <a:pPr indent="0" marL="0">
               <a:buNone/>
             </a:pPr>
             <a:r>
-              <a:rPr lang="en-US" sz="1200" b="1" dirty="0">
+              <a:rPr lang="en-US" sz="1200" dirty="0">
                 <a:solidFill>
-                  <a:srgbClr val="FFFFFF"/>
+                  <a:srgbClr val="6B6660"/>
                 </a:solidFill>
                 <a:latin typeface="Calibri" pitchFamily="34" charset="0"/>
                 <a:ea typeface="Calibri" pitchFamily="34" charset="-122"/>
                 <a:cs typeface="Calibri" pitchFamily="34" charset="-120"/>
               </a:rPr>
-              <a:t>Term 3 · Geometry</a:t>
+              <a:t>Mr Zocchi</a:t>
             </a:r>
             <a:endParaRPr lang="en-US" sz="1200" dirty="0"/>
           </a:p>
@@ -1401,13 +1698,6 @@
 <file path=ppt/slides/slide2.xml><?xml version="1.0" encoding="utf-8"?>
 <p:sld xmlns:a="http://schemas.openxmlformats.org/drawingml/2006/main" xmlns:r="http://schemas.openxmlformats.org/officeDocument/2006/relationships" xmlns:p="http://schemas.openxmlformats.org/presentationml/2006/main">
   <p:cSld name="Slide 2">
-    <p:bg>
-      <p:bgPr>
-        <a:solidFill>
-          <a:srgbClr val="FAF8F5"/>
-        </a:solidFill>
-      </p:bgPr>
-    </p:bg>
     <p:spTree>
       <p:nvGrpSpPr>
         <p:cNvPr id="1" name=""/>
@@ -1431,13 +1721,13 @@
         <p:spPr>
           <a:xfrm>
             <a:off x="0" y="0"/>
-            <a:ext cx="9144000" cy="54864"/>
+            <a:ext cx="9144000" cy="5143500"/>
           </a:xfrm>
           <a:prstGeom prst="rect">
             <a:avLst/>
           </a:prstGeom>
           <a:solidFill>
-            <a:srgbClr val="2A9D8F"/>
+            <a:srgbClr val="111D35"/>
           </a:solidFill>
           <a:ln/>
         </p:spPr>
@@ -1450,8 +1740,8 @@
         </p:nvSpPr>
         <p:spPr>
           <a:xfrm>
-            <a:off x="7772400" y="4709160"/>
-            <a:ext cx="1097280" cy="320040"/>
+            <a:off x="6858000" y="182880"/>
+            <a:ext cx="2286000" cy="2743200"/>
           </a:xfrm>
           <a:prstGeom prst="rect">
             <a:avLst/>
@@ -1463,86 +1753,75 @@
           <a:bodyPr wrap="square" rtlCol="0" anchor="ctr"/>
           <a:lstStyle/>
           <a:p>
-            <a:pPr algn="r" indent="0" marL="0">
+            <a:pPr algn="ctr" indent="0" marL="0">
               <a:buNone/>
             </a:pPr>
             <a:r>
-              <a:rPr lang="en-US" sz="900" dirty="0">
+              <a:rPr lang="en-US" sz="16000" b="1" dirty="0">
                 <a:solidFill>
-                  <a:srgbClr val="6B6660"/>
+                  <a:srgbClr val="2A9D8F">
+                    <a:alpha val="80000"/>
+                  </a:srgbClr>
+                </a:solidFill>
+                <a:latin typeface="Georgia" pitchFamily="34" charset="0"/>
+                <a:ea typeface="Georgia" pitchFamily="34" charset="-122"/>
+                <a:cs typeface="Georgia" pitchFamily="34" charset="-120"/>
+              </a:rPr>
+              <a:t>?</a:t>
+            </a:r>
+            <a:endParaRPr lang="en-US" sz="16000" dirty="0"/>
+          </a:p>
+        </p:txBody>
+      </p:sp>
+      <p:sp>
+        <p:nvSpPr>
+          <p:cNvPr id="4" name="Text 2"/>
+          <p:cNvSpPr/>
+          <p:nvPr/>
+        </p:nvSpPr>
+        <p:spPr>
+          <a:xfrm>
+            <a:off x="731520" y="548640"/>
+            <a:ext cx="2743200" cy="365760"/>
+          </a:xfrm>
+          <a:prstGeom prst="rect">
+            <a:avLst/>
+          </a:prstGeom>
+          <a:noFill/>
+          <a:ln/>
+        </p:spPr>
+        <p:txBody>
+          <a:bodyPr wrap="square" rtlCol="0" anchor="ctr"/>
+          <a:lstStyle/>
+          <a:p>
+            <a:pPr indent="0" marL="0">
+              <a:buNone/>
+            </a:pPr>
+            <a:r>
+              <a:rPr lang="en-US" sz="1200" b="1" spc="400" kern="0" dirty="0">
+                <a:solidFill>
+                  <a:srgbClr val="2A9D8F"/>
                 </a:solidFill>
                 <a:latin typeface="Calibri" pitchFamily="34" charset="0"/>
                 <a:ea typeface="Calibri" pitchFamily="34" charset="-122"/>
                 <a:cs typeface="Calibri" pitchFamily="34" charset="-120"/>
               </a:rPr>
-              <a:t>2 / 5</a:t>
-            </a:r>
-            <a:endParaRPr lang="en-US" sz="900" dirty="0"/>
-          </a:p>
-        </p:txBody>
-      </p:sp>
-      <p:sp>
-        <p:nvSpPr>
-          <p:cNvPr id="4" name="Shape 2"/>
-          <p:cNvSpPr/>
-          <p:nvPr/>
-        </p:nvSpPr>
-        <p:spPr>
-          <a:xfrm>
-            <a:off x="1371600" y="914400"/>
-            <a:ext cx="6400800" cy="3200400"/>
-          </a:xfrm>
-          <a:prstGeom prst="rect">
-            <a:avLst/>
-          </a:prstGeom>
-          <a:solidFill>
-            <a:srgbClr val="FFFFFF"/>
-          </a:solidFill>
-          <a:ln w="12700">
-            <a:solidFill>
-              <a:srgbClr val="E5E2DC"/>
-            </a:solidFill>
-            <a:prstDash val="solid"/>
-          </a:ln>
-          <a:effectLst>
-            <a:outerShdw sx="100000" sy="100000" kx="0" ky="0" algn="bl" rotWithShape="0" blurRad="50800" dist="25400" dir="8100000">
-              <a:srgbClr val="000000">
-                <a:alpha val="10000"/>
-              </a:srgbClr>
-            </a:outerShdw>
-          </a:effectLst>
-        </p:spPr>
-      </p:sp>
-      <p:sp>
-        <p:nvSpPr>
-          <p:cNvPr id="5" name="Shape 3"/>
-          <p:cNvSpPr/>
-          <p:nvPr/>
-        </p:nvSpPr>
-        <p:spPr>
-          <a:xfrm>
-            <a:off x="1371600" y="914400"/>
-            <a:ext cx="91440" cy="3200400"/>
-          </a:xfrm>
-          <a:prstGeom prst="rect">
-            <a:avLst/>
-          </a:prstGeom>
-          <a:solidFill>
-            <a:srgbClr val="2A9D8F"/>
-          </a:solidFill>
-          <a:ln/>
-        </p:spPr>
-      </p:sp>
-      <p:sp>
-        <p:nvSpPr>
-          <p:cNvPr id="6" name="Text 4"/>
-          <p:cNvSpPr/>
-          <p:nvPr/>
-        </p:nvSpPr>
-        <p:spPr>
-          <a:xfrm>
-            <a:off x="1828800" y="1097280"/>
-            <a:ext cx="5669280" cy="640080"/>
+              <a:t>INQUIRY</a:t>
+            </a:r>
+            <a:endParaRPr lang="en-US" sz="1200" dirty="0"/>
+          </a:p>
+        </p:txBody>
+      </p:sp>
+      <p:sp>
+        <p:nvSpPr>
+          <p:cNvPr id="5" name="Text 3"/>
+          <p:cNvSpPr/>
+          <p:nvPr/>
+        </p:nvSpPr>
+        <p:spPr>
+          <a:xfrm>
+            <a:off x="731520" y="1005840"/>
+            <a:ext cx="6858000" cy="1463040"/>
           </a:xfrm>
           <a:prstGeom prst="rect">
             <a:avLst/>
@@ -1551,37 +1830,37 @@
           <a:ln/>
         </p:spPr>
         <p:txBody>
-          <a:bodyPr wrap="square" rtlCol="0" anchor="ctr"/>
+          <a:bodyPr wrap="square" rtlCol="0" anchor="t"/>
           <a:lstStyle/>
           <a:p>
             <a:pPr indent="0" marL="0">
               <a:buNone/>
             </a:pPr>
             <a:r>
-              <a:rPr lang="en-US" sz="2400" b="1" dirty="0">
+              <a:rPr lang="en-US" sz="2800" b="1" dirty="0">
                 <a:solidFill>
-                  <a:srgbClr val="1B2A4A"/>
+                  <a:srgbClr val="FFFFFF"/>
                 </a:solidFill>
                 <a:latin typeface="Georgia" pitchFamily="34" charset="0"/>
                 <a:ea typeface="Georgia" pitchFamily="34" charset="-122"/>
                 <a:cs typeface="Georgia" pitchFamily="34" charset="-120"/>
               </a:rPr>
-              <a:t>What is Volume?</a:t>
-            </a:r>
-            <a:endParaRPr lang="en-US" sz="2400" dirty="0"/>
-          </a:p>
-        </p:txBody>
-      </p:sp>
-      <p:sp>
-        <p:nvSpPr>
-          <p:cNvPr id="7" name="Text 5"/>
-          <p:cNvSpPr/>
-          <p:nvPr/>
-        </p:nvSpPr>
-        <p:spPr>
-          <a:xfrm>
-            <a:off x="1828800" y="1828800"/>
-            <a:ext cx="5669280" cy="2011680"/>
+              <a:t>The NIS pool is 25 m × 16 m × 1.6 m deep. How many bathtubs of water does it hold?</a:t>
+            </a:r>
+            <a:endParaRPr lang="en-US" sz="2800" dirty="0"/>
+          </a:p>
+        </p:txBody>
+      </p:sp>
+      <p:sp>
+        <p:nvSpPr>
+          <p:cNvPr id="6" name="Text 4"/>
+          <p:cNvSpPr/>
+          <p:nvPr/>
+        </p:nvSpPr>
+        <p:spPr>
+          <a:xfrm>
+            <a:off x="731520" y="2560320"/>
+            <a:ext cx="6858000" cy="548640"/>
           </a:xfrm>
           <a:prstGeom prst="rect">
             <a:avLst/>
@@ -1590,27 +1869,168 @@
           <a:ln/>
         </p:spPr>
         <p:txBody>
-          <a:bodyPr wrap="square" rtlCol="0" anchor="t"/>
+          <a:bodyPr wrap="square" rtlCol="0" anchor="ctr"/>
           <a:lstStyle/>
           <a:p>
             <a:pPr indent="0" marL="0">
-              <a:lnSpc>
-                <a:spcPct val="130000"/>
-              </a:lnSpc>
               <a:buNone/>
             </a:pPr>
             <a:r>
-              <a:rPr lang="en-US" sz="1500" dirty="0">
+              <a:rPr lang="en-US" sz="1400" i="1" dirty="0">
                 <a:solidFill>
-                  <a:srgbClr val="3D3A36"/>
+                  <a:srgbClr val="9B9690"/>
                 </a:solidFill>
                 <a:latin typeface="Calibri" pitchFamily="34" charset="0"/>
                 <a:ea typeface="Calibri" pitchFamily="34" charset="-122"/>
                 <a:cs typeface="Calibri" pitchFamily="34" charset="-120"/>
               </a:rPr>
-              <a:t>Volume is the amount of 3D space an object takes up. It is measured in cubic units: mm³, cm³, m³. Think of it as how many 1×1×1 unit cubes fit inside the shape. Volume has three dimensions: length, width, and height.</a:t>
-            </a:r>
-            <a:endParaRPr lang="en-US" sz="1500" dirty="0"/>
+              <a:t>Volume measures the 3D space inside a shape. A bathtub ≈ 300 litres.</a:t>
+            </a:r>
+            <a:endParaRPr lang="en-US" sz="1400" dirty="0"/>
+          </a:p>
+        </p:txBody>
+      </p:sp>
+      <p:sp>
+        <p:nvSpPr>
+          <p:cNvPr id="7" name="Shape 5"/>
+          <p:cNvSpPr/>
+          <p:nvPr/>
+        </p:nvSpPr>
+        <p:spPr>
+          <a:xfrm>
+            <a:off x="548640" y="3200400"/>
+            <a:ext cx="7315200" cy="1645920"/>
+          </a:xfrm>
+          <a:prstGeom prst="rect">
+            <a:avLst/>
+          </a:prstGeom>
+          <a:solidFill>
+            <a:srgbClr val="243660"/>
+          </a:solidFill>
+          <a:ln/>
+        </p:spPr>
+      </p:sp>
+      <p:sp>
+        <p:nvSpPr>
+          <p:cNvPr id="8" name="Text 6"/>
+          <p:cNvSpPr/>
+          <p:nvPr/>
+        </p:nvSpPr>
+        <p:spPr>
+          <a:xfrm>
+            <a:off x="731520" y="3246120"/>
+            <a:ext cx="3657600" cy="320040"/>
+          </a:xfrm>
+          <a:prstGeom prst="rect">
+            <a:avLst/>
+          </a:prstGeom>
+          <a:noFill/>
+          <a:ln/>
+        </p:spPr>
+        <p:txBody>
+          <a:bodyPr wrap="square" rtlCol="0" anchor="ctr"/>
+          <a:lstStyle/>
+          <a:p>
+            <a:pPr indent="0" marL="0">
+              <a:buNone/>
+            </a:pPr>
+            <a:r>
+              <a:rPr lang="en-US" sz="1100" b="1" spc="200" kern="0" dirty="0">
+                <a:solidFill>
+                  <a:srgbClr val="2A9D8F"/>
+                </a:solidFill>
+                <a:latin typeface="Calibri" pitchFamily="34" charset="0"/>
+                <a:ea typeface="Calibri" pitchFamily="34" charset="-122"/>
+                <a:cs typeface="Calibri" pitchFamily="34" charset="-120"/>
+              </a:rPr>
+              <a:t>Think — Pair — Share</a:t>
+            </a:r>
+            <a:endParaRPr lang="en-US" sz="1100" dirty="0"/>
+          </a:p>
+        </p:txBody>
+      </p:sp>
+      <p:sp>
+        <p:nvSpPr>
+          <p:cNvPr id="9" name="Text 7"/>
+          <p:cNvSpPr/>
+          <p:nvPr/>
+        </p:nvSpPr>
+        <p:spPr>
+          <a:xfrm>
+            <a:off x="731520" y="3566160"/>
+            <a:ext cx="6949440" cy="1188720"/>
+          </a:xfrm>
+          <a:prstGeom prst="rect">
+            <a:avLst/>
+          </a:prstGeom>
+          <a:noFill/>
+          <a:ln/>
+        </p:spPr>
+        <p:txBody>
+          <a:bodyPr wrap="square" rtlCol="0" anchor="ctr"/>
+          <a:lstStyle/>
+          <a:p>
+            <a:pPr marL="342900" indent="-342900">
+              <a:spcAft>
+                <a:spcPts val="600"/>
+              </a:spcAft>
+              <a:buSzPct val="100000"/>
+              <a:buChar char="•"/>
+            </a:pPr>
+            <a:r>
+              <a:rPr lang="en-US" sz="1400" dirty="0">
+                <a:solidFill>
+                  <a:srgbClr val="E5E2DC"/>
+                </a:solidFill>
+                <a:latin typeface="Calibri" pitchFamily="34" charset="0"/>
+                <a:ea typeface="Calibri" pitchFamily="34" charset="-122"/>
+                <a:cs typeface="Calibri" pitchFamily="34" charset="-120"/>
+              </a:rPr>
+              <a:t>How do you calculate the space inside a box?</a:t>
+            </a:r>
+            <a:endParaRPr lang="en-US" sz="1400" dirty="0"/>
+          </a:p>
+          <a:p>
+            <a:pPr marL="342900" indent="-342900">
+              <a:spcAft>
+                <a:spcPts val="600"/>
+              </a:spcAft>
+              <a:buSzPct val="100000"/>
+              <a:buChar char="•"/>
+            </a:pPr>
+            <a:r>
+              <a:rPr lang="en-US" sz="1400" dirty="0">
+                <a:solidFill>
+                  <a:srgbClr val="E5E2DC"/>
+                </a:solidFill>
+                <a:latin typeface="Calibri" pitchFamily="34" charset="0"/>
+                <a:ea typeface="Calibri" pitchFamily="34" charset="-122"/>
+                <a:cs typeface="Calibri" pitchFamily="34" charset="-120"/>
+              </a:rPr>
+              <a:t>What's the difference between area (flat) and volume (3D)?</a:t>
+            </a:r>
+            <a:endParaRPr lang="en-US" sz="1400" dirty="0"/>
+          </a:p>
+          <a:p>
+            <a:pPr marL="342900" indent="-342900">
+              <a:spcAft>
+                <a:spcPts val="600"/>
+              </a:spcAft>
+              <a:buSzPct val="100000"/>
+              <a:buChar char="•"/>
+            </a:pPr>
+            <a:r>
+              <a:rPr lang="en-US" sz="1400" dirty="0">
+                <a:solidFill>
+                  <a:srgbClr val="E5E2DC"/>
+                </a:solidFill>
+                <a:latin typeface="Calibri" pitchFamily="34" charset="0"/>
+                <a:ea typeface="Calibri" pitchFamily="34" charset="-122"/>
+                <a:cs typeface="Calibri" pitchFamily="34" charset="-120"/>
+              </a:rPr>
+              <a:t>What units do we use for 3D space?</a:t>
+            </a:r>
+            <a:endParaRPr lang="en-US" sz="1400" dirty="0"/>
           </a:p>
         </p:txBody>
       </p:sp>
@@ -1655,7 +2075,27 @@
         <p:spPr>
           <a:xfrm>
             <a:off x="0" y="0"/>
-            <a:ext cx="9144000" cy="54864"/>
+            <a:ext cx="9144000" cy="822960"/>
+          </a:xfrm>
+          <a:prstGeom prst="rect">
+            <a:avLst/>
+          </a:prstGeom>
+          <a:solidFill>
+            <a:srgbClr val="FFFFFF"/>
+          </a:solidFill>
+          <a:ln/>
+        </p:spPr>
+      </p:sp>
+      <p:sp>
+        <p:nvSpPr>
+          <p:cNvPr id="3" name="Shape 1"/>
+          <p:cNvSpPr/>
+          <p:nvPr/>
+        </p:nvSpPr>
+        <p:spPr>
+          <a:xfrm>
+            <a:off x="0" y="795528"/>
+            <a:ext cx="9144000" cy="27432"/>
           </a:xfrm>
           <a:prstGeom prst="rect">
             <a:avLst/>
@@ -1668,14 +2108,14 @@
       </p:sp>
       <p:sp>
         <p:nvSpPr>
-          <p:cNvPr id="3" name="Text 1"/>
-          <p:cNvSpPr/>
-          <p:nvPr/>
-        </p:nvSpPr>
-        <p:spPr>
-          <a:xfrm>
-            <a:off x="7772400" y="4709160"/>
-            <a:ext cx="1097280" cy="320040"/>
+          <p:cNvPr id="4" name="Text 2"/>
+          <p:cNvSpPr/>
+          <p:nvPr/>
+        </p:nvSpPr>
+        <p:spPr>
+          <a:xfrm>
+            <a:off x="640080" y="91440"/>
+            <a:ext cx="7863840" cy="640080"/>
           </a:xfrm>
           <a:prstGeom prst="rect">
             <a:avLst/>
@@ -1684,53 +2124,14 @@
           <a:ln/>
         </p:spPr>
         <p:txBody>
-          <a:bodyPr wrap="square" rtlCol="0" anchor="ctr"/>
-          <a:lstStyle/>
-          <a:p>
-            <a:pPr algn="r" indent="0" marL="0">
-              <a:buNone/>
-            </a:pPr>
-            <a:r>
-              <a:rPr lang="en-US" sz="900" dirty="0">
-                <a:solidFill>
-                  <a:srgbClr val="6B6660"/>
-                </a:solidFill>
-                <a:latin typeface="Calibri" pitchFamily="34" charset="0"/>
-                <a:ea typeface="Calibri" pitchFamily="34" charset="-122"/>
-                <a:cs typeface="Calibri" pitchFamily="34" charset="-120"/>
-              </a:rPr>
-              <a:t>3 / 5</a:t>
-            </a:r>
-            <a:endParaRPr lang="en-US" sz="900" dirty="0"/>
-          </a:p>
-        </p:txBody>
-      </p:sp>
-      <p:sp>
-        <p:nvSpPr>
-          <p:cNvPr id="4" name="Text 2"/>
-          <p:cNvSpPr/>
-          <p:nvPr/>
-        </p:nvSpPr>
-        <p:spPr>
-          <a:xfrm>
-            <a:off x="457200" y="274320"/>
-            <a:ext cx="8229600" cy="640080"/>
-          </a:xfrm>
-          <a:prstGeom prst="rect">
-            <a:avLst/>
-          </a:prstGeom>
-          <a:noFill/>
-          <a:ln/>
-        </p:spPr>
-        <p:txBody>
-          <a:bodyPr wrap="square" rtlCol="0" anchor="ctr"/>
+          <a:bodyPr wrap="square" lIns="0" tIns="0" rIns="0" bIns="0" rtlCol="0" anchor="ctr"/>
           <a:lstStyle/>
           <a:p>
             <a:pPr indent="0" marL="0">
               <a:buNone/>
             </a:pPr>
             <a:r>
-              <a:rPr lang="en-US" sz="2600" b="1" dirty="0">
+              <a:rPr lang="en-US" sz="2200" b="1" dirty="0">
                 <a:solidFill>
                   <a:srgbClr val="1B2A4A"/>
                 </a:solidFill>
@@ -1738,74 +2139,22 @@
                 <a:ea typeface="Georgia" pitchFamily="34" charset="-122"/>
                 <a:cs typeface="Georgia" pitchFamily="34" charset="-120"/>
               </a:rPr>
-              <a:t>Volume Formulas</a:t>
-            </a:r>
-            <a:endParaRPr lang="en-US" sz="2600" dirty="0"/>
-          </a:p>
-        </p:txBody>
-      </p:sp>
-      <p:sp>
-        <p:nvSpPr>
-          <p:cNvPr id="5" name="Shape 3"/>
-          <p:cNvSpPr/>
-          <p:nvPr/>
-        </p:nvSpPr>
-        <p:spPr>
-          <a:xfrm>
-            <a:off x="457200" y="1188720"/>
-            <a:ext cx="2560320" cy="1828800"/>
-          </a:xfrm>
-          <a:prstGeom prst="rect">
-            <a:avLst/>
-          </a:prstGeom>
-          <a:solidFill>
-            <a:srgbClr val="FFFFFF"/>
-          </a:solidFill>
-          <a:ln w="12700">
-            <a:solidFill>
-              <a:srgbClr val="E5E2DC"/>
-            </a:solidFill>
-            <a:prstDash val="solid"/>
-          </a:ln>
-          <a:effectLst>
-            <a:outerShdw sx="100000" sy="100000" kx="0" ky="0" algn="bl" rotWithShape="0" blurRad="50800" dist="25400" dir="8100000">
-              <a:srgbClr val="000000">
-                <a:alpha val="10000"/>
-              </a:srgbClr>
-            </a:outerShdw>
-          </a:effectLst>
-        </p:spPr>
-      </p:sp>
-      <p:sp>
-        <p:nvSpPr>
-          <p:cNvPr id="6" name="Shape 4"/>
-          <p:cNvSpPr/>
-          <p:nvPr/>
-        </p:nvSpPr>
-        <p:spPr>
-          <a:xfrm>
-            <a:off x="457200" y="1188720"/>
-            <a:ext cx="2560320" cy="54864"/>
-          </a:xfrm>
-          <a:prstGeom prst="rect">
-            <a:avLst/>
-          </a:prstGeom>
-          <a:solidFill>
-            <a:srgbClr val="2A9D8F"/>
-          </a:solidFill>
-          <a:ln/>
-        </p:spPr>
-      </p:sp>
-      <p:sp>
-        <p:nvSpPr>
-          <p:cNvPr id="7" name="Text 5"/>
-          <p:cNvSpPr/>
-          <p:nvPr/>
-        </p:nvSpPr>
-        <p:spPr>
-          <a:xfrm>
-            <a:off x="594360" y="1325880"/>
-            <a:ext cx="2286000" cy="365760"/>
+              <a:t>What Is Volume?</a:t>
+            </a:r>
+            <a:endParaRPr lang="en-US" sz="2200" dirty="0"/>
+          </a:p>
+        </p:txBody>
+      </p:sp>
+      <p:sp>
+        <p:nvSpPr>
+          <p:cNvPr id="5" name="Text 3"/>
+          <p:cNvSpPr/>
+          <p:nvPr/>
+        </p:nvSpPr>
+        <p:spPr>
+          <a:xfrm>
+            <a:off x="640080" y="1005840"/>
+            <a:ext cx="7863840" cy="2926080"/>
           </a:xfrm>
           <a:prstGeom prst="rect">
             <a:avLst/>
@@ -1817,50 +2166,15 @@
           <a:bodyPr wrap="square" rtlCol="0" anchor="ctr"/>
           <a:lstStyle/>
           <a:p>
-            <a:pPr indent="0" marL="0">
-              <a:buNone/>
+            <a:pPr marL="342900" indent="-342900">
+              <a:spcAft>
+                <a:spcPts val="800"/>
+              </a:spcAft>
+              <a:buSzPct val="100000"/>
+              <a:buChar char="•"/>
             </a:pPr>
             <a:r>
-              <a:rPr lang="en-US" sz="1400" b="1" dirty="0">
-                <a:solidFill>
-                  <a:srgbClr val="1B2A4A"/>
-                </a:solidFill>
-                <a:latin typeface="Calibri" pitchFamily="34" charset="0"/>
-                <a:ea typeface="Calibri" pitchFamily="34" charset="-122"/>
-                <a:cs typeface="Calibri" pitchFamily="34" charset="-120"/>
-              </a:rPr>
-              <a:t>Cuboid</a:t>
-            </a:r>
-            <a:endParaRPr lang="en-US" sz="1400" dirty="0"/>
-          </a:p>
-        </p:txBody>
-      </p:sp>
-      <p:sp>
-        <p:nvSpPr>
-          <p:cNvPr id="8" name="Text 6"/>
-          <p:cNvSpPr/>
-          <p:nvPr/>
-        </p:nvSpPr>
-        <p:spPr>
-          <a:xfrm>
-            <a:off x="594360" y="1737360"/>
-            <a:ext cx="2286000" cy="1097280"/>
-          </a:xfrm>
-          <a:prstGeom prst="rect">
-            <a:avLst/>
-          </a:prstGeom>
-          <a:noFill/>
-          <a:ln/>
-        </p:spPr>
-        <p:txBody>
-          <a:bodyPr wrap="square" rtlCol="0" anchor="t"/>
-          <a:lstStyle/>
-          <a:p>
-            <a:pPr indent="0" marL="0">
-              <a:buNone/>
-            </a:pPr>
-            <a:r>
-              <a:rPr lang="en-US" sz="1100" dirty="0">
+              <a:rPr lang="en-US" sz="1600" dirty="0">
                 <a:solidFill>
                   <a:srgbClr val="3D3A36"/>
                 </a:solidFill>
@@ -1868,129 +2182,20 @@
                 <a:ea typeface="Calibri" pitchFamily="34" charset="-122"/>
                 <a:cs typeface="Calibri" pitchFamily="34" charset="-120"/>
               </a:rPr>
-              <a:t>V = length × width × height. Example: 5 × 3 × 2 = 30 cm³. A cube: V = s³. Example: s = 4cm → V = 64 cm³.</a:t>
-            </a:r>
-            <a:endParaRPr lang="en-US" sz="1100" dirty="0"/>
-          </a:p>
-        </p:txBody>
-      </p:sp>
-      <p:sp>
-        <p:nvSpPr>
-          <p:cNvPr id="9" name="Shape 7"/>
-          <p:cNvSpPr/>
-          <p:nvPr/>
-        </p:nvSpPr>
-        <p:spPr>
-          <a:xfrm>
-            <a:off x="3291840" y="1188720"/>
-            <a:ext cx="2560320" cy="1828800"/>
-          </a:xfrm>
-          <a:prstGeom prst="rect">
-            <a:avLst/>
-          </a:prstGeom>
-          <a:solidFill>
-            <a:srgbClr val="FFFFFF"/>
-          </a:solidFill>
-          <a:ln w="12700">
-            <a:solidFill>
-              <a:srgbClr val="E5E2DC"/>
-            </a:solidFill>
-            <a:prstDash val="solid"/>
-          </a:ln>
-          <a:effectLst>
-            <a:outerShdw sx="100000" sy="100000" kx="0" ky="0" algn="bl" rotWithShape="0" blurRad="50800" dist="25400" dir="8100000">
-              <a:srgbClr val="000000">
-                <a:alpha val="10000"/>
-              </a:srgbClr>
-            </a:outerShdw>
-          </a:effectLst>
-        </p:spPr>
-      </p:sp>
-      <p:sp>
-        <p:nvSpPr>
-          <p:cNvPr id="10" name="Shape 8"/>
-          <p:cNvSpPr/>
-          <p:nvPr/>
-        </p:nvSpPr>
-        <p:spPr>
-          <a:xfrm>
-            <a:off x="3291840" y="1188720"/>
-            <a:ext cx="2560320" cy="54864"/>
-          </a:xfrm>
-          <a:prstGeom prst="rect">
-            <a:avLst/>
-          </a:prstGeom>
-          <a:solidFill>
-            <a:srgbClr val="2A9D8F"/>
-          </a:solidFill>
-          <a:ln/>
-        </p:spPr>
-      </p:sp>
-      <p:sp>
-        <p:nvSpPr>
-          <p:cNvPr id="11" name="Text 9"/>
-          <p:cNvSpPr/>
-          <p:nvPr/>
-        </p:nvSpPr>
-        <p:spPr>
-          <a:xfrm>
-            <a:off x="3429000" y="1325880"/>
-            <a:ext cx="2286000" cy="365760"/>
-          </a:xfrm>
-          <a:prstGeom prst="rect">
-            <a:avLst/>
-          </a:prstGeom>
-          <a:noFill/>
-          <a:ln/>
-        </p:spPr>
-        <p:txBody>
-          <a:bodyPr wrap="square" rtlCol="0" anchor="ctr"/>
-          <a:lstStyle/>
-          <a:p>
-            <a:pPr indent="0" marL="0">
-              <a:buNone/>
+              <a:t>Volume = the amount of 3D space inside a shape.</a:t>
+            </a:r>
+            <a:endParaRPr lang="en-US" sz="1600" dirty="0"/>
+          </a:p>
+          <a:p>
+            <a:pPr marL="342900" indent="-342900">
+              <a:spcAft>
+                <a:spcPts val="800"/>
+              </a:spcAft>
+              <a:buSzPct val="100000"/>
+              <a:buChar char="•"/>
             </a:pPr>
             <a:r>
-              <a:rPr lang="en-US" sz="1400" b="1" dirty="0">
-                <a:solidFill>
-                  <a:srgbClr val="1B2A4A"/>
-                </a:solidFill>
-                <a:latin typeface="Calibri" pitchFamily="34" charset="0"/>
-                <a:ea typeface="Calibri" pitchFamily="34" charset="-122"/>
-                <a:cs typeface="Calibri" pitchFamily="34" charset="-120"/>
-              </a:rPr>
-              <a:t>Triangular Prism</a:t>
-            </a:r>
-            <a:endParaRPr lang="en-US" sz="1400" dirty="0"/>
-          </a:p>
-        </p:txBody>
-      </p:sp>
-      <p:sp>
-        <p:nvSpPr>
-          <p:cNvPr id="12" name="Text 10"/>
-          <p:cNvSpPr/>
-          <p:nvPr/>
-        </p:nvSpPr>
-        <p:spPr>
-          <a:xfrm>
-            <a:off x="3429000" y="1737360"/>
-            <a:ext cx="2286000" cy="1097280"/>
-          </a:xfrm>
-          <a:prstGeom prst="rect">
-            <a:avLst/>
-          </a:prstGeom>
-          <a:noFill/>
-          <a:ln/>
-        </p:spPr>
-        <p:txBody>
-          <a:bodyPr wrap="square" rtlCol="0" anchor="t"/>
-          <a:lstStyle/>
-          <a:p>
-            <a:pPr indent="0" marL="0">
-              <a:buNone/>
-            </a:pPr>
-            <a:r>
-              <a:rPr lang="en-US" sz="1100" dirty="0">
+              <a:rPr lang="en-US" sz="1600" dirty="0">
                 <a:solidFill>
                   <a:srgbClr val="3D3A36"/>
                 </a:solidFill>
@@ -1998,129 +2203,20 @@
                 <a:ea typeface="Calibri" pitchFamily="34" charset="-122"/>
                 <a:cs typeface="Calibri" pitchFamily="34" charset="-120"/>
               </a:rPr>
-              <a:t>V = area of cross-section × length. Cross-section = triangle = ½bh. Example: triangle 6×4, length 10 → V = ½×6×4×10 = 120 cm³.</a:t>
-            </a:r>
-            <a:endParaRPr lang="en-US" sz="1100" dirty="0"/>
-          </a:p>
-        </p:txBody>
-      </p:sp>
-      <p:sp>
-        <p:nvSpPr>
-          <p:cNvPr id="13" name="Shape 11"/>
-          <p:cNvSpPr/>
-          <p:nvPr/>
-        </p:nvSpPr>
-        <p:spPr>
-          <a:xfrm>
-            <a:off x="6126480" y="1188720"/>
-            <a:ext cx="2560320" cy="1828800"/>
-          </a:xfrm>
-          <a:prstGeom prst="rect">
-            <a:avLst/>
-          </a:prstGeom>
-          <a:solidFill>
-            <a:srgbClr val="FFFFFF"/>
-          </a:solidFill>
-          <a:ln w="12700">
-            <a:solidFill>
-              <a:srgbClr val="E5E2DC"/>
-            </a:solidFill>
-            <a:prstDash val="solid"/>
-          </a:ln>
-          <a:effectLst>
-            <a:outerShdw sx="100000" sy="100000" kx="0" ky="0" algn="bl" rotWithShape="0" blurRad="50800" dist="25400" dir="8100000">
-              <a:srgbClr val="000000">
-                <a:alpha val="10000"/>
-              </a:srgbClr>
-            </a:outerShdw>
-          </a:effectLst>
-        </p:spPr>
-      </p:sp>
-      <p:sp>
-        <p:nvSpPr>
-          <p:cNvPr id="14" name="Shape 12"/>
-          <p:cNvSpPr/>
-          <p:nvPr/>
-        </p:nvSpPr>
-        <p:spPr>
-          <a:xfrm>
-            <a:off x="6126480" y="1188720"/>
-            <a:ext cx="2560320" cy="54864"/>
-          </a:xfrm>
-          <a:prstGeom prst="rect">
-            <a:avLst/>
-          </a:prstGeom>
-          <a:solidFill>
-            <a:srgbClr val="2A9D8F"/>
-          </a:solidFill>
-          <a:ln/>
-        </p:spPr>
-      </p:sp>
-      <p:sp>
-        <p:nvSpPr>
-          <p:cNvPr id="15" name="Text 13"/>
-          <p:cNvSpPr/>
-          <p:nvPr/>
-        </p:nvSpPr>
-        <p:spPr>
-          <a:xfrm>
-            <a:off x="6263640" y="1325880"/>
-            <a:ext cx="2286000" cy="365760"/>
-          </a:xfrm>
-          <a:prstGeom prst="rect">
-            <a:avLst/>
-          </a:prstGeom>
-          <a:noFill/>
-          <a:ln/>
-        </p:spPr>
-        <p:txBody>
-          <a:bodyPr wrap="square" rtlCol="0" anchor="ctr"/>
-          <a:lstStyle/>
-          <a:p>
-            <a:pPr indent="0" marL="0">
-              <a:buNone/>
+              <a:t>Measured in cubic units: cm³, m³.</a:t>
+            </a:r>
+            <a:endParaRPr lang="en-US" sz="1600" dirty="0"/>
+          </a:p>
+          <a:p>
+            <a:pPr marL="342900" indent="-342900">
+              <a:spcAft>
+                <a:spcPts val="800"/>
+              </a:spcAft>
+              <a:buSzPct val="100000"/>
+              <a:buChar char="•"/>
             </a:pPr>
             <a:r>
-              <a:rPr lang="en-US" sz="1400" b="1" dirty="0">
-                <a:solidFill>
-                  <a:srgbClr val="1B2A4A"/>
-                </a:solidFill>
-                <a:latin typeface="Calibri" pitchFamily="34" charset="0"/>
-                <a:ea typeface="Calibri" pitchFamily="34" charset="-122"/>
-                <a:cs typeface="Calibri" pitchFamily="34" charset="-120"/>
-              </a:rPr>
-              <a:t>Any Prism</a:t>
-            </a:r>
-            <a:endParaRPr lang="en-US" sz="1400" dirty="0"/>
-          </a:p>
-        </p:txBody>
-      </p:sp>
-      <p:sp>
-        <p:nvSpPr>
-          <p:cNvPr id="16" name="Text 14"/>
-          <p:cNvSpPr/>
-          <p:nvPr/>
-        </p:nvSpPr>
-        <p:spPr>
-          <a:xfrm>
-            <a:off x="6263640" y="1737360"/>
-            <a:ext cx="2286000" cy="1097280"/>
-          </a:xfrm>
-          <a:prstGeom prst="rect">
-            <a:avLst/>
-          </a:prstGeom>
-          <a:noFill/>
-          <a:ln/>
-        </p:spPr>
-        <p:txBody>
-          <a:bodyPr wrap="square" rtlCol="0" anchor="t"/>
-          <a:lstStyle/>
-          <a:p>
-            <a:pPr indent="0" marL="0">
-              <a:buNone/>
-            </a:pPr>
-            <a:r>
-              <a:rPr lang="en-US" sz="1100" dirty="0">
+              <a:rPr lang="en-US" sz="1600" dirty="0">
                 <a:solidFill>
                   <a:srgbClr val="3D3A36"/>
                 </a:solidFill>
@@ -2128,9 +2224,116 @@
                 <a:ea typeface="Calibri" pitchFamily="34" charset="-122"/>
                 <a:cs typeface="Calibri" pitchFamily="34" charset="-120"/>
               </a:rPr>
-              <a:t>V = area of cross-section × length. The cross-section is the same shape all the way through. This works for any prism (hexagonal, L-shaped, etc.).</a:t>
-            </a:r>
-            <a:endParaRPr lang="en-US" sz="1100" dirty="0"/>
+              <a:t>How many unit cubes fit inside?</a:t>
+            </a:r>
+            <a:endParaRPr lang="en-US" sz="1600" dirty="0"/>
+          </a:p>
+          <a:p>
+            <a:pPr marL="342900" indent="-342900">
+              <a:spcAft>
+                <a:spcPts val="800"/>
+              </a:spcAft>
+              <a:buSzPct val="100000"/>
+              <a:buChar char="•"/>
+            </a:pPr>
+            <a:r>
+              <a:rPr lang="en-US" sz="1600" dirty="0">
+                <a:solidFill>
+                  <a:srgbClr val="3D3A36"/>
+                </a:solidFill>
+                <a:latin typeface="Calibri" pitchFamily="34" charset="0"/>
+                <a:ea typeface="Calibri" pitchFamily="34" charset="-122"/>
+                <a:cs typeface="Calibri" pitchFamily="34" charset="-120"/>
+              </a:rPr>
+              <a:t>Different from surface area (inside vs. outside).</a:t>
+            </a:r>
+            <a:endParaRPr lang="en-US" sz="1600" dirty="0"/>
+          </a:p>
+        </p:txBody>
+      </p:sp>
+      <p:sp>
+        <p:nvSpPr>
+          <p:cNvPr id="6" name="Shape 4"/>
+          <p:cNvSpPr/>
+          <p:nvPr/>
+        </p:nvSpPr>
+        <p:spPr>
+          <a:xfrm>
+            <a:off x="640080" y="4114800"/>
+            <a:ext cx="7863840" cy="731520"/>
+          </a:xfrm>
+          <a:prstGeom prst="rect">
+            <a:avLst/>
+          </a:prstGeom>
+          <a:solidFill>
+            <a:srgbClr val="E8F5F3"/>
+          </a:solidFill>
+          <a:ln/>
+          <a:effectLst>
+            <a:outerShdw sx="100000" sy="100000" kx="0" ky="0" algn="bl" rotWithShape="0" blurRad="76200" dist="25400" dir="8100000">
+              <a:srgbClr val="000000">
+                <a:alpha val="12000"/>
+              </a:srgbClr>
+            </a:outerShdw>
+          </a:effectLst>
+        </p:spPr>
+      </p:sp>
+      <p:sp>
+        <p:nvSpPr>
+          <p:cNvPr id="7" name="Shape 5"/>
+          <p:cNvSpPr/>
+          <p:nvPr/>
+        </p:nvSpPr>
+        <p:spPr>
+          <a:xfrm>
+            <a:off x="640080" y="4114800"/>
+            <a:ext cx="64008" cy="731520"/>
+          </a:xfrm>
+          <a:prstGeom prst="rect">
+            <a:avLst/>
+          </a:prstGeom>
+          <a:solidFill>
+            <a:srgbClr val="2A9D8F"/>
+          </a:solidFill>
+          <a:ln/>
+        </p:spPr>
+      </p:sp>
+      <p:sp>
+        <p:nvSpPr>
+          <p:cNvPr id="8" name="Text 6"/>
+          <p:cNvSpPr/>
+          <p:nvPr/>
+        </p:nvSpPr>
+        <p:spPr>
+          <a:xfrm>
+            <a:off x="914400" y="4160520"/>
+            <a:ext cx="7406640" cy="640080"/>
+          </a:xfrm>
+          <a:prstGeom prst="rect">
+            <a:avLst/>
+          </a:prstGeom>
+          <a:noFill/>
+          <a:ln/>
+        </p:spPr>
+        <p:txBody>
+          <a:bodyPr wrap="square" rtlCol="0" anchor="ctr"/>
+          <a:lstStyle/>
+          <a:p>
+            <a:pPr indent="0" marL="0">
+              <a:buNone/>
+            </a:pPr>
+            <a:r>
+              <a:rPr lang="en-US" sz="1300" i="1" dirty="0">
+                <a:solidFill>
+                  <a:srgbClr val="3D3A36"/>
+                </a:solidFill>
+                <a:latin typeface="Calibri" pitchFamily="34" charset="0"/>
+                <a:ea typeface="Calibri" pitchFamily="34" charset="-122"/>
+                <a:cs typeface="Calibri" pitchFamily="34" charset="-120"/>
+              </a:rPr>
+              <a:t>A sugar cube ≈ 1 cm³. Your school bag ≈ 25,000 cm³.</a:t>
+            </a:r>
+            <a:endParaRPr lang="en-US" sz="1300" dirty="0"/>
           </a:p>
         </p:txBody>
       </p:sp>
@@ -2175,7 +2378,27 @@
         <p:spPr>
           <a:xfrm>
             <a:off x="0" y="0"/>
-            <a:ext cx="9144000" cy="54864"/>
+            <a:ext cx="9144000" cy="822960"/>
+          </a:xfrm>
+          <a:prstGeom prst="rect">
+            <a:avLst/>
+          </a:prstGeom>
+          <a:solidFill>
+            <a:srgbClr val="FFFFFF"/>
+          </a:solidFill>
+          <a:ln/>
+        </p:spPr>
+      </p:sp>
+      <p:sp>
+        <p:nvSpPr>
+          <p:cNvPr id="3" name="Shape 1"/>
+          <p:cNvSpPr/>
+          <p:nvPr/>
+        </p:nvSpPr>
+        <p:spPr>
+          <a:xfrm>
+            <a:off x="0" y="795528"/>
+            <a:ext cx="9144000" cy="27432"/>
           </a:xfrm>
           <a:prstGeom prst="rect">
             <a:avLst/>
@@ -2188,14 +2411,14 @@
       </p:sp>
       <p:sp>
         <p:nvSpPr>
-          <p:cNvPr id="3" name="Text 1"/>
-          <p:cNvSpPr/>
-          <p:nvPr/>
-        </p:nvSpPr>
-        <p:spPr>
-          <a:xfrm>
-            <a:off x="7772400" y="4709160"/>
-            <a:ext cx="1097280" cy="320040"/>
+          <p:cNvPr id="4" name="Text 2"/>
+          <p:cNvSpPr/>
+          <p:nvPr/>
+        </p:nvSpPr>
+        <p:spPr>
+          <a:xfrm>
+            <a:off x="640080" y="91440"/>
+            <a:ext cx="7863840" cy="640080"/>
           </a:xfrm>
           <a:prstGeom prst="rect">
             <a:avLst/>
@@ -2204,53 +2427,14 @@
           <a:ln/>
         </p:spPr>
         <p:txBody>
-          <a:bodyPr wrap="square" rtlCol="0" anchor="ctr"/>
-          <a:lstStyle/>
-          <a:p>
-            <a:pPr algn="r" indent="0" marL="0">
-              <a:buNone/>
-            </a:pPr>
-            <a:r>
-              <a:rPr lang="en-US" sz="900" dirty="0">
-                <a:solidFill>
-                  <a:srgbClr val="6B6660"/>
-                </a:solidFill>
-                <a:latin typeface="Calibri" pitchFamily="34" charset="0"/>
-                <a:ea typeface="Calibri" pitchFamily="34" charset="-122"/>
-                <a:cs typeface="Calibri" pitchFamily="34" charset="-120"/>
-              </a:rPr>
-              <a:t>4 / 5</a:t>
-            </a:r>
-            <a:endParaRPr lang="en-US" sz="900" dirty="0"/>
-          </a:p>
-        </p:txBody>
-      </p:sp>
-      <p:sp>
-        <p:nvSpPr>
-          <p:cNvPr id="4" name="Text 2"/>
-          <p:cNvSpPr/>
-          <p:nvPr/>
-        </p:nvSpPr>
-        <p:spPr>
-          <a:xfrm>
-            <a:off x="457200" y="274320"/>
-            <a:ext cx="8229600" cy="640080"/>
-          </a:xfrm>
-          <a:prstGeom prst="rect">
-            <a:avLst/>
-          </a:prstGeom>
-          <a:noFill/>
-          <a:ln/>
-        </p:spPr>
-        <p:txBody>
-          <a:bodyPr wrap="square" rtlCol="0" anchor="ctr"/>
+          <a:bodyPr wrap="square" lIns="0" tIns="0" rIns="0" bIns="0" rtlCol="0" anchor="ctr"/>
           <a:lstStyle/>
           <a:p>
             <a:pPr indent="0" marL="0">
               <a:buNone/>
             </a:pPr>
             <a:r>
-              <a:rPr lang="en-US" sz="2600" b="1" dirty="0">
+              <a:rPr lang="en-US" sz="2200" b="1" dirty="0">
                 <a:solidFill>
                   <a:srgbClr val="1B2A4A"/>
                 </a:solidFill>
@@ -2258,321 +2442,840 @@
                 <a:ea typeface="Georgia" pitchFamily="34" charset="-122"/>
                 <a:cs typeface="Georgia" pitchFamily="34" charset="-120"/>
               </a:rPr>
-              <a:t>Problem Solving</a:t>
-            </a:r>
-            <a:endParaRPr lang="en-US" sz="2600" dirty="0"/>
-          </a:p>
-        </p:txBody>
-      </p:sp>
-      <p:sp>
-        <p:nvSpPr>
-          <p:cNvPr id="5" name="Text 3"/>
-          <p:cNvSpPr/>
-          <p:nvPr/>
-        </p:nvSpPr>
-        <p:spPr>
-          <a:xfrm>
-            <a:off x="457200" y="1188720"/>
-            <a:ext cx="3840480" cy="3474720"/>
-          </a:xfrm>
-          <a:prstGeom prst="rect">
-            <a:avLst/>
-          </a:prstGeom>
-          <a:noFill/>
-          <a:ln/>
-        </p:spPr>
-        <p:txBody>
-          <a:bodyPr wrap="square" rtlCol="0" anchor="t"/>
-          <a:lstStyle/>
-          <a:p>
-            <a:pPr marL="342900" indent="-342900">
-              <a:spcAft>
-                <a:spcPts val="600"/>
-              </a:spcAft>
-              <a:buSzPct val="100000"/>
-              <a:buChar char="•"/>
-            </a:pPr>
-            <a:r>
-              <a:rPr lang="en-US" sz="1400" dirty="0">
-                <a:solidFill>
-                  <a:srgbClr val="3D3A36"/>
-                </a:solidFill>
-                <a:latin typeface="Calibri" pitchFamily="34" charset="0"/>
-                <a:ea typeface="Calibri" pitchFamily="34" charset="-122"/>
-                <a:cs typeface="Calibri" pitchFamily="34" charset="-120"/>
-              </a:rPr>
-              <a:t>If you know volume and two dimensions, find the third</a:t>
-            </a:r>
-            <a:endParaRPr lang="en-US" sz="1400" dirty="0"/>
-          </a:p>
-          <a:p>
-            <a:pPr marL="342900" indent="-342900">
-              <a:spcAft>
-                <a:spcPts val="600"/>
-              </a:spcAft>
-              <a:buSzPct val="100000"/>
-              <a:buChar char="•"/>
-            </a:pPr>
-            <a:r>
-              <a:rPr lang="en-US" sz="1400" dirty="0">
-                <a:solidFill>
-                  <a:srgbClr val="3D3A36"/>
-                </a:solidFill>
-                <a:latin typeface="Calibri" pitchFamily="34" charset="0"/>
-                <a:ea typeface="Calibri" pitchFamily="34" charset="-122"/>
-                <a:cs typeface="Calibri" pitchFamily="34" charset="-120"/>
-              </a:rPr>
-              <a:t>V = 60cm³, l = 5cm, w = 4cm → h = 60 ÷ (5×4) = 3cm</a:t>
-            </a:r>
-            <a:endParaRPr lang="en-US" sz="1400" dirty="0"/>
-          </a:p>
-          <a:p>
-            <a:pPr marL="342900" indent="-342900">
-              <a:spcAft>
-                <a:spcPts val="600"/>
-              </a:spcAft>
-              <a:buSzPct val="100000"/>
-              <a:buChar char="•"/>
-            </a:pPr>
-            <a:r>
-              <a:rPr lang="en-US" sz="1400" dirty="0">
-                <a:solidFill>
-                  <a:srgbClr val="3D3A36"/>
-                </a:solidFill>
-                <a:latin typeface="Calibri" pitchFamily="34" charset="0"/>
-                <a:ea typeface="Calibri" pitchFamily="34" charset="-122"/>
-                <a:cs typeface="Calibri" pitchFamily="34" charset="-120"/>
-              </a:rPr>
-              <a:t>Compound 3D shapes: split into prisms, calculate each, add together</a:t>
-            </a:r>
-            <a:endParaRPr lang="en-US" sz="1400" dirty="0"/>
-          </a:p>
-          <a:p>
-            <a:pPr marL="342900" indent="-342900">
-              <a:spcAft>
-                <a:spcPts val="600"/>
-              </a:spcAft>
-              <a:buSzPct val="100000"/>
-              <a:buChar char="•"/>
-            </a:pPr>
-            <a:r>
-              <a:rPr lang="en-US" sz="1400" dirty="0">
-                <a:solidFill>
-                  <a:srgbClr val="3D3A36"/>
-                </a:solidFill>
-                <a:latin typeface="Calibri" pitchFamily="34" charset="0"/>
-                <a:ea typeface="Calibri" pitchFamily="34" charset="-122"/>
-                <a:cs typeface="Calibri" pitchFamily="34" charset="-120"/>
-              </a:rPr>
-              <a:t>Water capacity: 1 cm³ = 1 mL, so 1000 cm³ = 1 litre</a:t>
-            </a:r>
-            <a:endParaRPr lang="en-US" sz="1400" dirty="0"/>
-          </a:p>
-        </p:txBody>
-      </p:sp>
-      <p:sp>
-        <p:nvSpPr>
-          <p:cNvPr id="6" name="Shape 4"/>
-          <p:cNvSpPr/>
-          <p:nvPr/>
-        </p:nvSpPr>
-        <p:spPr>
-          <a:xfrm>
-            <a:off x="4846320" y="1188720"/>
-            <a:ext cx="3840480" cy="3474720"/>
-          </a:xfrm>
-          <a:prstGeom prst="rect">
-            <a:avLst/>
-          </a:prstGeom>
-          <a:solidFill>
-            <a:srgbClr val="FFFFFF"/>
-          </a:solidFill>
-          <a:ln w="12700">
-            <a:solidFill>
-              <a:srgbClr val="E5E2DC"/>
-            </a:solidFill>
-            <a:prstDash val="solid"/>
-          </a:ln>
-          <a:effectLst>
-            <a:outerShdw sx="100000" sy="100000" kx="0" ky="0" algn="bl" rotWithShape="0" blurRad="50800" dist="25400" dir="8100000">
-              <a:srgbClr val="000000">
-                <a:alpha val="10000"/>
-              </a:srgbClr>
-            </a:outerShdw>
-          </a:effectLst>
-        </p:spPr>
-      </p:sp>
-      <p:sp>
-        <p:nvSpPr>
-          <p:cNvPr id="7" name="Shape 5"/>
-          <p:cNvSpPr/>
-          <p:nvPr/>
-        </p:nvSpPr>
-        <p:spPr>
-          <a:xfrm>
-            <a:off x="4846320" y="1188720"/>
-            <a:ext cx="3840480" cy="54864"/>
-          </a:xfrm>
-          <a:prstGeom prst="rect">
-            <a:avLst/>
-          </a:prstGeom>
-          <a:solidFill>
-            <a:srgbClr val="2A9D8F"/>
-          </a:solidFill>
-          <a:ln/>
-        </p:spPr>
-      </p:sp>
-      <p:sp>
-        <p:nvSpPr>
-          <p:cNvPr id="8" name="Text 6"/>
-          <p:cNvSpPr/>
-          <p:nvPr/>
-        </p:nvSpPr>
-        <p:spPr>
-          <a:xfrm>
-            <a:off x="5120640" y="1371600"/>
-            <a:ext cx="3291840" cy="3108960"/>
-          </a:xfrm>
-          <a:prstGeom prst="rect">
-            <a:avLst/>
-          </a:prstGeom>
-          <a:noFill/>
-          <a:ln/>
-        </p:spPr>
-        <p:txBody>
-          <a:bodyPr wrap="square" rtlCol="0" anchor="t"/>
-          <a:lstStyle/>
-          <a:p>
-            <a:pPr indent="0" marL="0">
-              <a:spcAft>
-                <a:spcPts val="400"/>
-              </a:spcAft>
-              <a:buNone/>
-            </a:pPr>
-            <a:r>
-              <a:rPr lang="en-US" sz="1600" b="1" dirty="0">
-                <a:solidFill>
-                  <a:srgbClr val="1B2A4A"/>
-                </a:solidFill>
-                <a:latin typeface="Calibri" pitchFamily="34" charset="0"/>
-                <a:ea typeface="Calibri" pitchFamily="34" charset="-122"/>
-                <a:cs typeface="Calibri" pitchFamily="34" charset="-120"/>
-              </a:rPr>
-              <a:t>Unit Conversions</a:t>
-            </a:r>
-            <a:endParaRPr lang="en-US" sz="1600" dirty="0"/>
-          </a:p>
-          <a:p>
-            <a:pPr indent="0" marL="0">
-              <a:spcAft>
-                <a:spcPts val="400"/>
-              </a:spcAft>
-              <a:buNone/>
-            </a:pPr>
-            <a:endParaRPr lang="en-US" sz="1600" dirty="0"/>
-          </a:p>
-          <a:p>
-            <a:pPr indent="0" marL="0">
-              <a:spcAft>
-                <a:spcPts val="400"/>
-              </a:spcAft>
-              <a:buNone/>
-            </a:pPr>
-            <a:r>
-              <a:rPr lang="en-US" sz="1300" dirty="0">
-                <a:solidFill>
-                  <a:srgbClr val="3D3A36"/>
-                </a:solidFill>
-                <a:latin typeface="Calibri" pitchFamily="34" charset="0"/>
-                <a:ea typeface="Calibri" pitchFamily="34" charset="-122"/>
-                <a:cs typeface="Calibri" pitchFamily="34" charset="-120"/>
-              </a:rPr>
-              <a:t>1 cm³ = 1 mL (millilitre)</a:t>
-            </a:r>
-            <a:endParaRPr lang="en-US" sz="1600" dirty="0"/>
-          </a:p>
-          <a:p>
-            <a:pPr indent="0" marL="0">
-              <a:spcAft>
-                <a:spcPts val="400"/>
-              </a:spcAft>
-              <a:buNone/>
-            </a:pPr>
-            <a:r>
-              <a:rPr lang="en-US" sz="1300" dirty="0">
-                <a:solidFill>
-                  <a:srgbClr val="3D3A36"/>
-                </a:solidFill>
-                <a:latin typeface="Calibri" pitchFamily="34" charset="0"/>
-                <a:ea typeface="Calibri" pitchFamily="34" charset="-122"/>
-                <a:cs typeface="Calibri" pitchFamily="34" charset="-120"/>
-              </a:rPr>
-              <a:t>1000 cm³ = 1 L (litre)</a:t>
-            </a:r>
-            <a:endParaRPr lang="en-US" sz="1600" dirty="0"/>
-          </a:p>
-          <a:p>
-            <a:pPr indent="0" marL="0">
-              <a:spcAft>
-                <a:spcPts val="400"/>
-              </a:spcAft>
-              <a:buNone/>
-            </a:pPr>
-            <a:r>
-              <a:rPr lang="en-US" sz="1300" dirty="0">
-                <a:solidFill>
-                  <a:srgbClr val="3D3A36"/>
-                </a:solidFill>
-                <a:latin typeface="Calibri" pitchFamily="34" charset="0"/>
-                <a:ea typeface="Calibri" pitchFamily="34" charset="-122"/>
-                <a:cs typeface="Calibri" pitchFamily="34" charset="-120"/>
-              </a:rPr>
-              <a:t>1 m³ = 1,000,000 cm³</a:t>
-            </a:r>
-            <a:endParaRPr lang="en-US" sz="1600" dirty="0"/>
-          </a:p>
-          <a:p>
-            <a:pPr indent="0" marL="0">
-              <a:spcAft>
-                <a:spcPts val="400"/>
-              </a:spcAft>
-              <a:buNone/>
-            </a:pPr>
-            <a:r>
-              <a:rPr lang="en-US" sz="1300" dirty="0">
-                <a:solidFill>
-                  <a:srgbClr val="3D3A36"/>
-                </a:solidFill>
-                <a:latin typeface="Calibri" pitchFamily="34" charset="0"/>
-                <a:ea typeface="Calibri" pitchFamily="34" charset="-122"/>
-                <a:cs typeface="Calibri" pitchFamily="34" charset="-120"/>
-              </a:rPr>
-              <a:t>1 m³ = 1000 L</a:t>
-            </a:r>
-            <a:endParaRPr lang="en-US" sz="1600" dirty="0"/>
-          </a:p>
-          <a:p>
-            <a:pPr indent="0" marL="0">
-              <a:spcAft>
-                <a:spcPts val="400"/>
-              </a:spcAft>
-              <a:buNone/>
-            </a:pPr>
-            <a:r>
-              <a:rPr lang="en-US" sz="1300" dirty="0">
-                <a:solidFill>
-                  <a:srgbClr val="3D3A36"/>
-                </a:solidFill>
-                <a:latin typeface="Calibri" pitchFamily="34" charset="0"/>
-                <a:ea typeface="Calibri" pitchFamily="34" charset="-122"/>
-                <a:cs typeface="Calibri" pitchFamily="34" charset="-120"/>
-              </a:rPr>
-              <a:t>These conversions connect volume to capacity</a:t>
-            </a:r>
-            <a:endParaRPr lang="en-US" sz="1600" dirty="0"/>
-          </a:p>
-        </p:txBody>
-      </p:sp>
+              <a:t>Volume Formulas</a:t>
+            </a:r>
+            <a:endParaRPr lang="en-US" sz="2200" dirty="0"/>
+          </a:p>
+        </p:txBody>
+      </p:sp>
+      <p:graphicFrame>
+        <p:nvGraphicFramePr>
+          <p:cNvPr id="5" name="Table 0"/>
+          <p:cNvGraphicFramePr>
+            <a:graphicFrameLocks noGrp="1"/>
+          </p:cNvGraphicFramePr>
+          <p:nvPr>
+            <p:extLst>
+              <p:ext uri="{D42A27DB-BD31-4B8C-83A1-F6EECF244321}">
+                <p14:modId xmlns:p14="http://schemas.microsoft.com/office/powerpoint/2010/main" val="1579011935"/>
+              </p:ext>
+            </p:extLst>
+          </p:nvPr>
+        </p:nvGraphicFramePr>
+        <p:xfrm>
+          <a:off x="640080" y="1051560"/>
+          <a:ext cx="7863840" cy="914400"/>
+        </p:xfrm>
+        <a:graphic>
+          <a:graphicData uri="http://schemas.openxmlformats.org/drawingml/2006/table">
+            <a:tbl>
+              <a:tblPr/>
+              <a:tblGrid>
+                <a:gridCol w="2621280"/>
+                <a:gridCol w="2621280"/>
+                <a:gridCol w="2621280"/>
+              </a:tblGrid>
+              <a:tr h="502920">
+                <a:tc>
+                  <a:txBody>
+                    <a:bodyPr/>
+                    <a:lstStyle/>
+                    <a:p>
+                      <a:pPr indent="0" marL="0">
+                        <a:buNone/>
+                      </a:pPr>
+                      <a:r>
+                        <a:rPr lang="en-US" sz="1300" b="1" dirty="0">
+                          <a:solidFill>
+                            <a:srgbClr val="FFFFFF"/>
+                          </a:solidFill>
+                          <a:latin typeface="Calibri" pitchFamily="34" charset="0"/>
+                          <a:ea typeface="Calibri" pitchFamily="34" charset="-122"/>
+                          <a:cs typeface="Calibri" pitchFamily="34" charset="-120"/>
+                        </a:rPr>
+                        <a:t>Shape</a:t>
+                      </a:r>
+                      <a:endParaRPr lang="en-US" sz="1300" dirty="0">
+                        <a:latin typeface="Calibri" charset="0"/>
+                        <a:ea typeface="Calibri" charset="0"/>
+                        <a:cs typeface="Calibri" charset="0"/>
+                      </a:endParaRPr>
+                    </a:p>
+                  </a:txBody>
+                  <a:tcPr marL="91440" marR="91440" marT="45720" marB="45720">
+                    <a:lnL w="6350" cap="flat" cmpd="sng" algn="ctr">
+                      <a:solidFill>
+                        <a:srgbClr val="E5E2DC"/>
+                      </a:solidFill>
+                      <a:prstDash val="solid"/>
+                      <a:round/>
+                      <a:headEnd type="none" w="med" len="med"/>
+                      <a:tailEnd type="none" w="med" len="med"/>
+                    </a:lnL>
+                    <a:lnR w="6350" cap="flat" cmpd="sng" algn="ctr">
+                      <a:solidFill>
+                        <a:srgbClr val="E5E2DC"/>
+                      </a:solidFill>
+                      <a:prstDash val="solid"/>
+                      <a:round/>
+                      <a:headEnd type="none" w="med" len="med"/>
+                      <a:tailEnd type="none" w="med" len="med"/>
+                    </a:lnR>
+                    <a:lnT w="6350" cap="flat" cmpd="sng" algn="ctr">
+                      <a:solidFill>
+                        <a:srgbClr val="E5E2DC"/>
+                      </a:solidFill>
+                      <a:prstDash val="solid"/>
+                      <a:round/>
+                      <a:headEnd type="none" w="med" len="med"/>
+                      <a:tailEnd type="none" w="med" len="med"/>
+                    </a:lnT>
+                    <a:lnB w="6350" cap="flat" cmpd="sng" algn="ctr">
+                      <a:solidFill>
+                        <a:srgbClr val="E5E2DC"/>
+                      </a:solidFill>
+                      <a:prstDash val="solid"/>
+                      <a:round/>
+                      <a:headEnd type="none" w="med" len="med"/>
+                      <a:tailEnd type="none" w="med" len="med"/>
+                    </a:lnB>
+                    <a:solidFill>
+                      <a:srgbClr val="2A9D8F"/>
+                    </a:solidFill>
+                  </a:tcPr>
+                </a:tc>
+                <a:tc>
+                  <a:txBody>
+                    <a:bodyPr/>
+                    <a:lstStyle/>
+                    <a:p>
+                      <a:pPr indent="0" marL="0">
+                        <a:buNone/>
+                      </a:pPr>
+                      <a:r>
+                        <a:rPr lang="en-US" sz="1300" b="1" dirty="0">
+                          <a:solidFill>
+                            <a:srgbClr val="FFFFFF"/>
+                          </a:solidFill>
+                          <a:latin typeface="Calibri" pitchFamily="34" charset="0"/>
+                          <a:ea typeface="Calibri" pitchFamily="34" charset="-122"/>
+                          <a:cs typeface="Calibri" pitchFamily="34" charset="-120"/>
+                        </a:rPr>
+                        <a:t>Formula</a:t>
+                      </a:r>
+                      <a:endParaRPr lang="en-US" sz="1300" dirty="0">
+                        <a:latin typeface="Calibri" charset="0"/>
+                        <a:ea typeface="Calibri" charset="0"/>
+                        <a:cs typeface="Calibri" charset="0"/>
+                      </a:endParaRPr>
+                    </a:p>
+                  </a:txBody>
+                  <a:tcPr marL="91440" marR="91440" marT="45720" marB="45720">
+                    <a:lnL w="6350" cap="flat" cmpd="sng" algn="ctr">
+                      <a:solidFill>
+                        <a:srgbClr val="E5E2DC"/>
+                      </a:solidFill>
+                      <a:prstDash val="solid"/>
+                      <a:round/>
+                      <a:headEnd type="none" w="med" len="med"/>
+                      <a:tailEnd type="none" w="med" len="med"/>
+                    </a:lnL>
+                    <a:lnR w="6350" cap="flat" cmpd="sng" algn="ctr">
+                      <a:solidFill>
+                        <a:srgbClr val="E5E2DC"/>
+                      </a:solidFill>
+                      <a:prstDash val="solid"/>
+                      <a:round/>
+                      <a:headEnd type="none" w="med" len="med"/>
+                      <a:tailEnd type="none" w="med" len="med"/>
+                    </a:lnR>
+                    <a:lnT w="6350" cap="flat" cmpd="sng" algn="ctr">
+                      <a:solidFill>
+                        <a:srgbClr val="E5E2DC"/>
+                      </a:solidFill>
+                      <a:prstDash val="solid"/>
+                      <a:round/>
+                      <a:headEnd type="none" w="med" len="med"/>
+                      <a:tailEnd type="none" w="med" len="med"/>
+                    </a:lnT>
+                    <a:lnB w="6350" cap="flat" cmpd="sng" algn="ctr">
+                      <a:solidFill>
+                        <a:srgbClr val="E5E2DC"/>
+                      </a:solidFill>
+                      <a:prstDash val="solid"/>
+                      <a:round/>
+                      <a:headEnd type="none" w="med" len="med"/>
+                      <a:tailEnd type="none" w="med" len="med"/>
+                    </a:lnB>
+                    <a:solidFill>
+                      <a:srgbClr val="2A9D8F"/>
+                    </a:solidFill>
+                  </a:tcPr>
+                </a:tc>
+                <a:tc>
+                  <a:txBody>
+                    <a:bodyPr/>
+                    <a:lstStyle/>
+                    <a:p>
+                      <a:pPr indent="0" marL="0">
+                        <a:buNone/>
+                      </a:pPr>
+                      <a:r>
+                        <a:rPr lang="en-US" sz="1300" b="1" dirty="0">
+                          <a:solidFill>
+                            <a:srgbClr val="FFFFFF"/>
+                          </a:solidFill>
+                          <a:latin typeface="Calibri" pitchFamily="34" charset="0"/>
+                          <a:ea typeface="Calibri" pitchFamily="34" charset="-122"/>
+                          <a:cs typeface="Calibri" pitchFamily="34" charset="-120"/>
+                        </a:rPr>
+                        <a:t>Remember</a:t>
+                      </a:r>
+                      <a:endParaRPr lang="en-US" sz="1300" dirty="0">
+                        <a:latin typeface="Calibri" charset="0"/>
+                        <a:ea typeface="Calibri" charset="0"/>
+                        <a:cs typeface="Calibri" charset="0"/>
+                      </a:endParaRPr>
+                    </a:p>
+                  </a:txBody>
+                  <a:tcPr marL="91440" marR="91440" marT="45720" marB="45720">
+                    <a:lnL w="6350" cap="flat" cmpd="sng" algn="ctr">
+                      <a:solidFill>
+                        <a:srgbClr val="E5E2DC"/>
+                      </a:solidFill>
+                      <a:prstDash val="solid"/>
+                      <a:round/>
+                      <a:headEnd type="none" w="med" len="med"/>
+                      <a:tailEnd type="none" w="med" len="med"/>
+                    </a:lnL>
+                    <a:lnR w="6350" cap="flat" cmpd="sng" algn="ctr">
+                      <a:solidFill>
+                        <a:srgbClr val="E5E2DC"/>
+                      </a:solidFill>
+                      <a:prstDash val="solid"/>
+                      <a:round/>
+                      <a:headEnd type="none" w="med" len="med"/>
+                      <a:tailEnd type="none" w="med" len="med"/>
+                    </a:lnR>
+                    <a:lnT w="6350" cap="flat" cmpd="sng" algn="ctr">
+                      <a:solidFill>
+                        <a:srgbClr val="E5E2DC"/>
+                      </a:solidFill>
+                      <a:prstDash val="solid"/>
+                      <a:round/>
+                      <a:headEnd type="none" w="med" len="med"/>
+                      <a:tailEnd type="none" w="med" len="med"/>
+                    </a:lnT>
+                    <a:lnB w="6350" cap="flat" cmpd="sng" algn="ctr">
+                      <a:solidFill>
+                        <a:srgbClr val="E5E2DC"/>
+                      </a:solidFill>
+                      <a:prstDash val="solid"/>
+                      <a:round/>
+                      <a:headEnd type="none" w="med" len="med"/>
+                      <a:tailEnd type="none" w="med" len="med"/>
+                    </a:lnB>
+                    <a:solidFill>
+                      <a:srgbClr val="2A9D8F"/>
+                    </a:solidFill>
+                  </a:tcPr>
+                </a:tc>
+              </a:tr>
+              <a:tr h="502920">
+                <a:tc>
+                  <a:txBody>
+                    <a:bodyPr/>
+                    <a:lstStyle/>
+                    <a:p>
+                      <a:pPr indent="0" marL="0">
+                        <a:buNone/>
+                      </a:pPr>
+                      <a:r>
+                        <a:rPr lang="en-US" sz="1300" dirty="0">
+                          <a:solidFill>
+                            <a:srgbClr val="3D3A36"/>
+                          </a:solidFill>
+                          <a:latin typeface="Calibri" pitchFamily="34" charset="0"/>
+                          <a:ea typeface="Calibri" pitchFamily="34" charset="-122"/>
+                          <a:cs typeface="Calibri" pitchFamily="34" charset="-120"/>
+                        </a:rPr>
+                        <a:t>Cube</a:t>
+                      </a:r>
+                      <a:endParaRPr lang="en-US" sz="1300" dirty="0">
+                        <a:latin typeface="Calibri" charset="0"/>
+                        <a:ea typeface="Calibri" charset="0"/>
+                        <a:cs typeface="Calibri" charset="0"/>
+                      </a:endParaRPr>
+                    </a:p>
+                  </a:txBody>
+                  <a:tcPr marL="91440" marR="91440" marT="45720" marB="45720">
+                    <a:lnL w="6350" cap="flat" cmpd="sng" algn="ctr">
+                      <a:solidFill>
+                        <a:srgbClr val="E5E2DC"/>
+                      </a:solidFill>
+                      <a:prstDash val="solid"/>
+                      <a:round/>
+                      <a:headEnd type="none" w="med" len="med"/>
+                      <a:tailEnd type="none" w="med" len="med"/>
+                    </a:lnL>
+                    <a:lnR w="6350" cap="flat" cmpd="sng" algn="ctr">
+                      <a:solidFill>
+                        <a:srgbClr val="E5E2DC"/>
+                      </a:solidFill>
+                      <a:prstDash val="solid"/>
+                      <a:round/>
+                      <a:headEnd type="none" w="med" len="med"/>
+                      <a:tailEnd type="none" w="med" len="med"/>
+                    </a:lnR>
+                    <a:lnT w="6350" cap="flat" cmpd="sng" algn="ctr">
+                      <a:solidFill>
+                        <a:srgbClr val="E5E2DC"/>
+                      </a:solidFill>
+                      <a:prstDash val="solid"/>
+                      <a:round/>
+                      <a:headEnd type="none" w="med" len="med"/>
+                      <a:tailEnd type="none" w="med" len="med"/>
+                    </a:lnT>
+                    <a:lnB w="6350" cap="flat" cmpd="sng" algn="ctr">
+                      <a:solidFill>
+                        <a:srgbClr val="E5E2DC"/>
+                      </a:solidFill>
+                      <a:prstDash val="solid"/>
+                      <a:round/>
+                      <a:headEnd type="none" w="med" len="med"/>
+                      <a:tailEnd type="none" w="med" len="med"/>
+                    </a:lnB>
+                  </a:tcPr>
+                </a:tc>
+                <a:tc>
+                  <a:txBody>
+                    <a:bodyPr/>
+                    <a:lstStyle/>
+                    <a:p>
+                      <a:pPr indent="0" marL="0">
+                        <a:buNone/>
+                      </a:pPr>
+                      <a:r>
+                        <a:rPr lang="en-US" sz="1300" dirty="0">
+                          <a:solidFill>
+                            <a:srgbClr val="3D3A36"/>
+                          </a:solidFill>
+                          <a:latin typeface="Calibri" pitchFamily="34" charset="0"/>
+                          <a:ea typeface="Calibri" pitchFamily="34" charset="-122"/>
+                          <a:cs typeface="Calibri" pitchFamily="34" charset="-120"/>
+                        </a:rPr>
+                        <a:t>V = s³</a:t>
+                      </a:r>
+                      <a:endParaRPr lang="en-US" sz="1300" dirty="0">
+                        <a:latin typeface="Calibri" charset="0"/>
+                        <a:ea typeface="Calibri" charset="0"/>
+                        <a:cs typeface="Calibri" charset="0"/>
+                      </a:endParaRPr>
+                    </a:p>
+                  </a:txBody>
+                  <a:tcPr marL="91440" marR="91440" marT="45720" marB="45720">
+                    <a:lnL w="6350" cap="flat" cmpd="sng" algn="ctr">
+                      <a:solidFill>
+                        <a:srgbClr val="E5E2DC"/>
+                      </a:solidFill>
+                      <a:prstDash val="solid"/>
+                      <a:round/>
+                      <a:headEnd type="none" w="med" len="med"/>
+                      <a:tailEnd type="none" w="med" len="med"/>
+                    </a:lnL>
+                    <a:lnR w="6350" cap="flat" cmpd="sng" algn="ctr">
+                      <a:solidFill>
+                        <a:srgbClr val="E5E2DC"/>
+                      </a:solidFill>
+                      <a:prstDash val="solid"/>
+                      <a:round/>
+                      <a:headEnd type="none" w="med" len="med"/>
+                      <a:tailEnd type="none" w="med" len="med"/>
+                    </a:lnR>
+                    <a:lnT w="6350" cap="flat" cmpd="sng" algn="ctr">
+                      <a:solidFill>
+                        <a:srgbClr val="E5E2DC"/>
+                      </a:solidFill>
+                      <a:prstDash val="solid"/>
+                      <a:round/>
+                      <a:headEnd type="none" w="med" len="med"/>
+                      <a:tailEnd type="none" w="med" len="med"/>
+                    </a:lnT>
+                    <a:lnB w="6350" cap="flat" cmpd="sng" algn="ctr">
+                      <a:solidFill>
+                        <a:srgbClr val="E5E2DC"/>
+                      </a:solidFill>
+                      <a:prstDash val="solid"/>
+                      <a:round/>
+                      <a:headEnd type="none" w="med" len="med"/>
+                      <a:tailEnd type="none" w="med" len="med"/>
+                    </a:lnB>
+                  </a:tcPr>
+                </a:tc>
+                <a:tc>
+                  <a:txBody>
+                    <a:bodyPr/>
+                    <a:lstStyle/>
+                    <a:p>
+                      <a:pPr indent="0" marL="0">
+                        <a:buNone/>
+                      </a:pPr>
+                      <a:r>
+                        <a:rPr lang="en-US" sz="1300" dirty="0">
+                          <a:solidFill>
+                            <a:srgbClr val="3D3A36"/>
+                          </a:solidFill>
+                          <a:latin typeface="Calibri" pitchFamily="34" charset="0"/>
+                          <a:ea typeface="Calibri" pitchFamily="34" charset="-122"/>
+                          <a:cs typeface="Calibri" pitchFamily="34" charset="-120"/>
+                        </a:rPr>
+                        <a:t>All edges equal</a:t>
+                      </a:r>
+                      <a:endParaRPr lang="en-US" sz="1300" dirty="0">
+                        <a:latin typeface="Calibri" charset="0"/>
+                        <a:ea typeface="Calibri" charset="0"/>
+                        <a:cs typeface="Calibri" charset="0"/>
+                      </a:endParaRPr>
+                    </a:p>
+                  </a:txBody>
+                  <a:tcPr marL="91440" marR="91440" marT="45720" marB="45720">
+                    <a:lnL w="6350" cap="flat" cmpd="sng" algn="ctr">
+                      <a:solidFill>
+                        <a:srgbClr val="E5E2DC"/>
+                      </a:solidFill>
+                      <a:prstDash val="solid"/>
+                      <a:round/>
+                      <a:headEnd type="none" w="med" len="med"/>
+                      <a:tailEnd type="none" w="med" len="med"/>
+                    </a:lnL>
+                    <a:lnR w="6350" cap="flat" cmpd="sng" algn="ctr">
+                      <a:solidFill>
+                        <a:srgbClr val="E5E2DC"/>
+                      </a:solidFill>
+                      <a:prstDash val="solid"/>
+                      <a:round/>
+                      <a:headEnd type="none" w="med" len="med"/>
+                      <a:tailEnd type="none" w="med" len="med"/>
+                    </a:lnR>
+                    <a:lnT w="6350" cap="flat" cmpd="sng" algn="ctr">
+                      <a:solidFill>
+                        <a:srgbClr val="E5E2DC"/>
+                      </a:solidFill>
+                      <a:prstDash val="solid"/>
+                      <a:round/>
+                      <a:headEnd type="none" w="med" len="med"/>
+                      <a:tailEnd type="none" w="med" len="med"/>
+                    </a:lnT>
+                    <a:lnB w="6350" cap="flat" cmpd="sng" algn="ctr">
+                      <a:solidFill>
+                        <a:srgbClr val="E5E2DC"/>
+                      </a:solidFill>
+                      <a:prstDash val="solid"/>
+                      <a:round/>
+                      <a:headEnd type="none" w="med" len="med"/>
+                      <a:tailEnd type="none" w="med" len="med"/>
+                    </a:lnB>
+                  </a:tcPr>
+                </a:tc>
+              </a:tr>
+              <a:tr h="502920">
+                <a:tc>
+                  <a:txBody>
+                    <a:bodyPr/>
+                    <a:lstStyle/>
+                    <a:p>
+                      <a:pPr indent="0" marL="0">
+                        <a:buNone/>
+                      </a:pPr>
+                      <a:r>
+                        <a:rPr lang="en-US" sz="1300" dirty="0">
+                          <a:solidFill>
+                            <a:srgbClr val="3D3A36"/>
+                          </a:solidFill>
+                          <a:latin typeface="Calibri" pitchFamily="34" charset="0"/>
+                          <a:ea typeface="Calibri" pitchFamily="34" charset="-122"/>
+                          <a:cs typeface="Calibri" pitchFamily="34" charset="-120"/>
+                        </a:rPr>
+                        <a:t>Rectangular Prism</a:t>
+                      </a:r>
+                      <a:endParaRPr lang="en-US" sz="1300" dirty="0">
+                        <a:latin typeface="Calibri" charset="0"/>
+                        <a:ea typeface="Calibri" charset="0"/>
+                        <a:cs typeface="Calibri" charset="0"/>
+                      </a:endParaRPr>
+                    </a:p>
+                  </a:txBody>
+                  <a:tcPr marL="91440" marR="91440" marT="45720" marB="45720">
+                    <a:lnL w="6350" cap="flat" cmpd="sng" algn="ctr">
+                      <a:solidFill>
+                        <a:srgbClr val="E5E2DC"/>
+                      </a:solidFill>
+                      <a:prstDash val="solid"/>
+                      <a:round/>
+                      <a:headEnd type="none" w="med" len="med"/>
+                      <a:tailEnd type="none" w="med" len="med"/>
+                    </a:lnL>
+                    <a:lnR w="6350" cap="flat" cmpd="sng" algn="ctr">
+                      <a:solidFill>
+                        <a:srgbClr val="E5E2DC"/>
+                      </a:solidFill>
+                      <a:prstDash val="solid"/>
+                      <a:round/>
+                      <a:headEnd type="none" w="med" len="med"/>
+                      <a:tailEnd type="none" w="med" len="med"/>
+                    </a:lnR>
+                    <a:lnT w="6350" cap="flat" cmpd="sng" algn="ctr">
+                      <a:solidFill>
+                        <a:srgbClr val="E5E2DC"/>
+                      </a:solidFill>
+                      <a:prstDash val="solid"/>
+                      <a:round/>
+                      <a:headEnd type="none" w="med" len="med"/>
+                      <a:tailEnd type="none" w="med" len="med"/>
+                    </a:lnT>
+                    <a:lnB w="6350" cap="flat" cmpd="sng" algn="ctr">
+                      <a:solidFill>
+                        <a:srgbClr val="E5E2DC"/>
+                      </a:solidFill>
+                      <a:prstDash val="solid"/>
+                      <a:round/>
+                      <a:headEnd type="none" w="med" len="med"/>
+                      <a:tailEnd type="none" w="med" len="med"/>
+                    </a:lnB>
+                  </a:tcPr>
+                </a:tc>
+                <a:tc>
+                  <a:txBody>
+                    <a:bodyPr/>
+                    <a:lstStyle/>
+                    <a:p>
+                      <a:pPr indent="0" marL="0">
+                        <a:buNone/>
+                      </a:pPr>
+                      <a:r>
+                        <a:rPr lang="en-US" sz="1300" dirty="0">
+                          <a:solidFill>
+                            <a:srgbClr val="3D3A36"/>
+                          </a:solidFill>
+                          <a:latin typeface="Calibri" pitchFamily="34" charset="0"/>
+                          <a:ea typeface="Calibri" pitchFamily="34" charset="-122"/>
+                          <a:cs typeface="Calibri" pitchFamily="34" charset="-120"/>
+                        </a:rPr>
+                        <a:t>V = l × w × h</a:t>
+                      </a:r>
+                      <a:endParaRPr lang="en-US" sz="1300" dirty="0">
+                        <a:latin typeface="Calibri" charset="0"/>
+                        <a:ea typeface="Calibri" charset="0"/>
+                        <a:cs typeface="Calibri" charset="0"/>
+                      </a:endParaRPr>
+                    </a:p>
+                  </a:txBody>
+                  <a:tcPr marL="91440" marR="91440" marT="45720" marB="45720">
+                    <a:lnL w="6350" cap="flat" cmpd="sng" algn="ctr">
+                      <a:solidFill>
+                        <a:srgbClr val="E5E2DC"/>
+                      </a:solidFill>
+                      <a:prstDash val="solid"/>
+                      <a:round/>
+                      <a:headEnd type="none" w="med" len="med"/>
+                      <a:tailEnd type="none" w="med" len="med"/>
+                    </a:lnL>
+                    <a:lnR w="6350" cap="flat" cmpd="sng" algn="ctr">
+                      <a:solidFill>
+                        <a:srgbClr val="E5E2DC"/>
+                      </a:solidFill>
+                      <a:prstDash val="solid"/>
+                      <a:round/>
+                      <a:headEnd type="none" w="med" len="med"/>
+                      <a:tailEnd type="none" w="med" len="med"/>
+                    </a:lnR>
+                    <a:lnT w="6350" cap="flat" cmpd="sng" algn="ctr">
+                      <a:solidFill>
+                        <a:srgbClr val="E5E2DC"/>
+                      </a:solidFill>
+                      <a:prstDash val="solid"/>
+                      <a:round/>
+                      <a:headEnd type="none" w="med" len="med"/>
+                      <a:tailEnd type="none" w="med" len="med"/>
+                    </a:lnT>
+                    <a:lnB w="6350" cap="flat" cmpd="sng" algn="ctr">
+                      <a:solidFill>
+                        <a:srgbClr val="E5E2DC"/>
+                      </a:solidFill>
+                      <a:prstDash val="solid"/>
+                      <a:round/>
+                      <a:headEnd type="none" w="med" len="med"/>
+                      <a:tailEnd type="none" w="med" len="med"/>
+                    </a:lnB>
+                  </a:tcPr>
+                </a:tc>
+                <a:tc>
+                  <a:txBody>
+                    <a:bodyPr/>
+                    <a:lstStyle/>
+                    <a:p>
+                      <a:pPr indent="0" marL="0">
+                        <a:buNone/>
+                      </a:pPr>
+                      <a:r>
+                        <a:rPr lang="en-US" sz="1300" dirty="0">
+                          <a:solidFill>
+                            <a:srgbClr val="3D3A36"/>
+                          </a:solidFill>
+                          <a:latin typeface="Calibri" pitchFamily="34" charset="0"/>
+                          <a:ea typeface="Calibri" pitchFamily="34" charset="-122"/>
+                          <a:cs typeface="Calibri" pitchFamily="34" charset="-120"/>
+                        </a:rPr>
+                        <a:t>3 different measurements</a:t>
+                      </a:r>
+                      <a:endParaRPr lang="en-US" sz="1300" dirty="0">
+                        <a:latin typeface="Calibri" charset="0"/>
+                        <a:ea typeface="Calibri" charset="0"/>
+                        <a:cs typeface="Calibri" charset="0"/>
+                      </a:endParaRPr>
+                    </a:p>
+                  </a:txBody>
+                  <a:tcPr marL="91440" marR="91440" marT="45720" marB="45720">
+                    <a:lnL w="6350" cap="flat" cmpd="sng" algn="ctr">
+                      <a:solidFill>
+                        <a:srgbClr val="E5E2DC"/>
+                      </a:solidFill>
+                      <a:prstDash val="solid"/>
+                      <a:round/>
+                      <a:headEnd type="none" w="med" len="med"/>
+                      <a:tailEnd type="none" w="med" len="med"/>
+                    </a:lnL>
+                    <a:lnR w="6350" cap="flat" cmpd="sng" algn="ctr">
+                      <a:solidFill>
+                        <a:srgbClr val="E5E2DC"/>
+                      </a:solidFill>
+                      <a:prstDash val="solid"/>
+                      <a:round/>
+                      <a:headEnd type="none" w="med" len="med"/>
+                      <a:tailEnd type="none" w="med" len="med"/>
+                    </a:lnR>
+                    <a:lnT w="6350" cap="flat" cmpd="sng" algn="ctr">
+                      <a:solidFill>
+                        <a:srgbClr val="E5E2DC"/>
+                      </a:solidFill>
+                      <a:prstDash val="solid"/>
+                      <a:round/>
+                      <a:headEnd type="none" w="med" len="med"/>
+                      <a:tailEnd type="none" w="med" len="med"/>
+                    </a:lnT>
+                    <a:lnB w="6350" cap="flat" cmpd="sng" algn="ctr">
+                      <a:solidFill>
+                        <a:srgbClr val="E5E2DC"/>
+                      </a:solidFill>
+                      <a:prstDash val="solid"/>
+                      <a:round/>
+                      <a:headEnd type="none" w="med" len="med"/>
+                      <a:tailEnd type="none" w="med" len="med"/>
+                    </a:lnB>
+                  </a:tcPr>
+                </a:tc>
+              </a:tr>
+              <a:tr h="502920">
+                <a:tc>
+                  <a:txBody>
+                    <a:bodyPr/>
+                    <a:lstStyle/>
+                    <a:p>
+                      <a:pPr indent="0" marL="0">
+                        <a:buNone/>
+                      </a:pPr>
+                      <a:r>
+                        <a:rPr lang="en-US" sz="1300" dirty="0">
+                          <a:solidFill>
+                            <a:srgbClr val="3D3A36"/>
+                          </a:solidFill>
+                          <a:latin typeface="Calibri" pitchFamily="34" charset="0"/>
+                          <a:ea typeface="Calibri" pitchFamily="34" charset="-122"/>
+                          <a:cs typeface="Calibri" pitchFamily="34" charset="-120"/>
+                        </a:rPr>
+                        <a:t>Triangular Prism</a:t>
+                      </a:r>
+                      <a:endParaRPr lang="en-US" sz="1300" dirty="0">
+                        <a:latin typeface="Calibri" charset="0"/>
+                        <a:ea typeface="Calibri" charset="0"/>
+                        <a:cs typeface="Calibri" charset="0"/>
+                      </a:endParaRPr>
+                    </a:p>
+                  </a:txBody>
+                  <a:tcPr marL="91440" marR="91440" marT="45720" marB="45720">
+                    <a:lnL w="6350" cap="flat" cmpd="sng" algn="ctr">
+                      <a:solidFill>
+                        <a:srgbClr val="E5E2DC"/>
+                      </a:solidFill>
+                      <a:prstDash val="solid"/>
+                      <a:round/>
+                      <a:headEnd type="none" w="med" len="med"/>
+                      <a:tailEnd type="none" w="med" len="med"/>
+                    </a:lnL>
+                    <a:lnR w="6350" cap="flat" cmpd="sng" algn="ctr">
+                      <a:solidFill>
+                        <a:srgbClr val="E5E2DC"/>
+                      </a:solidFill>
+                      <a:prstDash val="solid"/>
+                      <a:round/>
+                      <a:headEnd type="none" w="med" len="med"/>
+                      <a:tailEnd type="none" w="med" len="med"/>
+                    </a:lnR>
+                    <a:lnT w="6350" cap="flat" cmpd="sng" algn="ctr">
+                      <a:solidFill>
+                        <a:srgbClr val="E5E2DC"/>
+                      </a:solidFill>
+                      <a:prstDash val="solid"/>
+                      <a:round/>
+                      <a:headEnd type="none" w="med" len="med"/>
+                      <a:tailEnd type="none" w="med" len="med"/>
+                    </a:lnT>
+                    <a:lnB w="6350" cap="flat" cmpd="sng" algn="ctr">
+                      <a:solidFill>
+                        <a:srgbClr val="E5E2DC"/>
+                      </a:solidFill>
+                      <a:prstDash val="solid"/>
+                      <a:round/>
+                      <a:headEnd type="none" w="med" len="med"/>
+                      <a:tailEnd type="none" w="med" len="med"/>
+                    </a:lnB>
+                  </a:tcPr>
+                </a:tc>
+                <a:tc>
+                  <a:txBody>
+                    <a:bodyPr/>
+                    <a:lstStyle/>
+                    <a:p>
+                      <a:pPr indent="0" marL="0">
+                        <a:buNone/>
+                      </a:pPr>
+                      <a:r>
+                        <a:rPr lang="en-US" sz="1300" dirty="0">
+                          <a:solidFill>
+                            <a:srgbClr val="3D3A36"/>
+                          </a:solidFill>
+                          <a:latin typeface="Calibri" pitchFamily="34" charset="0"/>
+                          <a:ea typeface="Calibri" pitchFamily="34" charset="-122"/>
+                          <a:cs typeface="Calibri" pitchFamily="34" charset="-120"/>
+                        </a:rPr>
+                        <a:t>V = ½bh × length</a:t>
+                      </a:r>
+                      <a:endParaRPr lang="en-US" sz="1300" dirty="0">
+                        <a:latin typeface="Calibri" charset="0"/>
+                        <a:ea typeface="Calibri" charset="0"/>
+                        <a:cs typeface="Calibri" charset="0"/>
+                      </a:endParaRPr>
+                    </a:p>
+                  </a:txBody>
+                  <a:tcPr marL="91440" marR="91440" marT="45720" marB="45720">
+                    <a:lnL w="6350" cap="flat" cmpd="sng" algn="ctr">
+                      <a:solidFill>
+                        <a:srgbClr val="E5E2DC"/>
+                      </a:solidFill>
+                      <a:prstDash val="solid"/>
+                      <a:round/>
+                      <a:headEnd type="none" w="med" len="med"/>
+                      <a:tailEnd type="none" w="med" len="med"/>
+                    </a:lnL>
+                    <a:lnR w="6350" cap="flat" cmpd="sng" algn="ctr">
+                      <a:solidFill>
+                        <a:srgbClr val="E5E2DC"/>
+                      </a:solidFill>
+                      <a:prstDash val="solid"/>
+                      <a:round/>
+                      <a:headEnd type="none" w="med" len="med"/>
+                      <a:tailEnd type="none" w="med" len="med"/>
+                    </a:lnR>
+                    <a:lnT w="6350" cap="flat" cmpd="sng" algn="ctr">
+                      <a:solidFill>
+                        <a:srgbClr val="E5E2DC"/>
+                      </a:solidFill>
+                      <a:prstDash val="solid"/>
+                      <a:round/>
+                      <a:headEnd type="none" w="med" len="med"/>
+                      <a:tailEnd type="none" w="med" len="med"/>
+                    </a:lnT>
+                    <a:lnB w="6350" cap="flat" cmpd="sng" algn="ctr">
+                      <a:solidFill>
+                        <a:srgbClr val="E5E2DC"/>
+                      </a:solidFill>
+                      <a:prstDash val="solid"/>
+                      <a:round/>
+                      <a:headEnd type="none" w="med" len="med"/>
+                      <a:tailEnd type="none" w="med" len="med"/>
+                    </a:lnB>
+                  </a:tcPr>
+                </a:tc>
+                <a:tc>
+                  <a:txBody>
+                    <a:bodyPr/>
+                    <a:lstStyle/>
+                    <a:p>
+                      <a:pPr indent="0" marL="0">
+                        <a:buNone/>
+                      </a:pPr>
+                      <a:r>
+                        <a:rPr lang="en-US" sz="1300" dirty="0">
+                          <a:solidFill>
+                            <a:srgbClr val="3D3A36"/>
+                          </a:solidFill>
+                          <a:latin typeface="Calibri" pitchFamily="34" charset="0"/>
+                          <a:ea typeface="Calibri" pitchFamily="34" charset="-122"/>
+                          <a:cs typeface="Calibri" pitchFamily="34" charset="-120"/>
+                        </a:rPr>
+                        <a:t>Triangle area × length</a:t>
+                      </a:r>
+                      <a:endParaRPr lang="en-US" sz="1300" dirty="0">
+                        <a:latin typeface="Calibri" charset="0"/>
+                        <a:ea typeface="Calibri" charset="0"/>
+                        <a:cs typeface="Calibri" charset="0"/>
+                      </a:endParaRPr>
+                    </a:p>
+                  </a:txBody>
+                  <a:tcPr marL="91440" marR="91440" marT="45720" marB="45720">
+                    <a:lnL w="6350" cap="flat" cmpd="sng" algn="ctr">
+                      <a:solidFill>
+                        <a:srgbClr val="E5E2DC"/>
+                      </a:solidFill>
+                      <a:prstDash val="solid"/>
+                      <a:round/>
+                      <a:headEnd type="none" w="med" len="med"/>
+                      <a:tailEnd type="none" w="med" len="med"/>
+                    </a:lnL>
+                    <a:lnR w="6350" cap="flat" cmpd="sng" algn="ctr">
+                      <a:solidFill>
+                        <a:srgbClr val="E5E2DC"/>
+                      </a:solidFill>
+                      <a:prstDash val="solid"/>
+                      <a:round/>
+                      <a:headEnd type="none" w="med" len="med"/>
+                      <a:tailEnd type="none" w="med" len="med"/>
+                    </a:lnR>
+                    <a:lnT w="6350" cap="flat" cmpd="sng" algn="ctr">
+                      <a:solidFill>
+                        <a:srgbClr val="E5E2DC"/>
+                      </a:solidFill>
+                      <a:prstDash val="solid"/>
+                      <a:round/>
+                      <a:headEnd type="none" w="med" len="med"/>
+                      <a:tailEnd type="none" w="med" len="med"/>
+                    </a:lnT>
+                    <a:lnB w="6350" cap="flat" cmpd="sng" algn="ctr">
+                      <a:solidFill>
+                        <a:srgbClr val="E5E2DC"/>
+                      </a:solidFill>
+                      <a:prstDash val="solid"/>
+                      <a:round/>
+                      <a:headEnd type="none" w="med" len="med"/>
+                      <a:tailEnd type="none" w="med" len="med"/>
+                    </a:lnB>
+                  </a:tcPr>
+                </a:tc>
+              </a:tr>
+            </a:tbl>
+          </a:graphicData>
+        </a:graphic>
+      </p:graphicFrame>
     </p:spTree>
   </p:cSld>
   <p:clrMapOvr>
@@ -2587,7 +3290,7 @@
     <p:bg>
       <p:bgPr>
         <a:solidFill>
-          <a:srgbClr val="1B2A4A"/>
+          <a:srgbClr val="FAF8F5"/>
         </a:solidFill>
       </p:bgPr>
     </p:bg>
@@ -2614,27 +3317,47 @@
         <p:spPr>
           <a:xfrm>
             <a:off x="0" y="0"/>
-            <a:ext cx="109728" cy="5143500"/>
+            <a:ext cx="9144000" cy="822960"/>
           </a:xfrm>
           <a:prstGeom prst="rect">
             <a:avLst/>
           </a:prstGeom>
           <a:solidFill>
-            <a:srgbClr val="E9C46A"/>
+            <a:srgbClr val="FFFFFF"/>
           </a:solidFill>
           <a:ln/>
         </p:spPr>
       </p:sp>
       <p:sp>
         <p:nvSpPr>
-          <p:cNvPr id="3" name="Text 1"/>
-          <p:cNvSpPr/>
-          <p:nvPr/>
-        </p:nvSpPr>
-        <p:spPr>
-          <a:xfrm>
-            <a:off x="731520" y="457200"/>
-            <a:ext cx="7772400" cy="731520"/>
+          <p:cNvPr id="3" name="Shape 1"/>
+          <p:cNvSpPr/>
+          <p:nvPr/>
+        </p:nvSpPr>
+        <p:spPr>
+          <a:xfrm>
+            <a:off x="0" y="795528"/>
+            <a:ext cx="9144000" cy="27432"/>
+          </a:xfrm>
+          <a:prstGeom prst="rect">
+            <a:avLst/>
+          </a:prstGeom>
+          <a:solidFill>
+            <a:srgbClr val="2A9D8F"/>
+          </a:solidFill>
+          <a:ln/>
+        </p:spPr>
+      </p:sp>
+      <p:sp>
+        <p:nvSpPr>
+          <p:cNvPr id="4" name="Text 2"/>
+          <p:cNvSpPr/>
+          <p:nvPr/>
+        </p:nvSpPr>
+        <p:spPr>
+          <a:xfrm>
+            <a:off x="640080" y="91440"/>
+            <a:ext cx="7863840" cy="640080"/>
           </a:xfrm>
           <a:prstGeom prst="rect">
             <a:avLst/>
@@ -2643,14 +3366,311 @@
           <a:ln/>
         </p:spPr>
         <p:txBody>
-          <a:bodyPr wrap="square" rtlCol="0" anchor="ctr"/>
+          <a:bodyPr wrap="square" lIns="0" tIns="0" rIns="0" bIns="0" rtlCol="0" anchor="ctr"/>
           <a:lstStyle/>
           <a:p>
             <a:pPr indent="0" marL="0">
               <a:buNone/>
             </a:pPr>
             <a:r>
-              <a:rPr lang="en-US" sz="3200" b="1" dirty="0">
+              <a:rPr lang="en-US" sz="2200" b="1" dirty="0">
+                <a:solidFill>
+                  <a:srgbClr val="1B2A4A"/>
+                </a:solidFill>
+                <a:latin typeface="Georgia" pitchFamily="34" charset="0"/>
+                <a:ea typeface="Georgia" pitchFamily="34" charset="-122"/>
+                <a:cs typeface="Georgia" pitchFamily="34" charset="-120"/>
+              </a:rPr>
+              <a:t>NIS Pool — Worked Example</a:t>
+            </a:r>
+            <a:endParaRPr lang="en-US" sz="2200" dirty="0"/>
+          </a:p>
+        </p:txBody>
+      </p:sp>
+      <p:sp>
+        <p:nvSpPr>
+          <p:cNvPr id="5" name="Text 3"/>
+          <p:cNvSpPr/>
+          <p:nvPr/>
+        </p:nvSpPr>
+        <p:spPr>
+          <a:xfrm>
+            <a:off x="640080" y="1005840"/>
+            <a:ext cx="7863840" cy="2926080"/>
+          </a:xfrm>
+          <a:prstGeom prst="rect">
+            <a:avLst/>
+          </a:prstGeom>
+          <a:noFill/>
+          <a:ln/>
+        </p:spPr>
+        <p:txBody>
+          <a:bodyPr wrap="square" rtlCol="0" anchor="ctr"/>
+          <a:lstStyle/>
+          <a:p>
+            <a:pPr marL="342900" indent="-342900">
+              <a:spcAft>
+                <a:spcPts val="800"/>
+              </a:spcAft>
+              <a:buSzPct val="100000"/>
+              <a:buChar char="•"/>
+            </a:pPr>
+            <a:r>
+              <a:rPr lang="en-US" sz="1600" dirty="0">
+                <a:solidFill>
+                  <a:srgbClr val="3D3A36"/>
+                </a:solidFill>
+                <a:latin typeface="Calibri" pitchFamily="34" charset="0"/>
+                <a:ea typeface="Calibri" pitchFamily="34" charset="-122"/>
+                <a:cs typeface="Calibri" pitchFamily="34" charset="-120"/>
+              </a:rPr>
+              <a:t>Formula: V = length × width × height</a:t>
+            </a:r>
+            <a:endParaRPr lang="en-US" sz="1600" dirty="0"/>
+          </a:p>
+          <a:p>
+            <a:pPr marL="342900" indent="-342900">
+              <a:spcAft>
+                <a:spcPts val="800"/>
+              </a:spcAft>
+              <a:buSzPct val="100000"/>
+              <a:buChar char="•"/>
+            </a:pPr>
+            <a:r>
+              <a:rPr lang="en-US" sz="1600" dirty="0">
+                <a:solidFill>
+                  <a:srgbClr val="3D3A36"/>
+                </a:solidFill>
+                <a:latin typeface="Calibri" pitchFamily="34" charset="0"/>
+                <a:ea typeface="Calibri" pitchFamily="34" charset="-122"/>
+                <a:cs typeface="Calibri" pitchFamily="34" charset="-120"/>
+              </a:rPr>
+              <a:t>V = 25 × 16 × 1.6</a:t>
+            </a:r>
+            <a:endParaRPr lang="en-US" sz="1600" dirty="0"/>
+          </a:p>
+          <a:p>
+            <a:pPr marL="342900" indent="-342900">
+              <a:spcAft>
+                <a:spcPts val="800"/>
+              </a:spcAft>
+              <a:buSzPct val="100000"/>
+              <a:buChar char="•"/>
+            </a:pPr>
+            <a:r>
+              <a:rPr lang="en-US" sz="1600" dirty="0">
+                <a:solidFill>
+                  <a:srgbClr val="3D3A36"/>
+                </a:solidFill>
+                <a:latin typeface="Calibri" pitchFamily="34" charset="0"/>
+                <a:ea typeface="Calibri" pitchFamily="34" charset="-122"/>
+                <a:cs typeface="Calibri" pitchFamily="34" charset="-120"/>
+              </a:rPr>
+              <a:t>V = 640 m³</a:t>
+            </a:r>
+            <a:endParaRPr lang="en-US" sz="1600" dirty="0"/>
+          </a:p>
+          <a:p>
+            <a:pPr marL="342900" indent="-342900">
+              <a:spcAft>
+                <a:spcPts val="800"/>
+              </a:spcAft>
+              <a:buSzPct val="100000"/>
+              <a:buChar char="•"/>
+            </a:pPr>
+            <a:r>
+              <a:rPr lang="en-US" sz="1600" dirty="0">
+                <a:solidFill>
+                  <a:srgbClr val="3D3A36"/>
+                </a:solidFill>
+                <a:latin typeface="Calibri" pitchFamily="34" charset="0"/>
+                <a:ea typeface="Calibri" pitchFamily="34" charset="-122"/>
+                <a:cs typeface="Calibri" pitchFamily="34" charset="-120"/>
+              </a:rPr>
+              <a:t>That's 640 cubic metres of water!</a:t>
+            </a:r>
+            <a:endParaRPr lang="en-US" sz="1600" dirty="0"/>
+          </a:p>
+          <a:p>
+            <a:pPr marL="342900" indent="-342900">
+              <a:spcAft>
+                <a:spcPts val="800"/>
+              </a:spcAft>
+              <a:buSzPct val="100000"/>
+              <a:buChar char="•"/>
+            </a:pPr>
+            <a:r>
+              <a:rPr lang="en-US" sz="1600" dirty="0">
+                <a:solidFill>
+                  <a:srgbClr val="3D3A36"/>
+                </a:solidFill>
+                <a:latin typeface="Calibri" pitchFamily="34" charset="0"/>
+                <a:ea typeface="Calibri" pitchFamily="34" charset="-122"/>
+                <a:cs typeface="Calibri" pitchFamily="34" charset="-120"/>
+              </a:rPr>
+              <a:t>Next topic: how many litres is that?</a:t>
+            </a:r>
+            <a:endParaRPr lang="en-US" sz="1600" dirty="0"/>
+          </a:p>
+        </p:txBody>
+      </p:sp>
+      <p:sp>
+        <p:nvSpPr>
+          <p:cNvPr id="6" name="Shape 4"/>
+          <p:cNvSpPr/>
+          <p:nvPr/>
+        </p:nvSpPr>
+        <p:spPr>
+          <a:xfrm>
+            <a:off x="640080" y="4114800"/>
+            <a:ext cx="7863840" cy="731520"/>
+          </a:xfrm>
+          <a:prstGeom prst="rect">
+            <a:avLst/>
+          </a:prstGeom>
+          <a:solidFill>
+            <a:srgbClr val="E8F5F3"/>
+          </a:solidFill>
+          <a:ln/>
+          <a:effectLst>
+            <a:outerShdw sx="100000" sy="100000" kx="0" ky="0" algn="bl" rotWithShape="0" blurRad="76200" dist="25400" dir="8100000">
+              <a:srgbClr val="000000">
+                <a:alpha val="12000"/>
+              </a:srgbClr>
+            </a:outerShdw>
+          </a:effectLst>
+        </p:spPr>
+      </p:sp>
+      <p:sp>
+        <p:nvSpPr>
+          <p:cNvPr id="7" name="Shape 5"/>
+          <p:cNvSpPr/>
+          <p:nvPr/>
+        </p:nvSpPr>
+        <p:spPr>
+          <a:xfrm>
+            <a:off x="640080" y="4114800"/>
+            <a:ext cx="64008" cy="731520"/>
+          </a:xfrm>
+          <a:prstGeom prst="rect">
+            <a:avLst/>
+          </a:prstGeom>
+          <a:solidFill>
+            <a:srgbClr val="2A9D8F"/>
+          </a:solidFill>
+          <a:ln/>
+        </p:spPr>
+      </p:sp>
+      <p:sp>
+        <p:nvSpPr>
+          <p:cNvPr id="8" name="Text 6"/>
+          <p:cNvSpPr/>
+          <p:nvPr/>
+        </p:nvSpPr>
+        <p:spPr>
+          <a:xfrm>
+            <a:off x="914400" y="4160520"/>
+            <a:ext cx="7406640" cy="640080"/>
+          </a:xfrm>
+          <a:prstGeom prst="rect">
+            <a:avLst/>
+          </a:prstGeom>
+          <a:noFill/>
+          <a:ln/>
+        </p:spPr>
+        <p:txBody>
+          <a:bodyPr wrap="square" rtlCol="0" anchor="ctr"/>
+          <a:lstStyle/>
+          <a:p>
+            <a:pPr indent="0" marL="0">
+              <a:buNone/>
+            </a:pPr>
+            <a:r>
+              <a:rPr lang="en-US" sz="1300" i="1" dirty="0">
+                <a:solidFill>
+                  <a:srgbClr val="3D3A36"/>
+                </a:solidFill>
+                <a:latin typeface="Calibri" pitchFamily="34" charset="0"/>
+                <a:ea typeface="Calibri" pitchFamily="34" charset="-122"/>
+                <a:cs typeface="Calibri" pitchFamily="34" charset="-120"/>
+              </a:rPr>
+              <a:t>Formula → Substitution → Answer. Always show your working.</a:t>
+            </a:r>
+            <a:endParaRPr lang="en-US" sz="1300" dirty="0"/>
+          </a:p>
+        </p:txBody>
+      </p:sp>
+    </p:spTree>
+  </p:cSld>
+  <p:clrMapOvr>
+    <a:masterClrMapping/>
+  </p:clrMapOvr>
+</p:sld>
+</file>
+
+<file path=ppt/slides/slide6.xml><?xml version="1.0" encoding="utf-8"?>
+<p:sld xmlns:a="http://schemas.openxmlformats.org/drawingml/2006/main" xmlns:r="http://schemas.openxmlformats.org/officeDocument/2006/relationships" xmlns:p="http://schemas.openxmlformats.org/presentationml/2006/main">
+  <p:cSld name="Slide 6">
+    <p:spTree>
+      <p:nvGrpSpPr>
+        <p:cNvPr id="1" name=""/>
+        <p:cNvGrpSpPr/>
+        <p:nvPr/>
+      </p:nvGrpSpPr>
+      <p:grpSpPr>
+        <a:xfrm>
+          <a:off x="0" y="0"/>
+          <a:ext cx="0" cy="0"/>
+          <a:chOff x="0" y="0"/>
+          <a:chExt cx="0" cy="0"/>
+        </a:xfrm>
+      </p:grpSpPr>
+      <p:sp>
+        <p:nvSpPr>
+          <p:cNvPr id="2" name="Shape 0"/>
+          <p:cNvSpPr/>
+          <p:nvPr/>
+        </p:nvSpPr>
+        <p:spPr>
+          <a:xfrm>
+            <a:off x="0" y="0"/>
+            <a:ext cx="9144000" cy="5143500"/>
+          </a:xfrm>
+          <a:prstGeom prst="rect">
+            <a:avLst/>
+          </a:prstGeom>
+          <a:solidFill>
+            <a:srgbClr val="1B2A4A"/>
+          </a:solidFill>
+          <a:ln/>
+        </p:spPr>
+      </p:sp>
+      <p:sp>
+        <p:nvSpPr>
+          <p:cNvPr id="3" name="Text 1"/>
+          <p:cNvSpPr/>
+          <p:nvPr/>
+        </p:nvSpPr>
+        <p:spPr>
+          <a:xfrm>
+            <a:off x="640080" y="365760"/>
+            <a:ext cx="7863840" cy="640080"/>
+          </a:xfrm>
+          <a:prstGeom prst="rect">
+            <a:avLst/>
+          </a:prstGeom>
+          <a:noFill/>
+          <a:ln/>
+        </p:spPr>
+        <p:txBody>
+          <a:bodyPr wrap="square" rtlCol="0" anchor="ctr"/>
+          <a:lstStyle/>
+          <a:p>
+            <a:pPr indent="0" marL="0">
+              <a:buNone/>
+            </a:pPr>
+            <a:r>
+              <a:rPr lang="en-US" sz="2200" b="1" dirty="0">
                 <a:solidFill>
                   <a:srgbClr val="FFFFFF"/>
                 </a:solidFill>
@@ -2658,22 +3678,49 @@
                 <a:ea typeface="Georgia" pitchFamily="34" charset="-122"/>
                 <a:cs typeface="Georgia" pitchFamily="34" charset="-120"/>
               </a:rPr>
-              <a:t>Key Takeaways</a:t>
-            </a:r>
-            <a:endParaRPr lang="en-US" sz="3200" dirty="0"/>
-          </a:p>
-        </p:txBody>
-      </p:sp>
-      <p:sp>
-        <p:nvSpPr>
-          <p:cNvPr id="4" name="Text 2"/>
-          <p:cNvSpPr/>
-          <p:nvPr/>
-        </p:nvSpPr>
-        <p:spPr>
-          <a:xfrm>
-            <a:off x="731520" y="1463040"/>
-            <a:ext cx="7772400" cy="3200400"/>
+              <a:t>NIS Pool Dimensions</a:t>
+            </a:r>
+            <a:endParaRPr lang="en-US" sz="2200" dirty="0"/>
+          </a:p>
+        </p:txBody>
+      </p:sp>
+      <p:sp>
+        <p:nvSpPr>
+          <p:cNvPr id="4" name="Shape 2"/>
+          <p:cNvSpPr/>
+          <p:nvPr/>
+        </p:nvSpPr>
+        <p:spPr>
+          <a:xfrm>
+            <a:off x="640080" y="1280160"/>
+            <a:ext cx="2438400" cy="2926080"/>
+          </a:xfrm>
+          <a:prstGeom prst="rect">
+            <a:avLst/>
+          </a:prstGeom>
+          <a:solidFill>
+            <a:srgbClr val="243660"/>
+          </a:solidFill>
+          <a:ln/>
+          <a:effectLst>
+            <a:outerShdw sx="100000" sy="100000" kx="0" ky="0" algn="bl" rotWithShape="0" blurRad="76200" dist="25400" dir="8100000">
+              <a:srgbClr val="000000">
+                <a:alpha val="12000"/>
+              </a:srgbClr>
+            </a:outerShdw>
+          </a:effectLst>
+        </p:spPr>
+      </p:sp>
+      <p:sp>
+        <p:nvSpPr>
+          <p:cNvPr id="5" name="Text 3"/>
+          <p:cNvSpPr/>
+          <p:nvPr/>
+        </p:nvSpPr>
+        <p:spPr>
+          <a:xfrm>
+            <a:off x="640080" y="1463040"/>
+            <a:ext cx="2438400" cy="1280160"/>
           </a:xfrm>
           <a:prstGeom prst="rect">
             <a:avLst/>
@@ -2682,125 +3729,522 @@
           <a:ln/>
         </p:spPr>
         <p:txBody>
-          <a:bodyPr wrap="square" rtlCol="0" anchor="t"/>
-          <a:lstStyle/>
-          <a:p>
-            <a:pPr marL="342900" indent="-342900">
-              <a:spcAft>
-                <a:spcPts val="1000"/>
-              </a:spcAft>
-              <a:buSzPct val="100000"/>
-              <a:buChar char="•"/>
+          <a:bodyPr wrap="square" rtlCol="0" anchor="ctr"/>
+          <a:lstStyle/>
+          <a:p>
+            <a:pPr algn="ctr" indent="0" marL="0">
+              <a:buNone/>
             </a:pPr>
             <a:r>
-              <a:rPr lang="en-US" sz="1500" dirty="0">
+              <a:rPr lang="en-US" sz="4800" b="1" dirty="0">
                 <a:solidFill>
-                  <a:srgbClr val="CADCFC"/>
+                  <a:srgbClr val="2A9D8F"/>
+                </a:solidFill>
+                <a:latin typeface="Georgia" pitchFamily="34" charset="0"/>
+                <a:ea typeface="Georgia" pitchFamily="34" charset="-122"/>
+                <a:cs typeface="Georgia" pitchFamily="34" charset="-120"/>
+              </a:rPr>
+              <a:t>25 m</a:t>
+            </a:r>
+            <a:endParaRPr lang="en-US" sz="4800" dirty="0"/>
+          </a:p>
+        </p:txBody>
+      </p:sp>
+      <p:sp>
+        <p:nvSpPr>
+          <p:cNvPr id="6" name="Text 4"/>
+          <p:cNvSpPr/>
+          <p:nvPr/>
+        </p:nvSpPr>
+        <p:spPr>
+          <a:xfrm>
+            <a:off x="640080" y="2743200"/>
+            <a:ext cx="2438400" cy="548640"/>
+          </a:xfrm>
+          <a:prstGeom prst="rect">
+            <a:avLst/>
+          </a:prstGeom>
+          <a:noFill/>
+          <a:ln/>
+        </p:spPr>
+        <p:txBody>
+          <a:bodyPr wrap="square" rtlCol="0" anchor="ctr"/>
+          <a:lstStyle/>
+          <a:p>
+            <a:pPr algn="ctr" indent="0" marL="0">
+              <a:buNone/>
+            </a:pPr>
+            <a:r>
+              <a:rPr lang="en-US" sz="1400" b="1" dirty="0">
+                <a:solidFill>
+                  <a:srgbClr val="9B9690"/>
                 </a:solidFill>
                 <a:latin typeface="Calibri" pitchFamily="34" charset="0"/>
                 <a:ea typeface="Calibri" pitchFamily="34" charset="-122"/>
                 <a:cs typeface="Calibri" pitchFamily="34" charset="-120"/>
               </a:rPr>
-              <a:t>Volume = 3D space inside a shape, measured in cubic units</a:t>
-            </a:r>
-            <a:endParaRPr lang="en-US" sz="1500" dirty="0"/>
-          </a:p>
-          <a:p>
-            <a:pPr marL="342900" indent="-342900">
-              <a:spcAft>
-                <a:spcPts val="1000"/>
-              </a:spcAft>
-              <a:buSzPct val="100000"/>
-              <a:buChar char="•"/>
+              <a:t>Length</a:t>
+            </a:r>
+            <a:endParaRPr lang="en-US" sz="1400" dirty="0"/>
+          </a:p>
+        </p:txBody>
+      </p:sp>
+      <p:sp>
+        <p:nvSpPr>
+          <p:cNvPr id="7" name="Shape 5"/>
+          <p:cNvSpPr/>
+          <p:nvPr/>
+        </p:nvSpPr>
+        <p:spPr>
+          <a:xfrm>
+            <a:off x="3352800" y="1280160"/>
+            <a:ext cx="2438400" cy="2926080"/>
+          </a:xfrm>
+          <a:prstGeom prst="rect">
+            <a:avLst/>
+          </a:prstGeom>
+          <a:solidFill>
+            <a:srgbClr val="243660"/>
+          </a:solidFill>
+          <a:ln/>
+          <a:effectLst>
+            <a:outerShdw sx="100000" sy="100000" kx="0" ky="0" algn="bl" rotWithShape="0" blurRad="76200" dist="25400" dir="8100000">
+              <a:srgbClr val="000000">
+                <a:alpha val="12000"/>
+              </a:srgbClr>
+            </a:outerShdw>
+          </a:effectLst>
+        </p:spPr>
+      </p:sp>
+      <p:sp>
+        <p:nvSpPr>
+          <p:cNvPr id="8" name="Text 6"/>
+          <p:cNvSpPr/>
+          <p:nvPr/>
+        </p:nvSpPr>
+        <p:spPr>
+          <a:xfrm>
+            <a:off x="3352800" y="1463040"/>
+            <a:ext cx="2438400" cy="1280160"/>
+          </a:xfrm>
+          <a:prstGeom prst="rect">
+            <a:avLst/>
+          </a:prstGeom>
+          <a:noFill/>
+          <a:ln/>
+        </p:spPr>
+        <p:txBody>
+          <a:bodyPr wrap="square" rtlCol="0" anchor="ctr"/>
+          <a:lstStyle/>
+          <a:p>
+            <a:pPr algn="ctr" indent="0" marL="0">
+              <a:buNone/>
             </a:pPr>
             <a:r>
-              <a:rPr lang="en-US" sz="1500" dirty="0">
+              <a:rPr lang="en-US" sz="4800" b="1" dirty="0">
                 <a:solidFill>
-                  <a:srgbClr val="CADCFC"/>
+                  <a:srgbClr val="2A9D8F"/>
+                </a:solidFill>
+                <a:latin typeface="Georgia" pitchFamily="34" charset="0"/>
+                <a:ea typeface="Georgia" pitchFamily="34" charset="-122"/>
+                <a:cs typeface="Georgia" pitchFamily="34" charset="-120"/>
+              </a:rPr>
+              <a:t>16 m</a:t>
+            </a:r>
+            <a:endParaRPr lang="en-US" sz="4800" dirty="0"/>
+          </a:p>
+        </p:txBody>
+      </p:sp>
+      <p:sp>
+        <p:nvSpPr>
+          <p:cNvPr id="9" name="Text 7"/>
+          <p:cNvSpPr/>
+          <p:nvPr/>
+        </p:nvSpPr>
+        <p:spPr>
+          <a:xfrm>
+            <a:off x="3352800" y="2743200"/>
+            <a:ext cx="2438400" cy="548640"/>
+          </a:xfrm>
+          <a:prstGeom prst="rect">
+            <a:avLst/>
+          </a:prstGeom>
+          <a:noFill/>
+          <a:ln/>
+        </p:spPr>
+        <p:txBody>
+          <a:bodyPr wrap="square" rtlCol="0" anchor="ctr"/>
+          <a:lstStyle/>
+          <a:p>
+            <a:pPr algn="ctr" indent="0" marL="0">
+              <a:buNone/>
+            </a:pPr>
+            <a:r>
+              <a:rPr lang="en-US" sz="1400" b="1" dirty="0">
+                <a:solidFill>
+                  <a:srgbClr val="9B9690"/>
                 </a:solidFill>
                 <a:latin typeface="Calibri" pitchFamily="34" charset="0"/>
                 <a:ea typeface="Calibri" pitchFamily="34" charset="-122"/>
                 <a:cs typeface="Calibri" pitchFamily="34" charset="-120"/>
               </a:rPr>
-              <a:t>Cuboid: V = l × w × h. Cube: V = s³</a:t>
-            </a:r>
-            <a:endParaRPr lang="en-US" sz="1500" dirty="0"/>
-          </a:p>
-          <a:p>
-            <a:pPr marL="342900" indent="-342900">
-              <a:spcAft>
-                <a:spcPts val="1000"/>
-              </a:spcAft>
-              <a:buSzPct val="100000"/>
-              <a:buChar char="•"/>
+              <a:t>Width</a:t>
+            </a:r>
+            <a:endParaRPr lang="en-US" sz="1400" dirty="0"/>
+          </a:p>
+        </p:txBody>
+      </p:sp>
+      <p:sp>
+        <p:nvSpPr>
+          <p:cNvPr id="10" name="Shape 8"/>
+          <p:cNvSpPr/>
+          <p:nvPr/>
+        </p:nvSpPr>
+        <p:spPr>
+          <a:xfrm>
+            <a:off x="6065520" y="1280160"/>
+            <a:ext cx="2438400" cy="2926080"/>
+          </a:xfrm>
+          <a:prstGeom prst="rect">
+            <a:avLst/>
+          </a:prstGeom>
+          <a:solidFill>
+            <a:srgbClr val="243660"/>
+          </a:solidFill>
+          <a:ln/>
+          <a:effectLst>
+            <a:outerShdw sx="100000" sy="100000" kx="0" ky="0" algn="bl" rotWithShape="0" blurRad="76200" dist="25400" dir="8100000">
+              <a:srgbClr val="000000">
+                <a:alpha val="12000"/>
+              </a:srgbClr>
+            </a:outerShdw>
+          </a:effectLst>
+        </p:spPr>
+      </p:sp>
+      <p:sp>
+        <p:nvSpPr>
+          <p:cNvPr id="11" name="Text 9"/>
+          <p:cNvSpPr/>
+          <p:nvPr/>
+        </p:nvSpPr>
+        <p:spPr>
+          <a:xfrm>
+            <a:off x="6065520" y="1463040"/>
+            <a:ext cx="2438400" cy="1280160"/>
+          </a:xfrm>
+          <a:prstGeom prst="rect">
+            <a:avLst/>
+          </a:prstGeom>
+          <a:noFill/>
+          <a:ln/>
+        </p:spPr>
+        <p:txBody>
+          <a:bodyPr wrap="square" rtlCol="0" anchor="ctr"/>
+          <a:lstStyle/>
+          <a:p>
+            <a:pPr algn="ctr" indent="0" marL="0">
+              <a:buNone/>
             </a:pPr>
             <a:r>
-              <a:rPr lang="en-US" sz="1500" dirty="0">
+              <a:rPr lang="en-US" sz="4800" b="1" dirty="0">
                 <a:solidFill>
-                  <a:srgbClr val="CADCFC"/>
+                  <a:srgbClr val="2A9D8F"/>
+                </a:solidFill>
+                <a:latin typeface="Georgia" pitchFamily="34" charset="0"/>
+                <a:ea typeface="Georgia" pitchFamily="34" charset="-122"/>
+                <a:cs typeface="Georgia" pitchFamily="34" charset="-120"/>
+              </a:rPr>
+              <a:t>1.6 m</a:t>
+            </a:r>
+            <a:endParaRPr lang="en-US" sz="4800" dirty="0"/>
+          </a:p>
+        </p:txBody>
+      </p:sp>
+      <p:sp>
+        <p:nvSpPr>
+          <p:cNvPr id="12" name="Text 10"/>
+          <p:cNvSpPr/>
+          <p:nvPr/>
+        </p:nvSpPr>
+        <p:spPr>
+          <a:xfrm>
+            <a:off x="6065520" y="2743200"/>
+            <a:ext cx="2438400" cy="548640"/>
+          </a:xfrm>
+          <a:prstGeom prst="rect">
+            <a:avLst/>
+          </a:prstGeom>
+          <a:noFill/>
+          <a:ln/>
+        </p:spPr>
+        <p:txBody>
+          <a:bodyPr wrap="square" rtlCol="0" anchor="ctr"/>
+          <a:lstStyle/>
+          <a:p>
+            <a:pPr algn="ctr" indent="0" marL="0">
+              <a:buNone/>
+            </a:pPr>
+            <a:r>
+              <a:rPr lang="en-US" sz="1400" b="1" dirty="0">
+                <a:solidFill>
+                  <a:srgbClr val="9B9690"/>
                 </a:solidFill>
                 <a:latin typeface="Calibri" pitchFamily="34" charset="0"/>
                 <a:ea typeface="Calibri" pitchFamily="34" charset="-122"/>
                 <a:cs typeface="Calibri" pitchFamily="34" charset="-120"/>
               </a:rPr>
-              <a:t>Any prism: V = area of cross-section × length</a:t>
-            </a:r>
-            <a:endParaRPr lang="en-US" sz="1500" dirty="0"/>
-          </a:p>
-          <a:p>
-            <a:pPr marL="342900" indent="-342900">
-              <a:spcAft>
-                <a:spcPts val="1000"/>
-              </a:spcAft>
-              <a:buSzPct val="100000"/>
-              <a:buChar char="•"/>
+              <a:t>Average Depth</a:t>
+            </a:r>
+            <a:endParaRPr lang="en-US" sz="1400" dirty="0"/>
+          </a:p>
+        </p:txBody>
+      </p:sp>
+    </p:spTree>
+  </p:cSld>
+  <p:clrMapOvr>
+    <a:masterClrMapping/>
+  </p:clrMapOvr>
+</p:sld>
+</file>
+
+<file path=ppt/slides/slide7.xml><?xml version="1.0" encoding="utf-8"?>
+<p:sld xmlns:a="http://schemas.openxmlformats.org/drawingml/2006/main" xmlns:r="http://schemas.openxmlformats.org/officeDocument/2006/relationships" xmlns:p="http://schemas.openxmlformats.org/presentationml/2006/main">
+  <p:cSld name="Slide 7">
+    <p:bg>
+      <p:bgPr>
+        <a:solidFill>
+          <a:srgbClr val="FAF8F5"/>
+        </a:solidFill>
+      </p:bgPr>
+    </p:bg>
+    <p:spTree>
+      <p:nvGrpSpPr>
+        <p:cNvPr id="1" name=""/>
+        <p:cNvGrpSpPr/>
+        <p:nvPr/>
+      </p:nvGrpSpPr>
+      <p:grpSpPr>
+        <a:xfrm>
+          <a:off x="0" y="0"/>
+          <a:ext cx="0" cy="0"/>
+          <a:chOff x="0" y="0"/>
+          <a:chExt cx="0" cy="0"/>
+        </a:xfrm>
+      </p:grpSpPr>
+      <p:sp>
+        <p:nvSpPr>
+          <p:cNvPr id="2" name="Shape 0"/>
+          <p:cNvSpPr/>
+          <p:nvPr/>
+        </p:nvSpPr>
+        <p:spPr>
+          <a:xfrm>
+            <a:off x="0" y="0"/>
+            <a:ext cx="9144000" cy="822960"/>
+          </a:xfrm>
+          <a:prstGeom prst="rect">
+            <a:avLst/>
+          </a:prstGeom>
+          <a:solidFill>
+            <a:srgbClr val="FFFFFF"/>
+          </a:solidFill>
+          <a:ln/>
+        </p:spPr>
+      </p:sp>
+      <p:sp>
+        <p:nvSpPr>
+          <p:cNvPr id="3" name="Shape 1"/>
+          <p:cNvSpPr/>
+          <p:nvPr/>
+        </p:nvSpPr>
+        <p:spPr>
+          <a:xfrm>
+            <a:off x="0" y="795528"/>
+            <a:ext cx="9144000" cy="27432"/>
+          </a:xfrm>
+          <a:prstGeom prst="rect">
+            <a:avLst/>
+          </a:prstGeom>
+          <a:solidFill>
+            <a:srgbClr val="2A9D8F"/>
+          </a:solidFill>
+          <a:ln/>
+        </p:spPr>
+      </p:sp>
+      <p:sp>
+        <p:nvSpPr>
+          <p:cNvPr id="4" name="Text 2"/>
+          <p:cNvSpPr/>
+          <p:nvPr/>
+        </p:nvSpPr>
+        <p:spPr>
+          <a:xfrm>
+            <a:off x="640080" y="91440"/>
+            <a:ext cx="7863840" cy="640080"/>
+          </a:xfrm>
+          <a:prstGeom prst="rect">
+            <a:avLst/>
+          </a:prstGeom>
+          <a:noFill/>
+          <a:ln/>
+        </p:spPr>
+        <p:txBody>
+          <a:bodyPr wrap="square" lIns="0" tIns="0" rIns="0" bIns="0" rtlCol="0" anchor="ctr"/>
+          <a:lstStyle/>
+          <a:p>
+            <a:pPr indent="0" marL="0">
+              <a:buNone/>
             </a:pPr>
             <a:r>
-              <a:rPr lang="en-US" sz="1500" dirty="0">
+              <a:rPr lang="en-US" sz="2200" b="1" dirty="0">
                 <a:solidFill>
-                  <a:srgbClr val="CADCFC"/>
+                  <a:srgbClr val="1B2A4A"/>
+                </a:solidFill>
+                <a:latin typeface="Georgia" pitchFamily="34" charset="0"/>
+                <a:ea typeface="Georgia" pitchFamily="34" charset="-122"/>
+                <a:cs typeface="Georgia" pitchFamily="34" charset="-120"/>
+              </a:rPr>
+              <a:t>Recommended Videos</a:t>
+            </a:r>
+            <a:endParaRPr lang="en-US" sz="2200" dirty="0"/>
+          </a:p>
+        </p:txBody>
+      </p:sp>
+      <p:sp>
+        <p:nvSpPr>
+          <p:cNvPr id="5" name="Text 3"/>
+          <p:cNvSpPr/>
+          <p:nvPr/>
+        </p:nvSpPr>
+        <p:spPr>
+          <a:xfrm>
+            <a:off x="640080" y="868680"/>
+            <a:ext cx="7863840" cy="274320"/>
+          </a:xfrm>
+          <a:prstGeom prst="rect">
+            <a:avLst/>
+          </a:prstGeom>
+          <a:noFill/>
+          <a:ln/>
+        </p:spPr>
+        <p:txBody>
+          <a:bodyPr wrap="square" rtlCol="0" anchor="ctr"/>
+          <a:lstStyle/>
+          <a:p>
+            <a:pPr indent="0" marL="0">
+              <a:buNone/>
+            </a:pPr>
+            <a:r>
+              <a:rPr lang="en-US" sz="1200" i="1" dirty="0">
+                <a:solidFill>
+                  <a:srgbClr val="6B6660"/>
                 </a:solidFill>
                 <a:latin typeface="Calibri" pitchFamily="34" charset="0"/>
                 <a:ea typeface="Calibri" pitchFamily="34" charset="-122"/>
                 <a:cs typeface="Calibri" pitchFamily="34" charset="-120"/>
               </a:rPr>
-              <a:t>1 cm³ = 1 mL. 1000 cm³ = 1 L</a:t>
-            </a:r>
-            <a:endParaRPr lang="en-US" sz="1500" dirty="0"/>
-          </a:p>
-          <a:p>
-            <a:pPr marL="342900" indent="-342900">
-              <a:spcAft>
-                <a:spcPts val="1000"/>
-              </a:spcAft>
-              <a:buSzPct val="100000"/>
-              <a:buChar char="•"/>
+              <a:t>Search these on YouTube to learn more.</a:t>
+            </a:r>
+            <a:endParaRPr lang="en-US" sz="1200" dirty="0"/>
+          </a:p>
+        </p:txBody>
+      </p:sp>
+      <p:sp>
+        <p:nvSpPr>
+          <p:cNvPr id="6" name="Shape 4"/>
+          <p:cNvSpPr/>
+          <p:nvPr/>
+        </p:nvSpPr>
+        <p:spPr>
+          <a:xfrm>
+            <a:off x="457200" y="1234440"/>
+            <a:ext cx="8229600" cy="1051560"/>
+          </a:xfrm>
+          <a:prstGeom prst="rect">
+            <a:avLst/>
+          </a:prstGeom>
+          <a:solidFill>
+            <a:srgbClr val="FFFFFF"/>
+          </a:solidFill>
+          <a:ln/>
+          <a:effectLst>
+            <a:outerShdw sx="100000" sy="100000" kx="0" ky="0" algn="bl" rotWithShape="0" blurRad="76200" dist="25400" dir="8100000">
+              <a:srgbClr val="000000">
+                <a:alpha val="12000"/>
+              </a:srgbClr>
+            </a:outerShdw>
+          </a:effectLst>
+        </p:spPr>
+      </p:sp>
+      <p:sp>
+        <p:nvSpPr>
+          <p:cNvPr id="7" name="Shape 5"/>
+          <p:cNvSpPr/>
+          <p:nvPr/>
+        </p:nvSpPr>
+        <p:spPr>
+          <a:xfrm>
+            <a:off x="457200" y="1234440"/>
+            <a:ext cx="64008" cy="1051560"/>
+          </a:xfrm>
+          <a:prstGeom prst="rect">
+            <a:avLst/>
+          </a:prstGeom>
+          <a:solidFill>
+            <a:srgbClr val="2A9D8F"/>
+          </a:solidFill>
+          <a:ln/>
+        </p:spPr>
+      </p:sp>
+      <p:sp>
+        <p:nvSpPr>
+          <p:cNvPr id="8" name="Text 6"/>
+          <p:cNvSpPr/>
+          <p:nvPr/>
+        </p:nvSpPr>
+        <p:spPr>
+          <a:xfrm>
+            <a:off x="640080" y="1325880"/>
+            <a:ext cx="457200" cy="457200"/>
+          </a:xfrm>
+          <a:prstGeom prst="rect">
+            <a:avLst/>
+          </a:prstGeom>
+          <a:noFill/>
+          <a:ln/>
+        </p:spPr>
+        <p:txBody>
+          <a:bodyPr wrap="square" rtlCol="0" anchor="ctr"/>
+          <a:lstStyle/>
+          <a:p>
+            <a:pPr algn="ctr" indent="0" marL="0">
+              <a:buNone/>
             </a:pPr>
             <a:r>
-              <a:rPr lang="en-US" sz="1500" dirty="0">
+              <a:rPr lang="en-US" sz="2000" dirty="0">
                 <a:solidFill>
-                  <a:srgbClr val="CADCFC"/>
+                  <a:srgbClr val="2A9D8F"/>
                 </a:solidFill>
                 <a:latin typeface="Calibri" pitchFamily="34" charset="0"/>
                 <a:ea typeface="Calibri" pitchFamily="34" charset="-122"/>
                 <a:cs typeface="Calibri" pitchFamily="34" charset="-120"/>
               </a:rPr>
-              <a:t>Work backwards to find missing dimensions</a:t>
-            </a:r>
-            <a:endParaRPr lang="en-US" sz="1500" dirty="0"/>
-          </a:p>
-        </p:txBody>
-      </p:sp>
-      <p:sp>
-        <p:nvSpPr>
-          <p:cNvPr id="5" name="Text 3"/>
-          <p:cNvSpPr/>
-          <p:nvPr/>
-        </p:nvSpPr>
-        <p:spPr>
-          <a:xfrm>
-            <a:off x="731520" y="4572000"/>
-            <a:ext cx="7772400" cy="365760"/>
+              <a:t>▶</a:t>
+            </a:r>
+            <a:endParaRPr lang="en-US" sz="2000" dirty="0"/>
+          </a:p>
+        </p:txBody>
+      </p:sp>
+      <p:sp>
+        <p:nvSpPr>
+          <p:cNvPr id="9" name="Text 7"/>
+          <p:cNvSpPr/>
+          <p:nvPr/>
+        </p:nvSpPr>
+        <p:spPr>
+          <a:xfrm>
+            <a:off x="1188720" y="1307592"/>
+            <a:ext cx="7132320" cy="411480"/>
           </a:xfrm>
           <a:prstGeom prst="rect">
             <a:avLst/>
@@ -2816,9 +4260,519 @@
               <a:buNone/>
             </a:pPr>
             <a:r>
+              <a:rPr lang="en-US" sz="1400" b="1" dirty="0">
+                <a:solidFill>
+                  <a:srgbClr val="1B2A4A"/>
+                </a:solidFill>
+                <a:latin typeface="Calibri" pitchFamily="34" charset="0"/>
+                <a:ea typeface="Calibri" pitchFamily="34" charset="-122"/>
+                <a:cs typeface="Calibri" pitchFamily="34" charset="-120"/>
+              </a:rPr>
+              <a:t>Volume — What Is It?</a:t>
+            </a:r>
+            <a:endParaRPr lang="en-US" sz="1400" dirty="0"/>
+          </a:p>
+        </p:txBody>
+      </p:sp>
+      <p:sp>
+        <p:nvSpPr>
+          <p:cNvPr id="10" name="Text 8"/>
+          <p:cNvSpPr/>
+          <p:nvPr/>
+        </p:nvSpPr>
+        <p:spPr>
+          <a:xfrm>
+            <a:off x="1188720" y="1691640"/>
+            <a:ext cx="7132320" cy="320040"/>
+          </a:xfrm>
+          <a:prstGeom prst="rect">
+            <a:avLst/>
+          </a:prstGeom>
+          <a:noFill/>
+          <a:ln/>
+        </p:spPr>
+        <p:txBody>
+          <a:bodyPr wrap="square" rtlCol="0" anchor="ctr"/>
+          <a:lstStyle/>
+          <a:p>
+            <a:pPr indent="0" marL="0">
+              <a:buNone/>
+            </a:pPr>
+            <a:r>
               <a:rPr lang="en-US" sz="1100" dirty="0">
                 <a:solidFill>
-                  <a:srgbClr val="E9C46A"/>
+                  <a:srgbClr val="6B6660"/>
+                </a:solidFill>
+                <a:latin typeface="Calibri" pitchFamily="34" charset="0"/>
+                <a:ea typeface="Calibri" pitchFamily="34" charset="-122"/>
+                <a:cs typeface="Calibri" pitchFamily="34" charset="-120"/>
+              </a:rPr>
+              <a:t>Math Antics  •  8 min</a:t>
+            </a:r>
+            <a:endParaRPr lang="en-US" sz="1100" dirty="0"/>
+          </a:p>
+        </p:txBody>
+      </p:sp>
+      <p:sp>
+        <p:nvSpPr>
+          <p:cNvPr id="11" name="Shape 9"/>
+          <p:cNvSpPr/>
+          <p:nvPr/>
+        </p:nvSpPr>
+        <p:spPr>
+          <a:xfrm>
+            <a:off x="457200" y="2423160"/>
+            <a:ext cx="8229600" cy="1051560"/>
+          </a:xfrm>
+          <a:prstGeom prst="rect">
+            <a:avLst/>
+          </a:prstGeom>
+          <a:solidFill>
+            <a:srgbClr val="FFFFFF"/>
+          </a:solidFill>
+          <a:ln/>
+          <a:effectLst>
+            <a:outerShdw sx="100000" sy="100000" kx="0" ky="0" algn="bl" rotWithShape="0" blurRad="76200" dist="25400" dir="8100000">
+              <a:srgbClr val="000000">
+                <a:alpha val="12000"/>
+              </a:srgbClr>
+            </a:outerShdw>
+          </a:effectLst>
+        </p:spPr>
+      </p:sp>
+      <p:sp>
+        <p:nvSpPr>
+          <p:cNvPr id="12" name="Shape 10"/>
+          <p:cNvSpPr/>
+          <p:nvPr/>
+        </p:nvSpPr>
+        <p:spPr>
+          <a:xfrm>
+            <a:off x="457200" y="2423160"/>
+            <a:ext cx="64008" cy="1051560"/>
+          </a:xfrm>
+          <a:prstGeom prst="rect">
+            <a:avLst/>
+          </a:prstGeom>
+          <a:solidFill>
+            <a:srgbClr val="2A9D8F"/>
+          </a:solidFill>
+          <a:ln/>
+        </p:spPr>
+      </p:sp>
+      <p:sp>
+        <p:nvSpPr>
+          <p:cNvPr id="13" name="Text 11"/>
+          <p:cNvSpPr/>
+          <p:nvPr/>
+        </p:nvSpPr>
+        <p:spPr>
+          <a:xfrm>
+            <a:off x="640080" y="2514600"/>
+            <a:ext cx="457200" cy="457200"/>
+          </a:xfrm>
+          <a:prstGeom prst="rect">
+            <a:avLst/>
+          </a:prstGeom>
+          <a:noFill/>
+          <a:ln/>
+        </p:spPr>
+        <p:txBody>
+          <a:bodyPr wrap="square" rtlCol="0" anchor="ctr"/>
+          <a:lstStyle/>
+          <a:p>
+            <a:pPr algn="ctr" indent="0" marL="0">
+              <a:buNone/>
+            </a:pPr>
+            <a:r>
+              <a:rPr lang="en-US" sz="2000" dirty="0">
+                <a:solidFill>
+                  <a:srgbClr val="2A9D8F"/>
+                </a:solidFill>
+                <a:latin typeface="Calibri" pitchFamily="34" charset="0"/>
+                <a:ea typeface="Calibri" pitchFamily="34" charset="-122"/>
+                <a:cs typeface="Calibri" pitchFamily="34" charset="-120"/>
+              </a:rPr>
+              <a:t>▶</a:t>
+            </a:r>
+            <a:endParaRPr lang="en-US" sz="2000" dirty="0"/>
+          </a:p>
+        </p:txBody>
+      </p:sp>
+      <p:sp>
+        <p:nvSpPr>
+          <p:cNvPr id="14" name="Text 12"/>
+          <p:cNvSpPr/>
+          <p:nvPr/>
+        </p:nvSpPr>
+        <p:spPr>
+          <a:xfrm>
+            <a:off x="1188720" y="2496312"/>
+            <a:ext cx="7132320" cy="411480"/>
+          </a:xfrm>
+          <a:prstGeom prst="rect">
+            <a:avLst/>
+          </a:prstGeom>
+          <a:noFill/>
+          <a:ln/>
+        </p:spPr>
+        <p:txBody>
+          <a:bodyPr wrap="square" rtlCol="0" anchor="ctr"/>
+          <a:lstStyle/>
+          <a:p>
+            <a:pPr indent="0" marL="0">
+              <a:buNone/>
+            </a:pPr>
+            <a:r>
+              <a:rPr lang="en-US" sz="1400" b="1" dirty="0">
+                <a:solidFill>
+                  <a:srgbClr val="1B2A4A"/>
+                </a:solidFill>
+                <a:latin typeface="Calibri" pitchFamily="34" charset="0"/>
+                <a:ea typeface="Calibri" pitchFamily="34" charset="-122"/>
+                <a:cs typeface="Calibri" pitchFamily="34" charset="-120"/>
+              </a:rPr>
+              <a:t>Volume of Cubes and Cuboids</a:t>
+            </a:r>
+            <a:endParaRPr lang="en-US" sz="1400" dirty="0"/>
+          </a:p>
+        </p:txBody>
+      </p:sp>
+      <p:sp>
+        <p:nvSpPr>
+          <p:cNvPr id="15" name="Text 13"/>
+          <p:cNvSpPr/>
+          <p:nvPr/>
+        </p:nvSpPr>
+        <p:spPr>
+          <a:xfrm>
+            <a:off x="1188720" y="2880360"/>
+            <a:ext cx="7132320" cy="320040"/>
+          </a:xfrm>
+          <a:prstGeom prst="rect">
+            <a:avLst/>
+          </a:prstGeom>
+          <a:noFill/>
+          <a:ln/>
+        </p:spPr>
+        <p:txBody>
+          <a:bodyPr wrap="square" rtlCol="0" anchor="ctr"/>
+          <a:lstStyle/>
+          <a:p>
+            <a:pPr indent="0" marL="0">
+              <a:buNone/>
+            </a:pPr>
+            <a:r>
+              <a:rPr lang="en-US" sz="1100" dirty="0">
+                <a:solidFill>
+                  <a:srgbClr val="6B6660"/>
+                </a:solidFill>
+                <a:latin typeface="Calibri" pitchFamily="34" charset="0"/>
+                <a:ea typeface="Calibri" pitchFamily="34" charset="-122"/>
+                <a:cs typeface="Calibri" pitchFamily="34" charset="-120"/>
+              </a:rPr>
+              <a:t>Corbettmaths  •  4 min</a:t>
+            </a:r>
+            <a:endParaRPr lang="en-US" sz="1100" dirty="0"/>
+          </a:p>
+        </p:txBody>
+      </p:sp>
+      <p:sp>
+        <p:nvSpPr>
+          <p:cNvPr id="16" name="Shape 14"/>
+          <p:cNvSpPr/>
+          <p:nvPr/>
+        </p:nvSpPr>
+        <p:spPr>
+          <a:xfrm>
+            <a:off x="457200" y="3611880"/>
+            <a:ext cx="8229600" cy="1051560"/>
+          </a:xfrm>
+          <a:prstGeom prst="rect">
+            <a:avLst/>
+          </a:prstGeom>
+          <a:solidFill>
+            <a:srgbClr val="FFFFFF"/>
+          </a:solidFill>
+          <a:ln/>
+          <a:effectLst>
+            <a:outerShdw sx="100000" sy="100000" kx="0" ky="0" algn="bl" rotWithShape="0" blurRad="76200" dist="25400" dir="8100000">
+              <a:srgbClr val="000000">
+                <a:alpha val="12000"/>
+              </a:srgbClr>
+            </a:outerShdw>
+          </a:effectLst>
+        </p:spPr>
+      </p:sp>
+      <p:sp>
+        <p:nvSpPr>
+          <p:cNvPr id="17" name="Shape 15"/>
+          <p:cNvSpPr/>
+          <p:nvPr/>
+        </p:nvSpPr>
+        <p:spPr>
+          <a:xfrm>
+            <a:off x="457200" y="3611880"/>
+            <a:ext cx="64008" cy="1051560"/>
+          </a:xfrm>
+          <a:prstGeom prst="rect">
+            <a:avLst/>
+          </a:prstGeom>
+          <a:solidFill>
+            <a:srgbClr val="2A9D8F"/>
+          </a:solidFill>
+          <a:ln/>
+        </p:spPr>
+      </p:sp>
+      <p:sp>
+        <p:nvSpPr>
+          <p:cNvPr id="18" name="Text 16"/>
+          <p:cNvSpPr/>
+          <p:nvPr/>
+        </p:nvSpPr>
+        <p:spPr>
+          <a:xfrm>
+            <a:off x="640080" y="3703320"/>
+            <a:ext cx="457200" cy="457200"/>
+          </a:xfrm>
+          <a:prstGeom prst="rect">
+            <a:avLst/>
+          </a:prstGeom>
+          <a:noFill/>
+          <a:ln/>
+        </p:spPr>
+        <p:txBody>
+          <a:bodyPr wrap="square" rtlCol="0" anchor="ctr"/>
+          <a:lstStyle/>
+          <a:p>
+            <a:pPr algn="ctr" indent="0" marL="0">
+              <a:buNone/>
+            </a:pPr>
+            <a:r>
+              <a:rPr lang="en-US" sz="2000" dirty="0">
+                <a:solidFill>
+                  <a:srgbClr val="2A9D8F"/>
+                </a:solidFill>
+                <a:latin typeface="Calibri" pitchFamily="34" charset="0"/>
+                <a:ea typeface="Calibri" pitchFamily="34" charset="-122"/>
+                <a:cs typeface="Calibri" pitchFamily="34" charset="-120"/>
+              </a:rPr>
+              <a:t>▶</a:t>
+            </a:r>
+            <a:endParaRPr lang="en-US" sz="2000" dirty="0"/>
+          </a:p>
+        </p:txBody>
+      </p:sp>
+      <p:sp>
+        <p:nvSpPr>
+          <p:cNvPr id="19" name="Text 17"/>
+          <p:cNvSpPr/>
+          <p:nvPr/>
+        </p:nvSpPr>
+        <p:spPr>
+          <a:xfrm>
+            <a:off x="1188720" y="3685032"/>
+            <a:ext cx="7132320" cy="411480"/>
+          </a:xfrm>
+          <a:prstGeom prst="rect">
+            <a:avLst/>
+          </a:prstGeom>
+          <a:noFill/>
+          <a:ln/>
+        </p:spPr>
+        <p:txBody>
+          <a:bodyPr wrap="square" rtlCol="0" anchor="ctr"/>
+          <a:lstStyle/>
+          <a:p>
+            <a:pPr indent="0" marL="0">
+              <a:buNone/>
+            </a:pPr>
+            <a:r>
+              <a:rPr lang="en-US" sz="1400" b="1" dirty="0">
+                <a:solidFill>
+                  <a:srgbClr val="1B2A4A"/>
+                </a:solidFill>
+                <a:latin typeface="Calibri" pitchFamily="34" charset="0"/>
+                <a:ea typeface="Calibri" pitchFamily="34" charset="-122"/>
+                <a:cs typeface="Calibri" pitchFamily="34" charset="-120"/>
+              </a:rPr>
+              <a:t>Volume of Prisms</a:t>
+            </a:r>
+            <a:endParaRPr lang="en-US" sz="1400" dirty="0"/>
+          </a:p>
+        </p:txBody>
+      </p:sp>
+      <p:sp>
+        <p:nvSpPr>
+          <p:cNvPr id="20" name="Text 18"/>
+          <p:cNvSpPr/>
+          <p:nvPr/>
+        </p:nvSpPr>
+        <p:spPr>
+          <a:xfrm>
+            <a:off x="1188720" y="4069080"/>
+            <a:ext cx="7132320" cy="320040"/>
+          </a:xfrm>
+          <a:prstGeom prst="rect">
+            <a:avLst/>
+          </a:prstGeom>
+          <a:noFill/>
+          <a:ln/>
+        </p:spPr>
+        <p:txBody>
+          <a:bodyPr wrap="square" rtlCol="0" anchor="ctr"/>
+          <a:lstStyle/>
+          <a:p>
+            <a:pPr indent="0" marL="0">
+              <a:buNone/>
+            </a:pPr>
+            <a:r>
+              <a:rPr lang="en-US" sz="1100" dirty="0">
+                <a:solidFill>
+                  <a:srgbClr val="6B6660"/>
+                </a:solidFill>
+                <a:latin typeface="Calibri" pitchFamily="34" charset="0"/>
+                <a:ea typeface="Calibri" pitchFamily="34" charset="-122"/>
+                <a:cs typeface="Calibri" pitchFamily="34" charset="-120"/>
+              </a:rPr>
+              <a:t>Cognito  •  5 min</a:t>
+            </a:r>
+            <a:endParaRPr lang="en-US" sz="1100" dirty="0"/>
+          </a:p>
+        </p:txBody>
+      </p:sp>
+    </p:spTree>
+  </p:cSld>
+  <p:clrMapOvr>
+    <a:masterClrMapping/>
+  </p:clrMapOvr>
+</p:sld>
+</file>
+
+<file path=ppt/slides/slide8.xml><?xml version="1.0" encoding="utf-8"?>
+<p:sld xmlns:a="http://schemas.openxmlformats.org/drawingml/2006/main" xmlns:r="http://schemas.openxmlformats.org/officeDocument/2006/relationships" xmlns:p="http://schemas.openxmlformats.org/presentationml/2006/main">
+  <p:cSld name="Slide 8">
+    <p:spTree>
+      <p:nvGrpSpPr>
+        <p:cNvPr id="1" name=""/>
+        <p:cNvGrpSpPr/>
+        <p:nvPr/>
+      </p:nvGrpSpPr>
+      <p:grpSpPr>
+        <a:xfrm>
+          <a:off x="0" y="0"/>
+          <a:ext cx="0" cy="0"/>
+          <a:chOff x="0" y="0"/>
+          <a:chExt cx="0" cy="0"/>
+        </a:xfrm>
+      </p:grpSpPr>
+      <p:sp>
+        <p:nvSpPr>
+          <p:cNvPr id="2" name="Shape 0"/>
+          <p:cNvSpPr/>
+          <p:nvPr/>
+        </p:nvSpPr>
+        <p:spPr>
+          <a:xfrm>
+            <a:off x="0" y="0"/>
+            <a:ext cx="9144000" cy="5143500"/>
+          </a:xfrm>
+          <a:prstGeom prst="rect">
+            <a:avLst/>
+          </a:prstGeom>
+          <a:solidFill>
+            <a:srgbClr val="1B2A4A"/>
+          </a:solidFill>
+          <a:ln/>
+        </p:spPr>
+      </p:sp>
+      <p:sp>
+        <p:nvSpPr>
+          <p:cNvPr id="3" name="Shape 1"/>
+          <p:cNvSpPr/>
+          <p:nvPr/>
+        </p:nvSpPr>
+        <p:spPr>
+          <a:xfrm>
+            <a:off x="0" y="4777740"/>
+            <a:ext cx="9144000" cy="365760"/>
+          </a:xfrm>
+          <a:prstGeom prst="rect">
+            <a:avLst/>
+          </a:prstGeom>
+          <a:solidFill>
+            <a:srgbClr val="2A9D8F"/>
+          </a:solidFill>
+          <a:ln/>
+        </p:spPr>
+      </p:sp>
+      <p:sp>
+        <p:nvSpPr>
+          <p:cNvPr id="4" name="Text 2"/>
+          <p:cNvSpPr/>
+          <p:nvPr/>
+        </p:nvSpPr>
+        <p:spPr>
+          <a:xfrm>
+            <a:off x="731520" y="1371600"/>
+            <a:ext cx="7680960" cy="914400"/>
+          </a:xfrm>
+          <a:prstGeom prst="rect">
+            <a:avLst/>
+          </a:prstGeom>
+          <a:noFill/>
+          <a:ln/>
+        </p:spPr>
+        <p:txBody>
+          <a:bodyPr wrap="square" rtlCol="0" anchor="ctr"/>
+          <a:lstStyle/>
+          <a:p>
+            <a:pPr algn="ctr" indent="0" marL="0">
+              <a:buNone/>
+            </a:pPr>
+            <a:r>
+              <a:rPr lang="en-US" sz="3600" b="1" dirty="0">
+                <a:solidFill>
+                  <a:srgbClr val="FFFFFF"/>
+                </a:solidFill>
+                <a:latin typeface="Georgia" pitchFamily="34" charset="0"/>
+                <a:ea typeface="Georgia" pitchFamily="34" charset="-122"/>
+                <a:cs typeface="Georgia" pitchFamily="34" charset="-120"/>
+              </a:rPr>
+              <a:t>Review &amp; Practise</a:t>
+            </a:r>
+            <a:endParaRPr lang="en-US" sz="3600" dirty="0"/>
+          </a:p>
+        </p:txBody>
+      </p:sp>
+      <p:sp>
+        <p:nvSpPr>
+          <p:cNvPr id="5" name="Text 3"/>
+          <p:cNvSpPr/>
+          <p:nvPr/>
+        </p:nvSpPr>
+        <p:spPr>
+          <a:xfrm>
+            <a:off x="731520" y="2560320"/>
+            <a:ext cx="7680960" cy="548640"/>
+          </a:xfrm>
+          <a:prstGeom prst="rect">
+            <a:avLst/>
+          </a:prstGeom>
+          <a:noFill/>
+          <a:ln/>
+        </p:spPr>
+        <p:txBody>
+          <a:bodyPr wrap="square" rtlCol="0" anchor="ctr"/>
+          <a:lstStyle/>
+          <a:p>
+            <a:pPr algn="ctr" indent="0" marL="0">
+              <a:buNone/>
+            </a:pPr>
+            <a:r>
+              <a:rPr lang="en-US" sz="2000" dirty="0">
+                <a:solidFill>
+                  <a:srgbClr val="2A9D8F"/>
                 </a:solidFill>
                 <a:latin typeface="Calibri" pitchFamily="34" charset="0"/>
                 <a:ea typeface="Calibri" pitchFamily="34" charset="-122"/>
@@ -2826,7 +4780,7 @@
               </a:rPr>
               <a:t>mrzocchi.com</a:t>
             </a:r>
-            <a:endParaRPr lang="en-US" sz="1100" dirty="0"/>
+            <a:endParaRPr lang="en-US" sz="2000" dirty="0"/>
           </a:p>
         </p:txBody>
       </p:sp>
